--- a/docs/apresentacao/completa/LockMachine_Completa_Canva.pptx
+++ b/docs/apresentacao/completa/LockMachine_Completa_Canva.pptx
@@ -4,6 +4,9 @@
   <p:sldMasterIdLst>
     <p:sldMasterId id="2147483648" r:id="rId1"/>
   </p:sldMasterIdLst>
+  <p:notesMasterIdLst>
+    <p:notesMasterId r:id="rId23"/>
+  </p:notesMasterIdLst>
   <p:sldIdLst>
     <p:sldId id="256" r:id="rId2"/>
     <p:sldId id="257" r:id="rId3"/>
@@ -27,9 +30,6 @@
     <p:sldId id="275" r:id="rId21"/>
     <p:sldId id="276" r:id="rId22"/>
   </p:sldIdLst>
-  <p:notesMasterIdLst>
-    <p:notesMasterId r:id="rId23"/>
-  </p:notesMasterIdLst>
   <p:sldSz cx="12192000" cy="6858000"/>
   <p:notesSz cx="6858000" cy="12192000"/>
   <p:defaultTextStyle>
@@ -127,12 +127,12 @@
   <p:extLst>
     <p:ext uri="{521415D9-36F7-43E2-AB2F-B90AF26B5E84}">
       <p14:sectionLst xmlns:p14="http://schemas.microsoft.com/office/powerpoint/2010/main">
-        <p14:section name="Abertura" id="{791e55b9-ebd6-0845-a627-58ce4d9c41ac}">
+        <p14:section name="Abertura" id="{791E55B9-EBD6-0845-A627-58CE4D9C41AC}">
           <p14:sldIdLst>
             <p14:sldId id="256"/>
           </p14:sldIdLst>
         </p14:section>
-        <p14:section name="O projeto" id="{3bf8e8fb-070f-262d-be95-dd3461c64950}">
+        <p14:section name="O projeto" id="{3BF8E8FB-070F-262D-BE95-DD3461C64950}">
           <p14:sldIdLst>
             <p14:sldId id="257"/>
             <p14:sldId id="258"/>
@@ -141,7 +141,7 @@
             <p14:sldId id="261"/>
           </p14:sldIdLst>
         </p14:section>
-        <p14:section name="Como fizemos" id="{ed37a60f-ca54-7a76-8214-b762f4090ef6}">
+        <p14:section name="Como fizemos" id="{ED37A60F-CA54-7A76-8214-B762F4090EF6}">
           <p14:sldIdLst>
             <p14:sldId id="262"/>
             <p14:sldId id="263"/>
@@ -152,20 +152,20 @@
             <p14:sldId id="268"/>
           </p14:sldIdLst>
         </p14:section>
-        <p14:section name="Demonstração" id="{92220248-d066-464e-ac3a-ca001e84d958}">
+        <p14:section name="Demonstração" id="{92220248-D066-464E-AC3A-CA001E84D958}">
           <p14:sldIdLst>
             <p14:sldId id="269"/>
             <p14:sldId id="270"/>
           </p14:sldIdLst>
         </p14:section>
-        <p14:section name="Andamento" id="{af015750-87b3-6f2f-819e-f0ceb457fedf}">
+        <p14:section name="Andamento" id="{AF015750-87B3-6F2F-819E-F0CEB457FEDF}">
           <p14:sldIdLst>
             <p14:sldId id="271"/>
             <p14:sldId id="272"/>
             <p14:sldId id="273"/>
           </p14:sldIdLst>
         </p14:section>
-        <p14:section name="Encerramento" id="{55b5e87a-33c4-7d68-cfbb-1acaa4e8a847}">
+        <p14:section name="Encerramento" id="{55B5E87A-33C4-7D68-CFBB-1ACAA4E8A847}">
           <p14:sldIdLst>
             <p14:sldId id="274"/>
             <p14:sldId id="275"/>
@@ -203,234 +203,10 @@
           <a:chExt cx="0" cy="0"/>
         </a:xfrm>
       </p:grpSpPr>
-      <p:sp>
-        <p:nvSpPr>
-          <p:cNvPr id="2" name="Header Placeholder 1"/>
-          <p:cNvSpPr>
-            <a:spLocks noGrp="1"/>
-          </p:cNvSpPr>
-          <p:nvPr>
-            <p:ph type="hdr" sz="quarter"/>
-          </p:nvPr>
-        </p:nvSpPr>
-        <p:spPr>
-          <a:xfrm>
-            <a:off x="0" y="0"/>
-            <a:ext cx="2971800" cy="458788"/>
-          </a:xfrm>
-          <a:prstGeom prst="rect">
-            <a:avLst/>
-          </a:prstGeom>
-        </p:spPr>
-        <p:txBody>
-          <a:bodyPr vert="horz" lIns="91440" tIns="45720" rIns="91440" bIns="45720" rtlCol="0"/>
-          <a:lstStyle>
-            <a:lvl1pPr algn="l">
-              <a:defRPr sz="1200"/>
-            </a:lvl1pPr>
-          </a:lstStyle>
-          <a:p>
-            <a:endParaRPr lang="en-US"/>
-          </a:p>
-        </p:txBody>
-      </p:sp>
-      <p:sp>
-        <p:nvSpPr>
-          <p:cNvPr id="3" name="Date Placeholder 2"/>
-          <p:cNvSpPr>
-            <a:spLocks noGrp="1"/>
-          </p:cNvSpPr>
-          <p:nvPr>
-            <p:ph type="dt" idx="1"/>
-          </p:nvPr>
-        </p:nvSpPr>
-        <p:spPr>
-          <a:xfrm>
-            <a:off x="3884613" y="0"/>
-            <a:ext cx="2971800" cy="458788"/>
-          </a:xfrm>
-          <a:prstGeom prst="rect">
-            <a:avLst/>
-          </a:prstGeom>
-        </p:spPr>
-        <p:txBody>
-          <a:bodyPr vert="horz" lIns="91440" tIns="45720" rIns="91440" bIns="45720" rtlCol="0"/>
-          <a:lstStyle>
-            <a:lvl1pPr algn="r">
-              <a:defRPr sz="1200"/>
-            </a:lvl1pPr>
-          </a:lstStyle>
-          <a:p>
-            <a:fld id="{5282F153-3F37-0F45-9E97-73ACFA13230C}" type="datetimeFigureOut">
-              <a:rPr lang="en-US"/>
-              <a:t>7/23/19</a:t>
-            </a:fld>
-            <a:endParaRPr lang="en-US"/>
-          </a:p>
-        </p:txBody>
-      </p:sp>
-      <p:sp>
-        <p:nvSpPr>
-          <p:cNvPr id="4" name="Slide Image Placeholder 3"/>
-          <p:cNvSpPr>
-            <a:spLocks noGrp="1" noRot="1" noChangeAspect="1"/>
-          </p:cNvSpPr>
-          <p:nvPr>
-            <p:ph type="sldImg" idx="2"/>
-          </p:nvPr>
-        </p:nvSpPr>
-        <p:spPr>
-          <a:xfrm>
-            <a:off x="685800" y="1143000"/>
-            <a:ext cx="5486400" cy="3086100"/>
-          </a:xfrm>
-          <a:prstGeom prst="rect">
-            <a:avLst/>
-          </a:prstGeom>
-          <a:noFill/>
-          <a:ln w="12700">
-            <a:solidFill>
-              <a:prstClr val="black"/>
-            </a:solidFill>
-          </a:ln>
-        </p:spPr>
-        <p:txBody>
-          <a:bodyPr vert="horz" lIns="91440" tIns="45720" rIns="91440" bIns="45720" rtlCol="0" anchor="ctr"/>
-          <a:lstStyle/>
-          <a:p>
-            <a:endParaRPr lang="en-US"/>
-          </a:p>
-        </p:txBody>
-      </p:sp>
-      <p:sp>
-        <p:nvSpPr>
-          <p:cNvPr id="5" name="Notes Placeholder 4"/>
-          <p:cNvSpPr>
-            <a:spLocks noGrp="1"/>
-          </p:cNvSpPr>
-          <p:nvPr>
-            <p:ph type="body" sz="quarter" idx="3"/>
-          </p:nvPr>
-        </p:nvSpPr>
-        <p:spPr>
-          <a:xfrm>
-            <a:off x="685800" y="4400550"/>
-            <a:ext cx="5486400" cy="3600450"/>
-          </a:xfrm>
-          <a:prstGeom prst="rect">
-            <a:avLst/>
-          </a:prstGeom>
-        </p:spPr>
-        <p:txBody>
-          <a:bodyPr vert="horz" lIns="91440" tIns="45720" rIns="91440" bIns="45720" rtlCol="0"/>
-          <a:lstStyle/>
-          <a:p>
-            <a:pPr lvl="0"/>
-            <a:r>
-              <a:rPr lang="en-US"/>
-              <a:t>Click to edit Master text styles</a:t>
-            </a:r>
-          </a:p>
-          <a:p>
-            <a:pPr lvl="1"/>
-            <a:r>
-              <a:rPr lang="en-US"/>
-              <a:t>Second level</a:t>
-            </a:r>
-          </a:p>
-          <a:p>
-            <a:pPr lvl="2"/>
-            <a:r>
-              <a:rPr lang="en-US"/>
-              <a:t>Third level</a:t>
-            </a:r>
-          </a:p>
-          <a:p>
-            <a:pPr lvl="3"/>
-            <a:r>
-              <a:rPr lang="en-US"/>
-              <a:t>Fourth level</a:t>
-            </a:r>
-          </a:p>
-          <a:p>
-            <a:pPr lvl="4"/>
-            <a:r>
-              <a:rPr lang="en-US"/>
-              <a:t>Fifth level</a:t>
-            </a:r>
-          </a:p>
-        </p:txBody>
-      </p:sp>
-      <p:sp>
-        <p:nvSpPr>
-          <p:cNvPr id="6" name="Footer Placeholder 5"/>
-          <p:cNvSpPr>
-            <a:spLocks noGrp="1"/>
-          </p:cNvSpPr>
-          <p:nvPr>
-            <p:ph type="ftr" sz="quarter" idx="4"/>
-          </p:nvPr>
-        </p:nvSpPr>
-        <p:spPr>
-          <a:xfrm>
-            <a:off x="0" y="8685213"/>
-            <a:ext cx="2971800" cy="458787"/>
-          </a:xfrm>
-          <a:prstGeom prst="rect">
-            <a:avLst/>
-          </a:prstGeom>
-        </p:spPr>
-        <p:txBody>
-          <a:bodyPr vert="horz" lIns="91440" tIns="45720" rIns="91440" bIns="45720" rtlCol="0" anchor="b"/>
-          <a:lstStyle>
-            <a:lvl1pPr algn="l">
-              <a:defRPr sz="1200"/>
-            </a:lvl1pPr>
-          </a:lstStyle>
-          <a:p>
-            <a:endParaRPr lang="en-US"/>
-          </a:p>
-        </p:txBody>
-      </p:sp>
-      <p:sp>
-        <p:nvSpPr>
-          <p:cNvPr id="7" name="Slide Number Placeholder 6"/>
-          <p:cNvSpPr>
-            <a:spLocks noGrp="1"/>
-          </p:cNvSpPr>
-          <p:nvPr>
-            <p:ph type="sldNum" sz="quarter" idx="5"/>
-          </p:nvPr>
-        </p:nvSpPr>
-        <p:spPr>
-          <a:xfrm>
-            <a:off x="3884613" y="8685213"/>
-            <a:ext cx="2971800" cy="458787"/>
-          </a:xfrm>
-          <a:prstGeom prst="rect">
-            <a:avLst/>
-          </a:prstGeom>
-        </p:spPr>
-        <p:txBody>
-          <a:bodyPr vert="horz" lIns="91440" tIns="45720" rIns="91440" bIns="45720" rtlCol="0" anchor="b"/>
-          <a:lstStyle>
-            <a:lvl1pPr algn="r">
-              <a:defRPr sz="1200"/>
-            </a:lvl1pPr>
-          </a:lstStyle>
-          <a:p>
-            <a:fld id="{CE5E9CC1-C706-0F49-92D6-E571CC5EEA8F}" type="slidenum">
-              <a:rPr lang="en-US"/>
-              <a:t>‹#›</a:t>
-            </a:fld>
-            <a:endParaRPr lang="en-US"/>
-          </a:p>
-        </p:txBody>
-      </p:sp>
     </p:spTree>
     <p:extLst>
       <p:ext uri="{BB962C8B-B14F-4D97-AF65-F5344CB8AC3E}">
-        <p14:creationId xmlns:p14="http://schemas.microsoft.com/office/powerpoint/2010/main" val="1024086991"/>
+        <p14:creationId xmlns:p14="http://schemas.microsoft.com/office/powerpoint/2010/main" val="1862558770"/>
       </p:ext>
     </p:extLst>
   </p:cSld>
@@ -583,7 +359,6 @@
 - Hoje mostramos o andamento: o que já está pronto, o que estamos fazendo agora e o que falta até a apresentação final.
 - Deixe claro desde o início: é um MVP em desenvolvimento, um protótipo acadêmico.</a:t>
             </a:r>
-            <a:endParaRPr lang="en-US" dirty="0"/>
           </a:p>
         </p:txBody>
       </p:sp>
@@ -677,7 +452,6 @@
 - Detalhes que mostram cuidado: ninguém é apagado (desativação lógica, para não perder histórico), matrícula/UID/código são únicos, e senha e token nunca ficam em texto.
 - Se pedirem o diagrama completo: está no Workbench (Database &gt; Reverse Engineer).</a:t>
             </a:r>
-            <a:endParaRPr lang="en-US" dirty="0"/>
           </a:p>
         </p:txBody>
       </p:sp>
@@ -770,7 +544,6 @@
 - Exemplo: o Bruno (fictício) tem a NR-12 vencida, então na prensa ele é bloqueado com o motivo TREINAMENTO_VENCIDO.
 - Por que a ordem importa: o motivo gravado precisa ser um só e sempre o mesmo para a mesma situação, senão o histórico perde valor.</a:t>
             </a:r>
-            <a:endParaRPr lang="en-US" dirty="0"/>
           </a:p>
         </p:txBody>
       </p:sp>
@@ -864,7 +637,6 @@
 - À direita, a regra de ouro: "na dúvida, bloqueia". Se cair a rede, o servidor ou o banco, nega. Cartão desconhecido, bloqueia. Se acabar a energia, a leitora volta bloqueada.
 - Isso é segurança por padrão (fail-safe): o erro nunca libera a máquina.</a:t>
             </a:r>
-            <a:endParaRPr lang="en-US" dirty="0"/>
           </a:p>
         </p:txBody>
       </p:sp>
@@ -955,7 +727,6 @@
 - LGPD: o site tem Política de Privacidade e Termos de Uso, e o histórico mostra o UID do cartão mascarado.
 - Se perguntarem o que é hash: é uma "impressão digital" da senha; dá para conferir se a senha está certa, mas não dá para voltar à senha original.</a:t>
             </a:r>
-            <a:endParaRPr lang="en-US" dirty="0"/>
           </a:p>
         </p:txBody>
       </p:sp>
@@ -1042,7 +813,15 @@
             <a:r>
               <a:rPr lang="en-US" dirty="0"/>
               <a:t>QUEM FALA: Evelyn narra e Leonardo opera o app. Tempo: 3 min.
-ANTES DE SEXTA: deixem o app aberto já logado como administrador (no cPanel, se já estiver publicado, ou no notebook com "php -S localhost:8080"). Testem a demo inteira pelo menos duas vezes.
+ANTES DE SEXTA: deixem o app aberto já logado como </a:t>
+            </a:r>
+            <a:r>
+              <a:rPr lang="en-US"/>
+              <a:t>administrador no site publicado (https://somoslinkwave.com.br/app/). </a:t>
+            </a:r>
+            <a:r>
+              <a:rPr lang="en-US" dirty="0"/>
+              <a:t>Testem a demo inteira pelo menos duas vezes.
 Roteiro (entrada → processamento → resultado):
 1. Mostre o Painel: tentativas do dia, liberadas, bloqueadas, vencimentos e o status das máquinas (a torrezinha de cada uma).
 2. Vá em "Simular leitura", escolha o cartão do Bruno Teixeira e a máquina P-01, clique em "Aproximar cartão".
@@ -1052,7 +831,6 @@
 Plano B: se a internet ou o servidor falharem, usem este slide e o próximo (prints reais do app) e o simulador da página do LockMachine.
 Os nomes (Ana, Bruno, Carla, Diego) são dados fictícios do seed: digam isso.</a:t>
             </a:r>
-            <a:endParaRPr lang="en-US" dirty="0"/>
           </a:p>
         </p:txBody>
       </p:sp>
@@ -1143,10 +921,21 @@
 - Início: o crachá digital e o resumo (quantas capacitações válidas, vencendo, vencidas, quantas máquinas liberadas).
 - Capacitações: cada treinamento com a data de validade e uma barra mostrando quanto falta para vencer.
 - Máquinas: em quais ele pode operar e, se não pode, por quê.
-- O app é um PWA: roda no navegador e, depois que o site estiver publicado com HTTPS, geramos o APK para Android pelo PWABuilder.
+- O app é um PWA: roda no navegador e</a:t>
+            </a:r>
+            <a:r>
+              <a:rPr lang="en-US"/>
+              <a:t>, </a:t>
+            </a:r>
+            <a:r>
+              <a:rPr lang="pt-BR"/>
+              <a:t>como o site já está publicado com HTTPS, o próximo passo é gerar o APK para Android pelo PWABuilder.</a:t>
+            </a:r>
+            <a:r>
+              <a:rPr lang="en-US" dirty="0"/>
+              <a:t>
 - Se der tempo, mostrem ao vivo no celular (entrem com OP-1042).</a:t>
             </a:r>
-            <a:endParaRPr lang="en-US" dirty="0"/>
           </a:p>
         </p:txBody>
       </p:sp>
@@ -1238,7 +1027,6 @@
 - O que já verificamos durante o desenvolvimento: as rotas da API, o login com troca de senha e bloqueio, os seis resultados da regra pelo simulador e o app no celular e no computador.
 - A fazer: executar e registrar os testes, fazer as entrevistas de validação e testar na bancada com cartões reais.</a:t>
             </a:r>
-            <a:endParaRPr lang="en-US" dirty="0"/>
           </a:p>
         </p:txBody>
       </p:sp>
@@ -1326,11 +1114,26 @@
               <a:rPr lang="en-US" dirty="0"/>
               <a:t>QUEM FALA: Cauê. Tempo: 50 s.
 - Resumo do andamento: dos 9 módulos, 6 estão implementados e funcionando juntos: site, simulador, banco, API, app do administrador e app do funcionário.
-- Dois estão em preparação: o APK (depende de publicar o site com HTTPS) e a leitora (o firmware está escrito, falta montar a bancada e testar).
+- Dois estão em preparação</a:t>
+            </a:r>
+            <a:r>
+              <a:rPr lang="en-US"/>
+              <a:t>: </a:t>
+            </a:r>
+            <a:r>
+              <a:rPr lang="pt-BR"/>
+              <a:t>o APK (o site já está publicado com HTTPS; falta gerar)</a:t>
+            </a:r>
+            <a:r>
+              <a:rPr lang="en-US"/>
+              <a:t> </a:t>
+            </a:r>
+            <a:r>
+              <a:rPr lang="en-US" dirty="0"/>
+              <a:t>e a leitora (o firmware está escrito, falta montar a bancada e testar).
 - Um está pendente: os testes formais com evidências.
 - Evidências que já dá para mostrar: o site e o app funcionando (a demo que vocês viram) e o código no GitHub.</a:t>
             </a:r>
-            <a:endParaRPr lang="en-US" dirty="0"/>
           </a:p>
         </p:txBody>
       </p:sp>
@@ -1417,11 +1220,42 @@
             <a:r>
               <a:rPr lang="en-US" dirty="0"/>
               <a:t>QUEM FALA: Evelyn. Tempo: 1 min.
-- O que falta: montar e testar a bancada (o firmware está escrito, mas ainda não foi compilado), gerar o APK (precisa do site publicado com HTTPS), os testes formais e a validação com usuários.
+- O que falta: montar e testar a bancada (o firmware está escrito, mas ainda não foi compilado</a:t>
+            </a:r>
+            <a:r>
+              <a:rPr lang="en-US"/>
+              <a:t>), </a:t>
+            </a:r>
+            <a:r>
+              <a:rPr lang="pt-BR"/>
+              <a:t>gerar o APK (o site já está publicado com HTTPS)</a:t>
+            </a:r>
+            <a:r>
+              <a:rPr lang="en-US"/>
+              <a:t>, </a:t>
+            </a:r>
+            <a:r>
+              <a:rPr lang="en-US" dirty="0"/>
+              <a:t>os testes formais e a validação com usuários.
 - Limites do protótipo, sem medo de falar: é apoio administrativo, não certifica segurança, não substitui NR-12, proteções físicas nem intertravamentos, e o relé é de bancada, não liga numa máquina de verdade.
-- Próximas etapas, em ordem: publicar no cPanel da escola (estamos nisso agora, com o professor), gerar o APK, montar a bancada, executar os testes, registrar as evidências e fechar a documentação para a banca.</a:t>
-            </a:r>
-            <a:endParaRPr lang="en-US" dirty="0"/>
+</a:t>
+            </a:r>
+            <a:r>
+              <a:rPr lang="en-US"/>
+              <a:t>- </a:t>
+            </a:r>
+            <a:r>
+              <a:rPr lang="pt-BR"/>
+              <a:t>Próximas etapas: a publicação já foi feita (o site está no ar em somoslinkwave.com.br). Agora, em ordem: gerar o APK,</a:t>
+            </a:r>
+            <a:r>
+              <a:rPr lang="en-US"/>
+              <a:t> </a:t>
+            </a:r>
+            <a:r>
+              <a:rPr lang="en-US" dirty="0"/>
+              <a:t>montar a bancada, executar os testes, registrar as evidências e fechar a documentação para a banca.</a:t>
+            </a:r>
           </a:p>
         </p:txBody>
       </p:sp>
@@ -1513,7 +1347,6 @@
 - Contribuição: um modelo didático de controle de acesso que pode ser usado em oficinas e laboratórios, como os do próprio SENAI.
 - Feche com a frase do slide: "Sem capacitação válida, sem acesso."</a:t>
             </a:r>
-            <a:endParaRPr lang="en-US" dirty="0"/>
           </a:p>
         </p:txBody>
       </p:sp>
@@ -1606,7 +1439,6 @@
 - Passo 3: a resposta volta para a leitora (verde ou vermelho) e a tentativa vai para o histórico, com o motivo.
 - Se perguntarem "por que não gravar a permissão no cartão?": porque o cartão pode ser copiado e a validade muda com o tempo; a decisão precisa estar num lugar só, o servidor.</a:t>
             </a:r>
-            <a:endParaRPr lang="en-US" dirty="0"/>
           </a:p>
         </p:txBody>
       </p:sp>
@@ -1697,7 +1529,6 @@
 - A lista completa, no padrão ABNT, está no documento do TCC.
 - ANTES DE SEXTA: confira se estas referências batem com as do documento e acrescente as que faltarem.</a:t>
             </a:r>
-            <a:endParaRPr lang="en-US" dirty="0"/>
           </a:p>
         </p:txBody>
       </p:sp>
@@ -1788,7 +1619,6 @@
 - Perguntas: quem responde é quem cuida daquela frente (banco: João; API e regra: Cauê; telas: Evelyn; documentação e testes: Gabriel; visão geral e cronograma: Leonardo). Mas todos devem saber responder o básico de qualquer parte.
 - Perguntas prováveis: "e se a internet cair?" (na dúvida, bloqueia); "dá para burlar com outro cartão?" (o cartão só identifica, cada tentativa fica registrada com o UID); "quando fica pronto?" (próximas etapas do slide 18); "isso substitui a NR-12?" (não, é apoio administrativo).</a:t>
             </a:r>
-            <a:endParaRPr lang="en-US" dirty="0"/>
           </a:p>
         </p:txBody>
       </p:sp>
@@ -1880,7 +1710,6 @@
 - Quem sofre: o supervisor (perde tempo conferindo), o operador (depende de alguém achar o papel) e a escola/empresa (não tem histórico numa auditoria).
 - Seja honesto: esse cenário está descrito no TCC, mas ainda vamos confirmar com entrevistas reais (instrutores das oficinas e técnicos de segurança). O roteiro está em docs/VALIDACAO_ENTREVISTAS.md.</a:t>
             </a:r>
-            <a:endParaRPr lang="en-US" dirty="0"/>
           </a:p>
         </p:txBody>
       </p:sp>
@@ -1972,7 +1801,6 @@
 - Benefícios esperados: ver o que vai vencer antes de vencer, ter histórico para auditoria, e serve tanto para escolas técnicas como o SENAI quanto para empresas.
 - IMPORTANTE (o professor exige): o LockMachine é apoio administrativo. Não substitui NR-12, análise de risco, proteções físicas nem intertravamentos. Falem isso com segurança.</a:t>
             </a:r>
-            <a:endParaRPr lang="en-US" dirty="0"/>
           </a:p>
         </p:txBody>
       </p:sp>
@@ -2063,7 +1891,6 @@
 - Os específicos já mostram o andamento: banco e API prontos; app pronto na web (o APK sai depois da publicação); leitora com firmware escrito, falta montar a bancada; testes formais ainda pendentes.
 - ATENÇÃO, ANTES DE SEXTA: confiram se o texto do objetivo geral e dos específicos está igual ao do documento do TCC. Se estiver diferente, usem o texto do documento.</a:t>
             </a:r>
-            <a:endParaRPr lang="en-US" dirty="0"/>
           </a:p>
         </p:txBody>
       </p:sp>
@@ -2156,7 +1983,6 @@
 - Essenciais: login por perfil, capacitações com validade, validação pelo cartão com o motivo e o histórico.
 - Se perguntarem um requisito não funcional: segurança (senha com hash, sessão protegida), funcionar no celular, rodar na hospedagem da escola, "na dúvida, bloqueia".</a:t>
             </a:r>
-            <a:endParaRPr lang="en-US" dirty="0"/>
           </a:p>
         </p:txBody>
       </p:sp>
@@ -2249,7 +2075,6 @@
 - Divisão: cada um tem uma frente (mostre os crachás), mas todos conhecem o projeto inteiro.
 - Se perguntarem a ferramenta de organização: GitHub para o código e o histórico. (Se usaram Trello ou outro quadro, falem aqui.)</a:t>
             </a:r>
-            <a:endParaRPr lang="en-US" dirty="0"/>
           </a:p>
         </p:txBody>
       </p:sp>
@@ -2342,7 +2167,6 @@
 - Leitora: ESP32 com Wi-Fi e o leitor MFRC522, programados em C++ na Arduino IDE.
 - Por que: tudo roda na hospedagem que a escola já tem (cPanel), não precisa compilar nada para o site funcionar, e um app só atende web e Android.</a:t>
             </a:r>
-            <a:endParaRPr lang="en-US" dirty="0"/>
           </a:p>
         </p:txBody>
       </p:sp>
@@ -2434,7 +2258,6 @@
 - O app (administrador e funcionário) conversa com a mesma API, com login em sessão (cookie HttpOnly, que o JavaScript não consegue ler).
 - Vantagem: a regra fica num lugar só. Se a capacitação vence hoje, amanhã o mesmo cartão já é bloqueado, sem mexer na leitora.</a:t>
             </a:r>
-            <a:endParaRPr lang="en-US" dirty="0"/>
           </a:p>
         </p:txBody>
       </p:sp>
@@ -2512,6 +2335,7 @@
         <a:solidFill>
           <a:srgbClr val="06070A"/>
         </a:solidFill>
+        <a:effectLst/>
       </p:bgPr>
     </p:bg>
     <p:spTree>
@@ -2544,6 +2368,7 @@
         <a:solidFill>
           <a:srgbClr val="06070A"/>
         </a:solidFill>
+        <a:effectLst/>
       </p:bgPr>
     </p:bg>
     <p:spTree>
@@ -2562,14 +2387,14 @@
       </p:grpSpPr>
       <p:pic>
         <p:nvPicPr>
-          <p:cNvPr id="2" name="Image 0" descr="C:/Users/49816471825/Desktop/linkwave-lockmachine/assets/brand/linkwave-simbolo-escuro.png">    </p:cNvPr>
+          <p:cNvPr id="2" name="Image 0" descr="C:/Users/49816471825/Desktop/linkwave-lockmachine/assets/brand/linkwave-simbolo-escuro.png"/>
           <p:cNvPicPr>
             <a:picLocks noChangeAspect="1"/>
           </p:cNvPicPr>
           <p:nvPr/>
         </p:nvPicPr>
         <p:blipFill>
-          <a:blip r:embed="rId1"/>
+          <a:blip r:embed="rId2"/>
           <a:stretch>
             <a:fillRect/>
           </a:stretch>
@@ -2605,7 +2430,7 @@
           <a:bodyPr wrap="square" lIns="0" tIns="0" rIns="0" bIns="0" rtlCol="0" anchor="ctr"/>
           <a:lstStyle/>
           <a:p>
-            <a:pPr indent="0" marL="0">
+            <a:pPr marL="0" indent="0">
               <a:buNone/>
             </a:pPr>
             <a:r>
@@ -2626,9 +2451,11 @@
       <p:sp>
         <p:nvSpPr>
           <p:cNvPr id="4" name="Text 1"/>
-          <p:cNvSpPr/>
+          <p:cNvSpPr>
+            <a:spLocks noGrp="1"/>
+          </p:cNvSpPr>
           <p:nvPr>
-            <p:ph idx="102" type="title" hasCustomPrompt="1"/>
+            <p:ph type="title" idx="102" hasCustomPrompt="1"/>
           </p:nvPr>
         </p:nvSpPr>
         <p:spPr>
@@ -2645,7 +2472,7 @@
         <p:txBody>
           <a:bodyPr wrap="square" rtlCol="0"/>
           <a:lstStyle>
-            <a:lvl1pPr algn="l" indent="0" marL="0">
+            <a:lvl1pPr marL="0" indent="0" algn="l">
               <a:buNone/>
               <a:defRPr lang="en-US" sz="3200" b="1" dirty="0">
                 <a:solidFill>
@@ -2658,7 +2485,7 @@
             </a:lvl1pPr>
           </a:lstStyle>
           <a:p>
-            <a:pPr algn="l" indent="0" marL="0">
+            <a:pPr marL="0" indent="0" algn="l">
               <a:buNone/>
             </a:pPr>
             <a:endParaRPr lang="en-US" sz="3200" dirty="0"/>
@@ -2685,7 +2512,7 @@
           </a:prstGeom>
           <a:extLst>
             <a:ext uri="{C572A759-6A51-4108-AA02-DFA0A04FC94B}">
-              <ma14:wrappingTextBoxFlag xmlns:ma14="http://schemas.microsoft.com/office/mac/drawingml/2011/main" val="0"/>
+              <ma14:wrappingTextBoxFlag xmlns="" xmlns:ma14="http://schemas.microsoft.com/office/mac/drawingml/2011/main" val="0"/>
             </a:ext>
           </a:extLst>
         </p:spPr>
@@ -2706,8 +2533,8 @@
           <a:p>
             <a:pPr algn="r"/>
             <a:fld id="{F7021451-1387-4CA6-816F-3879F97B5CBC}" type="slidenum">
-              <a:rPr b="0" lang="en-US"/>
-              <a:t>1003</a:t>
+              <a:rPr lang="en-US" b="0"/>
+              <a:t>‹nº›</a:t>
             </a:fld>
             <a:endParaRPr lang="en-US"/>
           </a:p>
@@ -2724,6 +2551,11 @@
 <file path=ppt/slideMasters/slideMaster1.xml><?xml version="1.0" encoding="utf-8"?>
 <p:sldMaster xmlns:a="http://schemas.openxmlformats.org/drawingml/2006/main" xmlns:r="http://schemas.openxmlformats.org/officeDocument/2006/relationships" xmlns:p="http://schemas.openxmlformats.org/presentationml/2006/main">
   <p:cSld>
+    <p:bg>
+      <p:bgRef idx="1001">
+        <a:schemeClr val="bg1"/>
+      </p:bgRef>
+    </p:bg>
     <p:spTree>
       <p:nvGrpSpPr>
         <p:cNvPr id="1" name=""/>
@@ -2758,7 +2590,7 @@
           </a:prstGeom>
           <a:extLst>
             <a:ext uri="{C572A759-6A51-4108-AA02-DFA0A04FC94B}">
-              <ma14:wrappingTextBoxFlag xmlns:ma14="http://schemas.microsoft.com/office/mac/drawingml/2011/main" val="0"/>
+              <ma14:wrappingTextBoxFlag xmlns="" xmlns:ma14="http://schemas.microsoft.com/office/mac/drawingml/2011/main" val="0"/>
             </a:ext>
           </a:extLst>
         </p:spPr>
@@ -2779,8 +2611,8 @@
           <a:p>
             <a:pPr algn="r"/>
             <a:fld id="{F7021451-1387-4CA6-816F-3879F97B5CBC}" type="slidenum">
-              <a:rPr b="0" lang="en-US"/>
-              <a:t>null</a:t>
+              <a:rPr lang="en-US" b="0"/>
+              <a:t>‹nº›</a:t>
             </a:fld>
             <a:endParaRPr lang="en-US"/>
           </a:p>
@@ -3067,55 +2899,7 @@
       </p:grpSpPr>
       <p:pic>
         <p:nvPicPr>
-          <p:cNvPr id="2" name="Image 0" descr="C:/Users/49816471825/AppData/Local/Temp/lockmachine/deck/slides-img/capa-prensa.png">    </p:cNvPr>
-          <p:cNvPicPr>
-            <a:picLocks noChangeAspect="1"/>
-          </p:cNvPicPr>
-          <p:nvPr/>
-        </p:nvPicPr>
-        <p:blipFill>
-          <a:blip r:embed="rId1"/>
-          <a:stretch>
-            <a:fillRect/>
-          </a:stretch>
-        </p:blipFill>
-        <p:spPr>
-          <a:xfrm>
-            <a:off x="6312103" y="0"/>
-            <a:ext cx="5879592" cy="6858000"/>
-          </a:xfrm>
-          <a:prstGeom prst="rect">
-            <a:avLst/>
-          </a:prstGeom>
-        </p:spPr>
-      </p:pic>
-      <p:pic>
-        <p:nvPicPr>
-          <p:cNvPr id="3" name="Image 1" descr="C:/Users/49816471825/AppData/Local/Temp/lockmachine/deck/slides-img/degrade.png">    </p:cNvPr>
-          <p:cNvPicPr>
-            <a:picLocks noChangeAspect="1"/>
-          </p:cNvPicPr>
-          <p:nvPr/>
-        </p:nvPicPr>
-        <p:blipFill>
-          <a:blip r:embed="rId2"/>
-          <a:stretch>
-            <a:fillRect/>
-          </a:stretch>
-        </p:blipFill>
-        <p:spPr>
-          <a:xfrm>
-            <a:off x="6309360" y="0"/>
-            <a:ext cx="2011680" cy="6858000"/>
-          </a:xfrm>
-          <a:prstGeom prst="rect">
-            <a:avLst/>
-          </a:prstGeom>
-        </p:spPr>
-      </p:pic>
-      <p:pic>
-        <p:nvPicPr>
-          <p:cNvPr id="4" name="Image 2" descr="C:/Users/49816471825/Desktop/linkwave-lockmachine/assets/brand/lockmachine-horizontal-escuro.png">    </p:cNvPr>
+          <p:cNvPr id="2" name="Image 0" descr="C:/Users/49816471825/AppData/Local/Temp/lockmachine/deck/slides-img/capa-prensa.png"/>
           <p:cNvPicPr>
             <a:picLocks noChangeAspect="1"/>
           </p:cNvPicPr>
@@ -3129,6 +2913,54 @@
         </p:blipFill>
         <p:spPr>
           <a:xfrm>
+            <a:off x="6312103" y="0"/>
+            <a:ext cx="5879592" cy="6858000"/>
+          </a:xfrm>
+          <a:prstGeom prst="rect">
+            <a:avLst/>
+          </a:prstGeom>
+        </p:spPr>
+      </p:pic>
+      <p:pic>
+        <p:nvPicPr>
+          <p:cNvPr id="3" name="Image 1" descr="C:/Users/49816471825/AppData/Local/Temp/lockmachine/deck/slides-img/degrade.png"/>
+          <p:cNvPicPr>
+            <a:picLocks noChangeAspect="1"/>
+          </p:cNvPicPr>
+          <p:nvPr/>
+        </p:nvPicPr>
+        <p:blipFill>
+          <a:blip r:embed="rId4"/>
+          <a:stretch>
+            <a:fillRect/>
+          </a:stretch>
+        </p:blipFill>
+        <p:spPr>
+          <a:xfrm>
+            <a:off x="6309360" y="0"/>
+            <a:ext cx="2011680" cy="6858000"/>
+          </a:xfrm>
+          <a:prstGeom prst="rect">
+            <a:avLst/>
+          </a:prstGeom>
+        </p:spPr>
+      </p:pic>
+      <p:pic>
+        <p:nvPicPr>
+          <p:cNvPr id="4" name="Image 2" descr="C:/Users/49816471825/Desktop/linkwave-lockmachine/assets/brand/lockmachine-horizontal-escuro.png"/>
+          <p:cNvPicPr>
+            <a:picLocks noChangeAspect="1"/>
+          </p:cNvPicPr>
+          <p:nvPr/>
+        </p:nvPicPr>
+        <p:blipFill>
+          <a:blip r:embed="rId5"/>
+          <a:stretch>
+            <a:fillRect/>
+          </a:stretch>
+        </p:blipFill>
+        <p:spPr>
+          <a:xfrm>
             <a:off x="685800" y="731520"/>
             <a:ext cx="3291840" cy="488911"/>
           </a:xfrm>
@@ -3158,7 +2990,7 @@
           <a:bodyPr wrap="square" lIns="0" tIns="0" rIns="0" bIns="0" rtlCol="0" anchor="t"/>
           <a:lstStyle/>
           <a:p>
-            <a:pPr indent="0" marL="0">
+            <a:pPr marL="0" indent="0">
               <a:lnSpc>
                 <a:spcPct val="95000"/>
               </a:lnSpc>
@@ -3200,7 +3032,7 @@
           <a:bodyPr wrap="square" lIns="0" tIns="0" rIns="0" bIns="0" rtlCol="0" anchor="t"/>
           <a:lstStyle/>
           <a:p>
-            <a:pPr indent="0" marL="0">
+            <a:pPr marL="0" indent="0">
               <a:buNone/>
             </a:pPr>
             <a:r>
@@ -3251,7 +3083,7 @@
           <a:bodyPr wrap="square" lIns="0" tIns="0" rIns="0" bIns="0" rtlCol="0" anchor="ctr"/>
           <a:lstStyle/>
           <a:p>
-            <a:pPr algn="ctr" indent="0" marL="0">
+            <a:pPr marL="0" indent="0" algn="ctr">
               <a:buNone/>
             </a:pPr>
             <a:r>
@@ -3290,11 +3122,11 @@
           <a:bodyPr wrap="square" lIns="0" tIns="0" rIns="0" bIns="0" rtlCol="0" anchor="t"/>
           <a:lstStyle/>
           <a:p>
-            <a:pPr indent="0" marL="0">
-              <a:buNone/>
-            </a:pPr>
-            <a:r>
-              <a:rPr lang="en-US" sz="1000" b="1" spc="120" kern="0" dirty="0">
+            <a:pPr marL="0" indent="0">
+              <a:buNone/>
+            </a:pPr>
+            <a:r>
+              <a:rPr lang="en-US" sz="1000" b="1" kern="0" spc="120" dirty="0">
                 <a:solidFill>
                   <a:srgbClr val="7D849C"/>
                 </a:solidFill>
@@ -3329,7 +3161,7 @@
           <a:bodyPr wrap="square" lIns="0" tIns="0" rIns="0" bIns="0" rtlCol="0" anchor="t"/>
           <a:lstStyle/>
           <a:p>
-            <a:pPr indent="0" marL="0">
+            <a:pPr marL="0" indent="0">
               <a:lnSpc>
                 <a:spcPct val="120000"/>
               </a:lnSpc>
@@ -3349,7 +3181,7 @@
             <a:endParaRPr lang="en-US" sz="1300" dirty="0"/>
           </a:p>
           <a:p>
-            <a:pPr indent="0" marL="0">
+            <a:pPr marL="0" indent="0">
               <a:lnSpc>
                 <a:spcPct val="120000"/>
               </a:lnSpc>
@@ -3369,7 +3201,7 @@
             <a:endParaRPr lang="en-US" sz="1300" dirty="0"/>
           </a:p>
           <a:p>
-            <a:pPr indent="0" marL="0">
+            <a:pPr marL="0" indent="0">
               <a:lnSpc>
                 <a:spcPct val="120000"/>
               </a:lnSpc>
@@ -3389,7 +3221,7 @@
             <a:endParaRPr lang="en-US" sz="1300" dirty="0"/>
           </a:p>
           <a:p>
-            <a:pPr indent="0" marL="0">
+            <a:pPr marL="0" indent="0">
               <a:lnSpc>
                 <a:spcPct val="120000"/>
               </a:lnSpc>
@@ -3409,7 +3241,7 @@
             <a:endParaRPr lang="en-US" sz="1300" dirty="0"/>
           </a:p>
           <a:p>
-            <a:pPr indent="0" marL="0">
+            <a:pPr marL="0" indent="0">
               <a:lnSpc>
                 <a:spcPct val="120000"/>
               </a:lnSpc>
@@ -3451,11 +3283,11 @@
           <a:bodyPr wrap="square" lIns="0" tIns="0" rIns="0" bIns="0" rtlCol="0" anchor="t"/>
           <a:lstStyle/>
           <a:p>
-            <a:pPr indent="0" marL="0">
-              <a:buNone/>
-            </a:pPr>
-            <a:r>
-              <a:rPr lang="en-US" sz="1000" b="1" spc="120" kern="0" dirty="0">
+            <a:pPr marL="0" indent="0">
+              <a:buNone/>
+            </a:pPr>
+            <a:r>
+              <a:rPr lang="en-US" sz="1000" b="1" kern="0" spc="120" dirty="0">
                 <a:solidFill>
                   <a:srgbClr val="7D849C"/>
                 </a:solidFill>
@@ -3490,7 +3322,7 @@
           <a:bodyPr wrap="square" lIns="0" tIns="0" rIns="0" bIns="0" rtlCol="0" anchor="t"/>
           <a:lstStyle/>
           <a:p>
-            <a:pPr indent="0" marL="0">
+            <a:pPr marL="0" indent="0">
               <a:buNone/>
             </a:pPr>
             <a:r>
@@ -3529,11 +3361,11 @@
           <a:bodyPr wrap="square" lIns="0" tIns="0" rIns="0" bIns="0" rtlCol="0" anchor="t"/>
           <a:lstStyle/>
           <a:p>
-            <a:pPr indent="0" marL="0">
-              <a:buNone/>
-            </a:pPr>
-            <a:r>
-              <a:rPr lang="en-US" sz="1000" b="1" spc="120" kern="0" dirty="0">
+            <a:pPr marL="0" indent="0">
+              <a:buNone/>
+            </a:pPr>
+            <a:r>
+              <a:rPr lang="en-US" sz="1000" b="1" kern="0" spc="120" dirty="0">
                 <a:solidFill>
                   <a:srgbClr val="7D849C"/>
                 </a:solidFill>
@@ -3568,7 +3400,7 @@
           <a:bodyPr wrap="square" lIns="0" tIns="0" rIns="0" bIns="0" rtlCol="0" anchor="t"/>
           <a:lstStyle/>
           <a:p>
-            <a:pPr indent="0" marL="0">
+            <a:pPr marL="0" indent="0">
               <a:lnSpc>
                 <a:spcPct val="110000"/>
               </a:lnSpc>
@@ -3588,7 +3420,7 @@
             <a:endParaRPr lang="en-US" sz="1300" dirty="0"/>
           </a:p>
           <a:p>
-            <a:pPr indent="0" marL="0">
+            <a:pPr marL="0" indent="0">
               <a:lnSpc>
                 <a:spcPct val="110000"/>
               </a:lnSpc>
@@ -3611,14 +3443,14 @@
       </p:sp>
       <p:pic>
         <p:nvPicPr>
-          <p:cNvPr id="14" name="Image 3" descr="C:/Users/49816471825/Desktop/linkwave-lockmachine/assets/brand/linkwave-horizontal-escuro.png">    </p:cNvPr>
+          <p:cNvPr id="14" name="Image 3" descr="C:/Users/49816471825/Desktop/linkwave-lockmachine/assets/brand/linkwave-horizontal-escuro.png"/>
           <p:cNvPicPr>
             <a:picLocks noChangeAspect="1"/>
           </p:cNvPicPr>
           <p:nvPr/>
         </p:nvPicPr>
         <p:blipFill>
-          <a:blip r:embed="rId4"/>
+          <a:blip r:embed="rId6"/>
           <a:stretch>
             <a:fillRect/>
           </a:stretch>
@@ -3654,7 +3486,7 @@
           <a:bodyPr wrap="square" lIns="0" tIns="0" rIns="0" bIns="0" rtlCol="0" anchor="ctr"/>
           <a:lstStyle/>
           <a:p>
-            <a:pPr indent="0" marL="0">
+            <a:pPr marL="0" indent="0">
               <a:buNone/>
             </a:pPr>
             <a:r>
@@ -3700,9 +3532,11 @@
       <p:sp>
         <p:nvSpPr>
           <p:cNvPr id="2" name="Text 1"/>
-          <p:cNvSpPr/>
+          <p:cNvSpPr>
+            <a:spLocks noGrp="1"/>
+          </p:cNvSpPr>
           <p:nvPr>
-            <p:ph idx="102" type="title" hasCustomPrompt="1"/>
+            <p:ph type="title" idx="102" hasCustomPrompt="1"/>
           </p:nvPr>
         </p:nvSpPr>
         <p:spPr>
@@ -3720,7 +3554,7 @@
           <a:bodyPr wrap="square" lIns="0" tIns="0" rIns="0" bIns="0" rtlCol="0" anchor="ctr"/>
           <a:lstStyle/>
           <a:p>
-            <a:pPr algn="l" indent="0" marL="0">
+            <a:pPr marL="0" indent="0" algn="l">
               <a:buNone/>
             </a:pPr>
             <a:r>
@@ -3734,9 +3568,6 @@
               </a:rPr>
               <a:t>09  </a:t>
             </a:r>
-            <a:pPr algn="l" indent="0" marL="0">
-              <a:buNone/>
-            </a:pPr>
             <a:r>
               <a:rPr lang="en-US" sz="3200" b="1" dirty="0">
                 <a:solidFill>
@@ -3773,7 +3604,7 @@
           <a:bodyPr wrap="square" lIns="0" tIns="0" rIns="0" bIns="0" rtlCol="0" anchor="t"/>
           <a:lstStyle/>
           <a:p>
-            <a:pPr indent="0" marL="0">
+            <a:pPr marL="0" indent="0">
               <a:buNone/>
             </a:pPr>
             <a:r>
@@ -3839,11 +3670,11 @@
           <a:bodyPr wrap="square" lIns="0" tIns="0" rIns="0" bIns="0" rtlCol="0" anchor="t"/>
           <a:lstStyle/>
           <a:p>
-            <a:pPr indent="0" marL="0">
-              <a:buNone/>
-            </a:pPr>
-            <a:r>
-              <a:rPr lang="en-US" sz="1000" b="1" spc="120" kern="0" dirty="0">
+            <a:pPr marL="0" indent="0">
+              <a:buNone/>
+            </a:pPr>
+            <a:r>
+              <a:rPr lang="en-US" sz="1000" b="1" kern="0" spc="120" dirty="0">
                 <a:solidFill>
                   <a:srgbClr val="8C9BFF"/>
                 </a:solidFill>
@@ -3900,7 +3731,7 @@
           <a:bodyPr wrap="square" lIns="0" tIns="0" rIns="0" bIns="0" rtlCol="0" anchor="ctr"/>
           <a:lstStyle/>
           <a:p>
-            <a:pPr indent="0" marL="0">
+            <a:pPr marL="0" indent="0">
               <a:buNone/>
             </a:pPr>
             <a:r>
@@ -3917,7 +3748,7 @@
             <a:endParaRPr lang="en-US" sz="1400" dirty="0"/>
           </a:p>
           <a:p>
-            <a:pPr indent="0" marL="0">
+            <a:pPr marL="0" indent="0">
               <a:buNone/>
             </a:pPr>
             <a:r>
@@ -3978,7 +3809,7 @@
           <a:bodyPr wrap="square" lIns="0" tIns="0" rIns="0" bIns="0" rtlCol="0" anchor="ctr"/>
           <a:lstStyle/>
           <a:p>
-            <a:pPr indent="0" marL="0">
+            <a:pPr marL="0" indent="0">
               <a:buNone/>
             </a:pPr>
             <a:r>
@@ -3995,7 +3826,7 @@
             <a:endParaRPr lang="en-US" sz="1400" dirty="0"/>
           </a:p>
           <a:p>
-            <a:pPr indent="0" marL="0">
+            <a:pPr marL="0" indent="0">
               <a:buNone/>
             </a:pPr>
             <a:r>
@@ -4061,11 +3892,11 @@
           <a:bodyPr wrap="square" lIns="0" tIns="0" rIns="0" bIns="0" rtlCol="0" anchor="t"/>
           <a:lstStyle/>
           <a:p>
-            <a:pPr indent="0" marL="0">
-              <a:buNone/>
-            </a:pPr>
-            <a:r>
-              <a:rPr lang="en-US" sz="1000" b="1" spc="120" kern="0" dirty="0">
+            <a:pPr marL="0" indent="0">
+              <a:buNone/>
+            </a:pPr>
+            <a:r>
+              <a:rPr lang="en-US" sz="1000" b="1" kern="0" spc="120" dirty="0">
                 <a:solidFill>
                   <a:srgbClr val="FFD23F"/>
                 </a:solidFill>
@@ -4122,7 +3953,7 @@
           <a:bodyPr wrap="square" lIns="0" tIns="0" rIns="0" bIns="0" rtlCol="0" anchor="ctr"/>
           <a:lstStyle/>
           <a:p>
-            <a:pPr indent="0" marL="0">
+            <a:pPr marL="0" indent="0">
               <a:buNone/>
             </a:pPr>
             <a:r>
@@ -4139,7 +3970,7 @@
             <a:endParaRPr lang="en-US" sz="1400" dirty="0"/>
           </a:p>
           <a:p>
-            <a:pPr indent="0" marL="0">
+            <a:pPr marL="0" indent="0">
               <a:buNone/>
             </a:pPr>
             <a:r>
@@ -4200,7 +4031,7 @@
           <a:bodyPr wrap="square" lIns="0" tIns="0" rIns="0" bIns="0" rtlCol="0" anchor="ctr"/>
           <a:lstStyle/>
           <a:p>
-            <a:pPr indent="0" marL="0">
+            <a:pPr marL="0" indent="0">
               <a:buNone/>
             </a:pPr>
             <a:r>
@@ -4217,7 +4048,7 @@
             <a:endParaRPr lang="en-US" sz="1400" dirty="0"/>
           </a:p>
           <a:p>
-            <a:pPr indent="0" marL="0">
+            <a:pPr marL="0" indent="0">
               <a:buNone/>
             </a:pPr>
             <a:r>
@@ -4278,7 +4109,7 @@
           <a:bodyPr wrap="square" lIns="0" tIns="0" rIns="0" bIns="0" rtlCol="0" anchor="ctr"/>
           <a:lstStyle/>
           <a:p>
-            <a:pPr indent="0" marL="0">
+            <a:pPr marL="0" indent="0">
               <a:buNone/>
             </a:pPr>
             <a:r>
@@ -4295,7 +4126,7 @@
             <a:endParaRPr lang="en-US" sz="1400" dirty="0"/>
           </a:p>
           <a:p>
-            <a:pPr indent="0" marL="0">
+            <a:pPr marL="0" indent="0">
               <a:buNone/>
             </a:pPr>
             <a:r>
@@ -4361,11 +4192,11 @@
           <a:bodyPr wrap="square" lIns="0" tIns="0" rIns="0" bIns="0" rtlCol="0" anchor="t"/>
           <a:lstStyle/>
           <a:p>
-            <a:pPr indent="0" marL="0">
-              <a:buNone/>
-            </a:pPr>
-            <a:r>
-              <a:rPr lang="en-US" sz="1000" b="1" spc="120" kern="0" dirty="0">
+            <a:pPr marL="0" indent="0">
+              <a:buNone/>
+            </a:pPr>
+            <a:r>
+              <a:rPr lang="en-US" sz="1000" b="1" kern="0" spc="120" dirty="0">
                 <a:solidFill>
                   <a:srgbClr val="22D07B"/>
                 </a:solidFill>
@@ -4422,7 +4253,7 @@
           <a:bodyPr wrap="square" lIns="0" tIns="0" rIns="0" bIns="0" rtlCol="0" anchor="ctr"/>
           <a:lstStyle/>
           <a:p>
-            <a:pPr indent="0" marL="0">
+            <a:pPr marL="0" indent="0">
               <a:buNone/>
             </a:pPr>
             <a:r>
@@ -4439,7 +4270,7 @@
             <a:endParaRPr lang="en-US" sz="1400" dirty="0"/>
           </a:p>
           <a:p>
-            <a:pPr indent="0" marL="0">
+            <a:pPr marL="0" indent="0">
               <a:buNone/>
             </a:pPr>
             <a:r>
@@ -4500,7 +4331,7 @@
           <a:bodyPr wrap="square" lIns="0" tIns="0" rIns="0" bIns="0" rtlCol="0" anchor="ctr"/>
           <a:lstStyle/>
           <a:p>
-            <a:pPr indent="0" marL="0">
+            <a:pPr marL="0" indent="0">
               <a:buNone/>
             </a:pPr>
             <a:r>
@@ -4517,7 +4348,7 @@
             <a:endParaRPr lang="en-US" sz="1400" dirty="0"/>
           </a:p>
           <a:p>
-            <a:pPr indent="0" marL="0">
+            <a:pPr marL="0" indent="0">
               <a:buNone/>
             </a:pPr>
             <a:r>
@@ -4703,11 +4534,11 @@
           <a:bodyPr wrap="square" lIns="0" tIns="0" rIns="0" bIns="0" rtlCol="0" anchor="t"/>
           <a:lstStyle/>
           <a:p>
-            <a:pPr indent="0" marL="0">
-              <a:buNone/>
-            </a:pPr>
-            <a:r>
-              <a:rPr lang="en-US" sz="1000" b="1" spc="120" kern="0" dirty="0">
+            <a:pPr marL="0" indent="0">
+              <a:buNone/>
+            </a:pPr>
+            <a:r>
+              <a:rPr lang="en-US" sz="1000" b="1" kern="0" spc="120" dirty="0">
                 <a:solidFill>
                   <a:srgbClr val="FF7A6F"/>
                 </a:solidFill>
@@ -4742,7 +4573,7 @@
           <a:bodyPr wrap="square" lIns="0" tIns="0" rIns="0" bIns="0" rtlCol="0" anchor="ctr"/>
           <a:lstStyle/>
           <a:p>
-            <a:pPr indent="0" marL="0">
+            <a:pPr marL="0" indent="0">
               <a:buNone/>
             </a:pPr>
             <a:r>
@@ -4756,9 +4587,6 @@
               </a:rPr>
               <a:t>acessos  </a:t>
             </a:r>
-            <a:pPr indent="0" marL="0">
-              <a:buNone/>
-            </a:pPr>
             <a:r>
               <a:rPr lang="en-US" sz="1300" dirty="0">
                 <a:solidFill>
@@ -4837,7 +4665,7 @@
           <a:bodyPr wrap="square" lIns="0" tIns="0" rIns="0" bIns="0" rtlCol="0" anchor="ctr"/>
           <a:lstStyle/>
           <a:p>
-            <a:pPr indent="0" marL="0">
+            <a:pPr marL="0" indent="0">
               <a:buNone/>
             </a:pPr>
             <a:r>
@@ -4918,7 +4746,7 @@
           <a:bodyPr wrap="square" lIns="0" tIns="0" rIns="0" bIns="0" rtlCol="0" anchor="ctr"/>
           <a:lstStyle/>
           <a:p>
-            <a:pPr indent="0" marL="0">
+            <a:pPr marL="0" indent="0">
               <a:buNone/>
             </a:pPr>
             <a:r>
@@ -4999,7 +4827,7 @@
           <a:bodyPr wrap="square" lIns="0" tIns="0" rIns="0" bIns="0" rtlCol="0" anchor="ctr"/>
           <a:lstStyle/>
           <a:p>
-            <a:pPr indent="0" marL="0">
+            <a:pPr marL="0" indent="0">
               <a:buNone/>
             </a:pPr>
             <a:r>
@@ -5019,7 +4847,7 @@
       </p:sp>
       <p:sp>
         <p:nvSpPr>
-          <p:cNvPr id="25" name="Slide Number Placeholder 0"/>
+          <p:cNvPr id="41" name="Slide Number Placeholder 0"/>
           <p:cNvSpPr>
             <a:spLocks noGrp="1"/>
           </p:cNvSpPr>
@@ -5037,7 +4865,7 @@
           </a:prstGeom>
           <a:extLst>
             <a:ext uri="{C572A759-6A51-4108-AA02-DFA0A04FC94B}">
-              <ma14:wrappingTextBoxFlag xmlns:ma14="http://schemas.microsoft.com/office/mac/drawingml/2011/main" val="0"/>
+              <ma14:wrappingTextBoxFlag xmlns="" xmlns:ma14="http://schemas.microsoft.com/office/mac/drawingml/2011/main" val="0"/>
             </a:ext>
           </a:extLst>
         </p:spPr>
@@ -5058,7 +4886,7 @@
           <a:p>
             <a:pPr algn="r"/>
             <a:fld id="{F7021451-1387-4CA6-816F-3879F97B5CBC}" type="slidenum">
-              <a:rPr b="0" lang="en-US"/>
+              <a:rPr lang="en-US" b="0"/>
               <a:t>10</a:t>
             </a:fld>
             <a:endParaRPr lang="en-US"/>
@@ -5093,9 +4921,11 @@
       <p:sp>
         <p:nvSpPr>
           <p:cNvPr id="2" name="Text 1"/>
-          <p:cNvSpPr/>
+          <p:cNvSpPr>
+            <a:spLocks noGrp="1"/>
+          </p:cNvSpPr>
           <p:nvPr>
-            <p:ph idx="102" type="title" hasCustomPrompt="1"/>
+            <p:ph type="title" idx="102" hasCustomPrompt="1"/>
           </p:nvPr>
         </p:nvSpPr>
         <p:spPr>
@@ -5113,7 +4943,7 @@
           <a:bodyPr wrap="square" lIns="0" tIns="0" rIns="0" bIns="0" rtlCol="0" anchor="ctr"/>
           <a:lstStyle/>
           <a:p>
-            <a:pPr algn="l" indent="0" marL="0">
+            <a:pPr marL="0" indent="0" algn="l">
               <a:buNone/>
             </a:pPr>
             <a:r>
@@ -5127,9 +4957,6 @@
               </a:rPr>
               <a:t>10  </a:t>
             </a:r>
-            <a:pPr algn="l" indent="0" marL="0">
-              <a:buNone/>
-            </a:pPr>
             <a:r>
               <a:rPr lang="en-US" sz="3200" b="1" dirty="0">
                 <a:solidFill>
@@ -5166,7 +4993,7 @@
           <a:bodyPr wrap="square" lIns="0" tIns="0" rIns="0" bIns="0" rtlCol="0" anchor="t"/>
           <a:lstStyle/>
           <a:p>
-            <a:pPr indent="0" marL="0">
+            <a:pPr marL="0" indent="0">
               <a:buNone/>
             </a:pPr>
             <a:r>
@@ -5217,7 +5044,7 @@
           <a:bodyPr wrap="square" lIns="0" tIns="0" rIns="0" bIns="0" rtlCol="0" anchor="ctr"/>
           <a:lstStyle/>
           <a:p>
-            <a:pPr algn="ctr" indent="0" marL="0">
+            <a:pPr marL="0" indent="0" algn="ctr">
               <a:buNone/>
             </a:pPr>
             <a:r>
@@ -5283,7 +5110,7 @@
           <a:bodyPr wrap="square" lIns="0" tIns="0" rIns="0" bIns="0" rtlCol="0" anchor="ctr"/>
           <a:lstStyle/>
           <a:p>
-            <a:pPr algn="ctr" indent="0" marL="0">
+            <a:pPr marL="0" indent="0" algn="ctr">
               <a:buNone/>
             </a:pPr>
             <a:r>
@@ -5382,63 +5209,12 @@
           <a:bodyPr wrap="square" lIns="50800" tIns="50800" rIns="50800" bIns="50800" rtlCol="0" anchor="ctr"/>
           <a:lstStyle/>
           <a:p>
-            <a:pPr algn="ctr" indent="0" marL="0">
+            <a:pPr marL="0" indent="0" algn="ctr">
               <a:spcAft>
                 <a:spcPts val="200"/>
               </a:spcAft>
               <a:buNone/>
             </a:pPr>
-            <a:r>
-              <a:rPr lang="en-US" sz="1300" b="1" dirty="0">
-                <a:solidFill>
-                  <a:srgbClr val="FF7A6F"/>
-                </a:solidFill>
-                <a:latin typeface="Archivo" pitchFamily="34" charset="0"/>
-                <a:ea typeface="Archivo" pitchFamily="34" charset="-122"/>
-                <a:cs typeface="Archivo" pitchFamily="34" charset="-120"/>
-              </a:rPr>
-              <a:t>Bloqueia</a:t>
-            </a:r>
-            <a:endParaRPr lang="en-US" sz="1300" dirty="0"/>
-          </a:p>
-          <a:p>
-            <a:pPr algn="ctr" indent="0" marL="0">
-              <a:spcAft>
-                <a:spcPts val="200"/>
-              </a:spcAft>
-              <a:buNone/>
-            </a:pPr>
-            <a:r>
-              <a:rPr lang="en-US" sz="1000" dirty="0">
-                <a:solidFill>
-                  <a:srgbClr val="ECEEF4"/>
-                </a:solidFill>
-                <a:latin typeface="Martian Mono" pitchFamily="34" charset="0"/>
-                <a:ea typeface="Martian Mono" pitchFamily="34" charset="-122"/>
-                <a:cs typeface="Martian Mono" pitchFamily="34" charset="-120"/>
-              </a:rPr>
-              <a:t>CARTAO_</a:t>
-            </a:r>
-            <a:endParaRPr lang="en-US" sz="1300" dirty="0"/>
-          </a:p>
-          <a:p>
-            <a:pPr algn="ctr" indent="0" marL="0">
-              <a:spcAft>
-                <a:spcPts val="200"/>
-              </a:spcAft>
-              <a:buNone/>
-            </a:pPr>
-            <a:r>
-              <a:rPr lang="en-US" sz="1000" dirty="0">
-                <a:solidFill>
-                  <a:srgbClr val="ECEEF4"/>
-                </a:solidFill>
-                <a:latin typeface="Martian Mono" pitchFamily="34" charset="0"/>
-                <a:ea typeface="Martian Mono" pitchFamily="34" charset="-122"/>
-                <a:cs typeface="Martian Mono" pitchFamily="34" charset="-120"/>
-              </a:rPr>
-              <a:t>DESCONHECIDO</a:t>
-            </a:r>
             <a:endParaRPr lang="en-US" sz="1300" dirty="0"/>
           </a:p>
         </p:txBody>
@@ -5491,7 +5267,7 @@
           <a:bodyPr wrap="square" lIns="0" tIns="0" rIns="0" bIns="0" rtlCol="0" anchor="ctr"/>
           <a:lstStyle/>
           <a:p>
-            <a:pPr algn="ctr" indent="0" marL="0">
+            <a:pPr marL="0" indent="0" algn="ctr">
               <a:buNone/>
             </a:pPr>
             <a:r>
@@ -5590,63 +5366,12 @@
           <a:bodyPr wrap="square" lIns="50800" tIns="50800" rIns="50800" bIns="50800" rtlCol="0" anchor="ctr"/>
           <a:lstStyle/>
           <a:p>
-            <a:pPr algn="ctr" indent="0" marL="0">
+            <a:pPr marL="0" indent="0" algn="ctr">
               <a:spcAft>
                 <a:spcPts val="200"/>
               </a:spcAft>
               <a:buNone/>
             </a:pPr>
-            <a:r>
-              <a:rPr lang="en-US" sz="1300" b="1" dirty="0">
-                <a:solidFill>
-                  <a:srgbClr val="FF7A6F"/>
-                </a:solidFill>
-                <a:latin typeface="Archivo" pitchFamily="34" charset="0"/>
-                <a:ea typeface="Archivo" pitchFamily="34" charset="-122"/>
-                <a:cs typeface="Archivo" pitchFamily="34" charset="-120"/>
-              </a:rPr>
-              <a:t>Bloqueia</a:t>
-            </a:r>
-            <a:endParaRPr lang="en-US" sz="1300" dirty="0"/>
-          </a:p>
-          <a:p>
-            <a:pPr algn="ctr" indent="0" marL="0">
-              <a:spcAft>
-                <a:spcPts val="200"/>
-              </a:spcAft>
-              <a:buNone/>
-            </a:pPr>
-            <a:r>
-              <a:rPr lang="en-US" sz="1000" dirty="0">
-                <a:solidFill>
-                  <a:srgbClr val="ECEEF4"/>
-                </a:solidFill>
-                <a:latin typeface="Martian Mono" pitchFamily="34" charset="0"/>
-                <a:ea typeface="Martian Mono" pitchFamily="34" charset="-122"/>
-                <a:cs typeface="Martian Mono" pitchFamily="34" charset="-120"/>
-              </a:rPr>
-              <a:t>OPERADOR_</a:t>
-            </a:r>
-            <a:endParaRPr lang="en-US" sz="1300" dirty="0"/>
-          </a:p>
-          <a:p>
-            <a:pPr algn="ctr" indent="0" marL="0">
-              <a:spcAft>
-                <a:spcPts val="200"/>
-              </a:spcAft>
-              <a:buNone/>
-            </a:pPr>
-            <a:r>
-              <a:rPr lang="en-US" sz="1000" dirty="0">
-                <a:solidFill>
-                  <a:srgbClr val="ECEEF4"/>
-                </a:solidFill>
-                <a:latin typeface="Martian Mono" pitchFamily="34" charset="0"/>
-                <a:ea typeface="Martian Mono" pitchFamily="34" charset="-122"/>
-                <a:cs typeface="Martian Mono" pitchFamily="34" charset="-120"/>
-              </a:rPr>
-              <a:t>INATIVO</a:t>
-            </a:r>
             <a:endParaRPr lang="en-US" sz="1300" dirty="0"/>
           </a:p>
         </p:txBody>
@@ -5699,7 +5424,7 @@
           <a:bodyPr wrap="square" lIns="0" tIns="0" rIns="0" bIns="0" rtlCol="0" anchor="ctr"/>
           <a:lstStyle/>
           <a:p>
-            <a:pPr algn="ctr" indent="0" marL="0">
+            <a:pPr marL="0" indent="0" algn="ctr">
               <a:buNone/>
             </a:pPr>
             <a:r>
@@ -5798,63 +5523,12 @@
           <a:bodyPr wrap="square" lIns="50800" tIns="50800" rIns="50800" bIns="50800" rtlCol="0" anchor="ctr"/>
           <a:lstStyle/>
           <a:p>
-            <a:pPr algn="ctr" indent="0" marL="0">
+            <a:pPr marL="0" indent="0" algn="ctr">
               <a:spcAft>
                 <a:spcPts val="200"/>
               </a:spcAft>
               <a:buNone/>
             </a:pPr>
-            <a:r>
-              <a:rPr lang="en-US" sz="1300" b="1" dirty="0">
-                <a:solidFill>
-                  <a:srgbClr val="FF7A6F"/>
-                </a:solidFill>
-                <a:latin typeface="Archivo" pitchFamily="34" charset="0"/>
-                <a:ea typeface="Archivo" pitchFamily="34" charset="-122"/>
-                <a:cs typeface="Archivo" pitchFamily="34" charset="-120"/>
-              </a:rPr>
-              <a:t>Bloqueia</a:t>
-            </a:r>
-            <a:endParaRPr lang="en-US" sz="1300" dirty="0"/>
-          </a:p>
-          <a:p>
-            <a:pPr algn="ctr" indent="0" marL="0">
-              <a:spcAft>
-                <a:spcPts val="200"/>
-              </a:spcAft>
-              <a:buNone/>
-            </a:pPr>
-            <a:r>
-              <a:rPr lang="en-US" sz="1000" dirty="0">
-                <a:solidFill>
-                  <a:srgbClr val="ECEEF4"/>
-                </a:solidFill>
-                <a:latin typeface="Martian Mono" pitchFamily="34" charset="0"/>
-                <a:ea typeface="Martian Mono" pitchFamily="34" charset="-122"/>
-                <a:cs typeface="Martian Mono" pitchFamily="34" charset="-120"/>
-              </a:rPr>
-              <a:t>MAQUINA_</a:t>
-            </a:r>
-            <a:endParaRPr lang="en-US" sz="1300" dirty="0"/>
-          </a:p>
-          <a:p>
-            <a:pPr algn="ctr" indent="0" marL="0">
-              <a:spcAft>
-                <a:spcPts val="200"/>
-              </a:spcAft>
-              <a:buNone/>
-            </a:pPr>
-            <a:r>
-              <a:rPr lang="en-US" sz="1000" dirty="0">
-                <a:solidFill>
-                  <a:srgbClr val="ECEEF4"/>
-                </a:solidFill>
-                <a:latin typeface="Martian Mono" pitchFamily="34" charset="0"/>
-                <a:ea typeface="Martian Mono" pitchFamily="34" charset="-122"/>
-                <a:cs typeface="Martian Mono" pitchFamily="34" charset="-120"/>
-              </a:rPr>
-              <a:t>INDISPONIVEL</a:t>
-            </a:r>
             <a:endParaRPr lang="en-US" sz="1300" dirty="0"/>
           </a:p>
         </p:txBody>
@@ -5907,7 +5581,7 @@
           <a:bodyPr wrap="square" lIns="0" tIns="0" rIns="0" bIns="0" rtlCol="0" anchor="ctr"/>
           <a:lstStyle/>
           <a:p>
-            <a:pPr algn="ctr" indent="0" marL="0">
+            <a:pPr marL="0" indent="0" algn="ctr">
               <a:buNone/>
             </a:pPr>
             <a:r>
@@ -6006,63 +5680,12 @@
           <a:bodyPr wrap="square" lIns="50800" tIns="50800" rIns="50800" bIns="50800" rtlCol="0" anchor="ctr"/>
           <a:lstStyle/>
           <a:p>
-            <a:pPr algn="ctr" indent="0" marL="0">
+            <a:pPr marL="0" indent="0" algn="ctr">
               <a:spcAft>
                 <a:spcPts val="200"/>
               </a:spcAft>
               <a:buNone/>
             </a:pPr>
-            <a:r>
-              <a:rPr lang="en-US" sz="1300" b="1" dirty="0">
-                <a:solidFill>
-                  <a:srgbClr val="FF7A6F"/>
-                </a:solidFill>
-                <a:latin typeface="Archivo" pitchFamily="34" charset="0"/>
-                <a:ea typeface="Archivo" pitchFamily="34" charset="-122"/>
-                <a:cs typeface="Archivo" pitchFamily="34" charset="-120"/>
-              </a:rPr>
-              <a:t>Bloqueia</a:t>
-            </a:r>
-            <a:endParaRPr lang="en-US" sz="1300" dirty="0"/>
-          </a:p>
-          <a:p>
-            <a:pPr algn="ctr" indent="0" marL="0">
-              <a:spcAft>
-                <a:spcPts val="200"/>
-              </a:spcAft>
-              <a:buNone/>
-            </a:pPr>
-            <a:r>
-              <a:rPr lang="en-US" sz="1000" dirty="0">
-                <a:solidFill>
-                  <a:srgbClr val="ECEEF4"/>
-                </a:solidFill>
-                <a:latin typeface="Martian Mono" pitchFamily="34" charset="0"/>
-                <a:ea typeface="Martian Mono" pitchFamily="34" charset="-122"/>
-                <a:cs typeface="Martian Mono" pitchFamily="34" charset="-120"/>
-              </a:rPr>
-              <a:t>TREINAMENTO_</a:t>
-            </a:r>
-            <a:endParaRPr lang="en-US" sz="1300" dirty="0"/>
-          </a:p>
-          <a:p>
-            <a:pPr algn="ctr" indent="0" marL="0">
-              <a:spcAft>
-                <a:spcPts val="200"/>
-              </a:spcAft>
-              <a:buNone/>
-            </a:pPr>
-            <a:r>
-              <a:rPr lang="en-US" sz="1000" dirty="0">
-                <a:solidFill>
-                  <a:srgbClr val="ECEEF4"/>
-                </a:solidFill>
-                <a:latin typeface="Martian Mono" pitchFamily="34" charset="0"/>
-                <a:ea typeface="Martian Mono" pitchFamily="34" charset="-122"/>
-                <a:cs typeface="Martian Mono" pitchFamily="34" charset="-120"/>
-              </a:rPr>
-              <a:t>AUSENTE</a:t>
-            </a:r>
             <a:endParaRPr lang="en-US" sz="1300" dirty="0"/>
           </a:p>
         </p:txBody>
@@ -6115,7 +5738,7 @@
           <a:bodyPr wrap="square" lIns="0" tIns="0" rIns="0" bIns="0" rtlCol="0" anchor="ctr"/>
           <a:lstStyle/>
           <a:p>
-            <a:pPr algn="ctr" indent="0" marL="0">
+            <a:pPr marL="0" indent="0" algn="ctr">
               <a:buNone/>
             </a:pPr>
             <a:r>
@@ -6214,63 +5837,12 @@
           <a:bodyPr wrap="square" lIns="50800" tIns="50800" rIns="50800" bIns="50800" rtlCol="0" anchor="ctr"/>
           <a:lstStyle/>
           <a:p>
-            <a:pPr algn="ctr" indent="0" marL="0">
+            <a:pPr marL="0" indent="0" algn="ctr">
               <a:spcAft>
                 <a:spcPts val="200"/>
               </a:spcAft>
               <a:buNone/>
             </a:pPr>
-            <a:r>
-              <a:rPr lang="en-US" sz="1300" b="1" dirty="0">
-                <a:solidFill>
-                  <a:srgbClr val="FF7A6F"/>
-                </a:solidFill>
-                <a:latin typeface="Archivo" pitchFamily="34" charset="0"/>
-                <a:ea typeface="Archivo" pitchFamily="34" charset="-122"/>
-                <a:cs typeface="Archivo" pitchFamily="34" charset="-120"/>
-              </a:rPr>
-              <a:t>Bloqueia</a:t>
-            </a:r>
-            <a:endParaRPr lang="en-US" sz="1300" dirty="0"/>
-          </a:p>
-          <a:p>
-            <a:pPr algn="ctr" indent="0" marL="0">
-              <a:spcAft>
-                <a:spcPts val="200"/>
-              </a:spcAft>
-              <a:buNone/>
-            </a:pPr>
-            <a:r>
-              <a:rPr lang="en-US" sz="1000" dirty="0">
-                <a:solidFill>
-                  <a:srgbClr val="ECEEF4"/>
-                </a:solidFill>
-                <a:latin typeface="Martian Mono" pitchFamily="34" charset="0"/>
-                <a:ea typeface="Martian Mono" pitchFamily="34" charset="-122"/>
-                <a:cs typeface="Martian Mono" pitchFamily="34" charset="-120"/>
-              </a:rPr>
-              <a:t>TREINAMENTO_</a:t>
-            </a:r>
-            <a:endParaRPr lang="en-US" sz="1300" dirty="0"/>
-          </a:p>
-          <a:p>
-            <a:pPr algn="ctr" indent="0" marL="0">
-              <a:spcAft>
-                <a:spcPts val="200"/>
-              </a:spcAft>
-              <a:buNone/>
-            </a:pPr>
-            <a:r>
-              <a:rPr lang="en-US" sz="1000" dirty="0">
-                <a:solidFill>
-                  <a:srgbClr val="ECEEF4"/>
-                </a:solidFill>
-                <a:latin typeface="Martian Mono" pitchFamily="34" charset="0"/>
-                <a:ea typeface="Martian Mono" pitchFamily="34" charset="-122"/>
-                <a:cs typeface="Martian Mono" pitchFamily="34" charset="-120"/>
-              </a:rPr>
-              <a:t>VENCIDO</a:t>
-            </a:r>
             <a:endParaRPr lang="en-US" sz="1300" dirty="0"/>
           </a:p>
         </p:txBody>
@@ -6306,43 +5878,12 @@
           <a:bodyPr wrap="square" lIns="50800" tIns="50800" rIns="50800" bIns="50800" rtlCol="0" anchor="ctr"/>
           <a:lstStyle/>
           <a:p>
-            <a:pPr algn="ctr" indent="0" marL="0">
+            <a:pPr marL="0" indent="0" algn="ctr">
               <a:spcAft>
                 <a:spcPts val="400"/>
               </a:spcAft>
               <a:buNone/>
             </a:pPr>
-            <a:r>
-              <a:rPr lang="en-US" sz="1700" b="1" dirty="0">
-                <a:solidFill>
-                  <a:srgbClr val="63E6A6"/>
-                </a:solidFill>
-                <a:latin typeface="Archivo" pitchFamily="34" charset="0"/>
-                <a:ea typeface="Archivo" pitchFamily="34" charset="-122"/>
-                <a:cs typeface="Archivo" pitchFamily="34" charset="-120"/>
-              </a:rPr>
-              <a:t>Liberado</a:t>
-            </a:r>
-            <a:endParaRPr lang="en-US" sz="1700" dirty="0"/>
-          </a:p>
-          <a:p>
-            <a:pPr algn="ctr" indent="0" marL="0">
-              <a:spcAft>
-                <a:spcPts val="400"/>
-              </a:spcAft>
-              <a:buNone/>
-            </a:pPr>
-            <a:r>
-              <a:rPr lang="en-US" sz="1000" dirty="0">
-                <a:solidFill>
-                  <a:srgbClr val="ECEEF4"/>
-                </a:solidFill>
-                <a:latin typeface="Martian Mono" pitchFamily="34" charset="0"/>
-                <a:ea typeface="Martian Mono" pitchFamily="34" charset="-122"/>
-                <a:cs typeface="Martian Mono" pitchFamily="34" charset="-120"/>
-              </a:rPr>
-              <a:t>AUTORIZADO</a:t>
-            </a:r>
             <a:endParaRPr lang="en-US" sz="1700" dirty="0"/>
           </a:p>
         </p:txBody>
@@ -6368,7 +5909,7 @@
           <a:bodyPr wrap="square" lIns="0" tIns="0" rIns="0" bIns="0" rtlCol="0" anchor="t"/>
           <a:lstStyle/>
           <a:p>
-            <a:pPr indent="0" marL="0">
+            <a:pPr marL="0" indent="0">
               <a:buNone/>
             </a:pPr>
             <a:r>
@@ -6382,9 +5923,6 @@
               </a:rPr>
               <a:t>→ sim</a:t>
             </a:r>
-            <a:pPr indent="0" marL="0">
-              <a:buNone/>
-            </a:pPr>
             <a:r>
               <a:rPr lang="en-US" sz="1200" b="1" dirty="0">
                 <a:solidFill>
@@ -6448,7 +5986,7 @@
           <a:bodyPr wrap="square" lIns="0" tIns="0" rIns="0" bIns="0" rtlCol="0" anchor="ctr"/>
           <a:lstStyle/>
           <a:p>
-            <a:pPr indent="0" marL="0">
+            <a:pPr marL="0" indent="0">
               <a:buNone/>
             </a:pPr>
             <a:r>
@@ -6462,9 +6000,6 @@
               </a:rPr>
               <a:t>Exemplo (dados fictícios):  </a:t>
             </a:r>
-            <a:pPr indent="0" marL="0">
-              <a:buNone/>
-            </a:pPr>
             <a:r>
               <a:rPr lang="en-US" sz="1400" dirty="0">
                 <a:solidFill>
@@ -6476,9 +6011,6 @@
               </a:rPr>
               <a:t>Bruno Teixeira na P-01  →  NR-12 vencida  →  </a:t>
             </a:r>
-            <a:pPr indent="0" marL="0">
-              <a:buNone/>
-            </a:pPr>
             <a:r>
               <a:rPr lang="en-US" sz="1400" b="1" dirty="0">
                 <a:solidFill>
@@ -6496,7 +6028,7 @@
       </p:sp>
       <p:sp>
         <p:nvSpPr>
-          <p:cNvPr id="25" name="Slide Number Placeholder 0"/>
+          <p:cNvPr id="34" name="Slide Number Placeholder 0"/>
           <p:cNvSpPr>
             <a:spLocks noGrp="1"/>
           </p:cNvSpPr>
@@ -6514,7 +6046,7 @@
           </a:prstGeom>
           <a:extLst>
             <a:ext uri="{C572A759-6A51-4108-AA02-DFA0A04FC94B}">
-              <ma14:wrappingTextBoxFlag xmlns:ma14="http://schemas.microsoft.com/office/mac/drawingml/2011/main" val="0"/>
+              <ma14:wrappingTextBoxFlag xmlns="" xmlns:ma14="http://schemas.microsoft.com/office/mac/drawingml/2011/main" val="0"/>
             </a:ext>
           </a:extLst>
         </p:spPr>
@@ -6535,10 +6067,672 @@
           <a:p>
             <a:pPr algn="r"/>
             <a:fld id="{F7021451-1387-4CA6-816F-3879F97B5CBC}" type="slidenum">
-              <a:rPr b="0" lang="en-US"/>
+              <a:rPr lang="en-US" b="0"/>
               <a:t>11</a:t>
             </a:fld>
             <a:endParaRPr lang="en-US"/>
+          </a:p>
+        </p:txBody>
+      </p:sp>
+      <p:sp>
+        <p:nvSpPr>
+          <p:cNvPr id="35" name="Text 7 texto">
+            <a:extLst>
+              <a:ext uri="{FF2B5EF4-FFF2-40B4-BE49-F238E27FC236}">
+                <a16:creationId xmlns:a16="http://schemas.microsoft.com/office/drawing/2014/main" id="{64F13BC1-0A49-1C71-2A52-4B6B481671B4}"/>
+              </a:ext>
+            </a:extLst>
+          </p:cNvPr>
+          <p:cNvSpPr/>
+          <p:nvPr/>
+        </p:nvSpPr>
+        <p:spPr>
+          <a:xfrm>
+            <a:off x="599440" y="4101592"/>
+            <a:ext cx="1544320" cy="858520"/>
+          </a:xfrm>
+          <a:prstGeom prst="roundRect">
+            <a:avLst>
+              <a:gd name="adj" fmla="val 9524"/>
+            </a:avLst>
+          </a:prstGeom>
+          <a:noFill/>
+          <a:ln w="9525">
+            <a:noFill/>
+          </a:ln>
+          <a:extLst>
+            <a:ext uri="{909E8E84-426E-40DD-AFC4-6F175D3DCCD1}">
+              <a14:hiddenFill xmlns:a14="http://schemas.microsoft.com/office/drawing/2010/main">
+                <a:solidFill>
+                  <a:srgbClr val="FF3D2E">
+                    <a:alpha val="15000"/>
+                  </a:srgbClr>
+                </a:solidFill>
+              </a14:hiddenFill>
+            </a:ext>
+            <a:ext uri="{91240B29-F687-4F45-9708-019B960494DF}">
+              <a14:hiddenLine xmlns:a14="http://schemas.microsoft.com/office/drawing/2010/main" w="9525">
+                <a:solidFill>
+                  <a:srgbClr val="FF3D2E">
+                    <a:alpha val="50000"/>
+                  </a:srgbClr>
+                </a:solidFill>
+              </a14:hiddenLine>
+            </a:ext>
+          </a:extLst>
+        </p:spPr>
+        <p:txBody>
+          <a:bodyPr wrap="square" lIns="0" tIns="0" rIns="0" bIns="0" rtlCol="0" anchor="ctr">
+            <a:noAutofit/>
+          </a:bodyPr>
+          <a:lstStyle/>
+          <a:p>
+            <a:pPr marL="0" indent="0" algn="ctr">
+              <a:spcAft>
+                <a:spcPts val="200"/>
+              </a:spcAft>
+              <a:buNone/>
+            </a:pPr>
+            <a:r>
+              <a:rPr lang="en-US" sz="1300" b="1" dirty="0">
+                <a:solidFill>
+                  <a:srgbClr val="FF7A6F"/>
+                </a:solidFill>
+                <a:latin typeface="Archivo" pitchFamily="34" charset="0"/>
+                <a:ea typeface="Archivo" pitchFamily="34" charset="-122"/>
+                <a:cs typeface="Archivo" pitchFamily="34" charset="-120"/>
+              </a:rPr>
+              <a:t>Bloqueia</a:t>
+            </a:r>
+            <a:endParaRPr lang="en-US" sz="1300" dirty="0"/>
+          </a:p>
+          <a:p>
+            <a:pPr marL="0" indent="0" algn="ctr">
+              <a:spcAft>
+                <a:spcPts val="200"/>
+              </a:spcAft>
+              <a:buNone/>
+            </a:pPr>
+            <a:r>
+              <a:rPr lang="en-US" sz="1000" dirty="0">
+                <a:solidFill>
+                  <a:srgbClr val="ECEEF4"/>
+                </a:solidFill>
+                <a:latin typeface="Martian Mono" pitchFamily="34" charset="0"/>
+                <a:ea typeface="Martian Mono" pitchFamily="34" charset="-122"/>
+                <a:cs typeface="Martian Mono" pitchFamily="34" charset="-120"/>
+              </a:rPr>
+              <a:t>CARTAO_</a:t>
+            </a:r>
+            <a:endParaRPr lang="en-US" sz="1300" dirty="0"/>
+          </a:p>
+          <a:p>
+            <a:pPr marL="0" indent="0" algn="ctr">
+              <a:spcAft>
+                <a:spcPts val="200"/>
+              </a:spcAft>
+              <a:buNone/>
+            </a:pPr>
+            <a:r>
+              <a:rPr lang="en-US" sz="1000" dirty="0">
+                <a:solidFill>
+                  <a:srgbClr val="ECEEF4"/>
+                </a:solidFill>
+                <a:latin typeface="Martian Mono" pitchFamily="34" charset="0"/>
+                <a:ea typeface="Martian Mono" pitchFamily="34" charset="-122"/>
+                <a:cs typeface="Martian Mono" pitchFamily="34" charset="-120"/>
+              </a:rPr>
+              <a:t>DESCONHECIDO</a:t>
+            </a:r>
+            <a:endParaRPr lang="en-US" sz="1300" dirty="0"/>
+          </a:p>
+        </p:txBody>
+      </p:sp>
+      <p:sp>
+        <p:nvSpPr>
+          <p:cNvPr id="36" name="Text 12 texto">
+            <a:extLst>
+              <a:ext uri="{FF2B5EF4-FFF2-40B4-BE49-F238E27FC236}">
+                <a16:creationId xmlns:a16="http://schemas.microsoft.com/office/drawing/2014/main" id="{57CC8EAB-945D-9E18-6BB1-298A35D26875}"/>
+              </a:ext>
+            </a:extLst>
+          </p:cNvPr>
+          <p:cNvSpPr/>
+          <p:nvPr/>
+        </p:nvSpPr>
+        <p:spPr>
+          <a:xfrm>
+            <a:off x="2488590" y="4101592"/>
+            <a:ext cx="1544320" cy="858520"/>
+          </a:xfrm>
+          <a:prstGeom prst="roundRect">
+            <a:avLst>
+              <a:gd name="adj" fmla="val 9524"/>
+            </a:avLst>
+          </a:prstGeom>
+          <a:noFill/>
+          <a:ln w="9525">
+            <a:noFill/>
+          </a:ln>
+          <a:extLst>
+            <a:ext uri="{909E8E84-426E-40DD-AFC4-6F175D3DCCD1}">
+              <a14:hiddenFill xmlns:a14="http://schemas.microsoft.com/office/drawing/2010/main">
+                <a:solidFill>
+                  <a:srgbClr val="FF3D2E">
+                    <a:alpha val="15000"/>
+                  </a:srgbClr>
+                </a:solidFill>
+              </a14:hiddenFill>
+            </a:ext>
+            <a:ext uri="{91240B29-F687-4F45-9708-019B960494DF}">
+              <a14:hiddenLine xmlns:a14="http://schemas.microsoft.com/office/drawing/2010/main" w="9525">
+                <a:solidFill>
+                  <a:srgbClr val="FF3D2E">
+                    <a:alpha val="50000"/>
+                  </a:srgbClr>
+                </a:solidFill>
+              </a14:hiddenLine>
+            </a:ext>
+          </a:extLst>
+        </p:spPr>
+        <p:txBody>
+          <a:bodyPr wrap="square" lIns="0" tIns="0" rIns="0" bIns="0" rtlCol="0" anchor="ctr">
+            <a:noAutofit/>
+          </a:bodyPr>
+          <a:lstStyle/>
+          <a:p>
+            <a:pPr marL="0" indent="0" algn="ctr">
+              <a:spcAft>
+                <a:spcPts val="200"/>
+              </a:spcAft>
+              <a:buNone/>
+            </a:pPr>
+            <a:r>
+              <a:rPr lang="en-US" sz="1300" b="1" dirty="0">
+                <a:solidFill>
+                  <a:srgbClr val="FF7A6F"/>
+                </a:solidFill>
+                <a:latin typeface="Archivo" pitchFamily="34" charset="0"/>
+                <a:ea typeface="Archivo" pitchFamily="34" charset="-122"/>
+                <a:cs typeface="Archivo" pitchFamily="34" charset="-120"/>
+              </a:rPr>
+              <a:t>Bloqueia</a:t>
+            </a:r>
+            <a:endParaRPr lang="en-US" sz="1300" dirty="0"/>
+          </a:p>
+          <a:p>
+            <a:pPr marL="0" indent="0" algn="ctr">
+              <a:spcAft>
+                <a:spcPts val="200"/>
+              </a:spcAft>
+              <a:buNone/>
+            </a:pPr>
+            <a:r>
+              <a:rPr lang="en-US" sz="1000" dirty="0">
+                <a:solidFill>
+                  <a:srgbClr val="ECEEF4"/>
+                </a:solidFill>
+                <a:latin typeface="Martian Mono" pitchFamily="34" charset="0"/>
+                <a:ea typeface="Martian Mono" pitchFamily="34" charset="-122"/>
+                <a:cs typeface="Martian Mono" pitchFamily="34" charset="-120"/>
+              </a:rPr>
+              <a:t>OPERADOR_</a:t>
+            </a:r>
+            <a:endParaRPr lang="en-US" sz="1300" dirty="0"/>
+          </a:p>
+          <a:p>
+            <a:pPr marL="0" indent="0" algn="ctr">
+              <a:spcAft>
+                <a:spcPts val="200"/>
+              </a:spcAft>
+              <a:buNone/>
+            </a:pPr>
+            <a:r>
+              <a:rPr lang="en-US" sz="1000" dirty="0">
+                <a:solidFill>
+                  <a:srgbClr val="ECEEF4"/>
+                </a:solidFill>
+                <a:latin typeface="Martian Mono" pitchFamily="34" charset="0"/>
+                <a:ea typeface="Martian Mono" pitchFamily="34" charset="-122"/>
+                <a:cs typeface="Martian Mono" pitchFamily="34" charset="-120"/>
+              </a:rPr>
+              <a:t>INATIVO</a:t>
+            </a:r>
+            <a:endParaRPr lang="en-US" sz="1300" dirty="0"/>
+          </a:p>
+        </p:txBody>
+      </p:sp>
+      <p:sp>
+        <p:nvSpPr>
+          <p:cNvPr id="37" name="Text 17 texto">
+            <a:extLst>
+              <a:ext uri="{FF2B5EF4-FFF2-40B4-BE49-F238E27FC236}">
+                <a16:creationId xmlns:a16="http://schemas.microsoft.com/office/drawing/2014/main" id="{51C1F123-4F94-A03E-FE95-20D4D2676812}"/>
+              </a:ext>
+            </a:extLst>
+          </p:cNvPr>
+          <p:cNvSpPr/>
+          <p:nvPr/>
+        </p:nvSpPr>
+        <p:spPr>
+          <a:xfrm>
+            <a:off x="4377741" y="4101592"/>
+            <a:ext cx="1544320" cy="858520"/>
+          </a:xfrm>
+          <a:prstGeom prst="roundRect">
+            <a:avLst>
+              <a:gd name="adj" fmla="val 9524"/>
+            </a:avLst>
+          </a:prstGeom>
+          <a:noFill/>
+          <a:ln w="9525">
+            <a:noFill/>
+          </a:ln>
+          <a:extLst>
+            <a:ext uri="{909E8E84-426E-40DD-AFC4-6F175D3DCCD1}">
+              <a14:hiddenFill xmlns:a14="http://schemas.microsoft.com/office/drawing/2010/main">
+                <a:solidFill>
+                  <a:srgbClr val="FF3D2E">
+                    <a:alpha val="15000"/>
+                  </a:srgbClr>
+                </a:solidFill>
+              </a14:hiddenFill>
+            </a:ext>
+            <a:ext uri="{91240B29-F687-4F45-9708-019B960494DF}">
+              <a14:hiddenLine xmlns:a14="http://schemas.microsoft.com/office/drawing/2010/main" w="9525">
+                <a:solidFill>
+                  <a:srgbClr val="FF3D2E">
+                    <a:alpha val="50000"/>
+                  </a:srgbClr>
+                </a:solidFill>
+              </a14:hiddenLine>
+            </a:ext>
+          </a:extLst>
+        </p:spPr>
+        <p:txBody>
+          <a:bodyPr wrap="square" lIns="0" tIns="0" rIns="0" bIns="0" rtlCol="0" anchor="ctr">
+            <a:noAutofit/>
+          </a:bodyPr>
+          <a:lstStyle/>
+          <a:p>
+            <a:pPr marL="0" indent="0" algn="ctr">
+              <a:spcAft>
+                <a:spcPts val="200"/>
+              </a:spcAft>
+              <a:buNone/>
+            </a:pPr>
+            <a:r>
+              <a:rPr lang="en-US" sz="1300" b="1" dirty="0">
+                <a:solidFill>
+                  <a:srgbClr val="FF7A6F"/>
+                </a:solidFill>
+                <a:latin typeface="Archivo" pitchFamily="34" charset="0"/>
+                <a:ea typeface="Archivo" pitchFamily="34" charset="-122"/>
+                <a:cs typeface="Archivo" pitchFamily="34" charset="-120"/>
+              </a:rPr>
+              <a:t>Bloqueia</a:t>
+            </a:r>
+            <a:endParaRPr lang="en-US" sz="1300" dirty="0"/>
+          </a:p>
+          <a:p>
+            <a:pPr marL="0" indent="0" algn="ctr">
+              <a:spcAft>
+                <a:spcPts val="200"/>
+              </a:spcAft>
+              <a:buNone/>
+            </a:pPr>
+            <a:r>
+              <a:rPr lang="en-US" sz="1000" dirty="0">
+                <a:solidFill>
+                  <a:srgbClr val="ECEEF4"/>
+                </a:solidFill>
+                <a:latin typeface="Martian Mono" pitchFamily="34" charset="0"/>
+                <a:ea typeface="Martian Mono" pitchFamily="34" charset="-122"/>
+                <a:cs typeface="Martian Mono" pitchFamily="34" charset="-120"/>
+              </a:rPr>
+              <a:t>MAQUINA_</a:t>
+            </a:r>
+            <a:endParaRPr lang="en-US" sz="1300" dirty="0"/>
+          </a:p>
+          <a:p>
+            <a:pPr marL="0" indent="0" algn="ctr">
+              <a:spcAft>
+                <a:spcPts val="200"/>
+              </a:spcAft>
+              <a:buNone/>
+            </a:pPr>
+            <a:r>
+              <a:rPr lang="en-US" sz="1000" dirty="0">
+                <a:solidFill>
+                  <a:srgbClr val="ECEEF4"/>
+                </a:solidFill>
+                <a:latin typeface="Martian Mono" pitchFamily="34" charset="0"/>
+                <a:ea typeface="Martian Mono" pitchFamily="34" charset="-122"/>
+                <a:cs typeface="Martian Mono" pitchFamily="34" charset="-120"/>
+              </a:rPr>
+              <a:t>INDISPONIVEL</a:t>
+            </a:r>
+            <a:endParaRPr lang="en-US" sz="1300" dirty="0"/>
+          </a:p>
+        </p:txBody>
+      </p:sp>
+      <p:sp>
+        <p:nvSpPr>
+          <p:cNvPr id="38" name="Text 22 texto">
+            <a:extLst>
+              <a:ext uri="{FF2B5EF4-FFF2-40B4-BE49-F238E27FC236}">
+                <a16:creationId xmlns:a16="http://schemas.microsoft.com/office/drawing/2014/main" id="{59F1999F-72B6-7023-669B-957C64A088BC}"/>
+              </a:ext>
+            </a:extLst>
+          </p:cNvPr>
+          <p:cNvSpPr/>
+          <p:nvPr/>
+        </p:nvSpPr>
+        <p:spPr>
+          <a:xfrm>
+            <a:off x="6266891" y="4101592"/>
+            <a:ext cx="1544320" cy="858520"/>
+          </a:xfrm>
+          <a:prstGeom prst="roundRect">
+            <a:avLst>
+              <a:gd name="adj" fmla="val 9524"/>
+            </a:avLst>
+          </a:prstGeom>
+          <a:noFill/>
+          <a:ln w="9525">
+            <a:noFill/>
+          </a:ln>
+          <a:extLst>
+            <a:ext uri="{909E8E84-426E-40DD-AFC4-6F175D3DCCD1}">
+              <a14:hiddenFill xmlns:a14="http://schemas.microsoft.com/office/drawing/2010/main">
+                <a:solidFill>
+                  <a:srgbClr val="FF3D2E">
+                    <a:alpha val="15000"/>
+                  </a:srgbClr>
+                </a:solidFill>
+              </a14:hiddenFill>
+            </a:ext>
+            <a:ext uri="{91240B29-F687-4F45-9708-019B960494DF}">
+              <a14:hiddenLine xmlns:a14="http://schemas.microsoft.com/office/drawing/2010/main" w="9525">
+                <a:solidFill>
+                  <a:srgbClr val="FF3D2E">
+                    <a:alpha val="50000"/>
+                  </a:srgbClr>
+                </a:solidFill>
+              </a14:hiddenLine>
+            </a:ext>
+          </a:extLst>
+        </p:spPr>
+        <p:txBody>
+          <a:bodyPr wrap="square" lIns="0" tIns="0" rIns="0" bIns="0" rtlCol="0" anchor="ctr">
+            <a:noAutofit/>
+          </a:bodyPr>
+          <a:lstStyle/>
+          <a:p>
+            <a:pPr marL="0" indent="0" algn="ctr">
+              <a:spcAft>
+                <a:spcPts val="200"/>
+              </a:spcAft>
+              <a:buNone/>
+            </a:pPr>
+            <a:r>
+              <a:rPr lang="en-US" sz="1300" b="1" dirty="0">
+                <a:solidFill>
+                  <a:srgbClr val="FF7A6F"/>
+                </a:solidFill>
+                <a:latin typeface="Archivo" pitchFamily="34" charset="0"/>
+                <a:ea typeface="Archivo" pitchFamily="34" charset="-122"/>
+                <a:cs typeface="Archivo" pitchFamily="34" charset="-120"/>
+              </a:rPr>
+              <a:t>Bloqueia</a:t>
+            </a:r>
+            <a:endParaRPr lang="en-US" sz="1300" dirty="0"/>
+          </a:p>
+          <a:p>
+            <a:pPr marL="0" indent="0" algn="ctr">
+              <a:spcAft>
+                <a:spcPts val="200"/>
+              </a:spcAft>
+              <a:buNone/>
+            </a:pPr>
+            <a:r>
+              <a:rPr lang="en-US" sz="1000" dirty="0">
+                <a:solidFill>
+                  <a:srgbClr val="ECEEF4"/>
+                </a:solidFill>
+                <a:latin typeface="Martian Mono" pitchFamily="34" charset="0"/>
+                <a:ea typeface="Martian Mono" pitchFamily="34" charset="-122"/>
+                <a:cs typeface="Martian Mono" pitchFamily="34" charset="-120"/>
+              </a:rPr>
+              <a:t>TREINAMENTO_</a:t>
+            </a:r>
+            <a:endParaRPr lang="en-US" sz="1300" dirty="0"/>
+          </a:p>
+          <a:p>
+            <a:pPr marL="0" indent="0" algn="ctr">
+              <a:spcAft>
+                <a:spcPts val="200"/>
+              </a:spcAft>
+              <a:buNone/>
+            </a:pPr>
+            <a:r>
+              <a:rPr lang="en-US" sz="1000" dirty="0">
+                <a:solidFill>
+                  <a:srgbClr val="ECEEF4"/>
+                </a:solidFill>
+                <a:latin typeface="Martian Mono" pitchFamily="34" charset="0"/>
+                <a:ea typeface="Martian Mono" pitchFamily="34" charset="-122"/>
+                <a:cs typeface="Martian Mono" pitchFamily="34" charset="-120"/>
+              </a:rPr>
+              <a:t>AUSENTE</a:t>
+            </a:r>
+            <a:endParaRPr lang="en-US" sz="1300" dirty="0"/>
+          </a:p>
+        </p:txBody>
+      </p:sp>
+      <p:sp>
+        <p:nvSpPr>
+          <p:cNvPr id="39" name="Text 27 texto">
+            <a:extLst>
+              <a:ext uri="{FF2B5EF4-FFF2-40B4-BE49-F238E27FC236}">
+                <a16:creationId xmlns:a16="http://schemas.microsoft.com/office/drawing/2014/main" id="{C8D9CD14-0ACF-9532-292B-E2AD674E2C43}"/>
+              </a:ext>
+            </a:extLst>
+          </p:cNvPr>
+          <p:cNvSpPr/>
+          <p:nvPr/>
+        </p:nvSpPr>
+        <p:spPr>
+          <a:xfrm>
+            <a:off x="8156042" y="4101592"/>
+            <a:ext cx="1544320" cy="858520"/>
+          </a:xfrm>
+          <a:prstGeom prst="roundRect">
+            <a:avLst>
+              <a:gd name="adj" fmla="val 9524"/>
+            </a:avLst>
+          </a:prstGeom>
+          <a:noFill/>
+          <a:ln w="9525">
+            <a:noFill/>
+          </a:ln>
+          <a:extLst>
+            <a:ext uri="{909E8E84-426E-40DD-AFC4-6F175D3DCCD1}">
+              <a14:hiddenFill xmlns:a14="http://schemas.microsoft.com/office/drawing/2010/main">
+                <a:solidFill>
+                  <a:srgbClr val="FF3D2E">
+                    <a:alpha val="15000"/>
+                  </a:srgbClr>
+                </a:solidFill>
+              </a14:hiddenFill>
+            </a:ext>
+            <a:ext uri="{91240B29-F687-4F45-9708-019B960494DF}">
+              <a14:hiddenLine xmlns:a14="http://schemas.microsoft.com/office/drawing/2010/main" w="9525">
+                <a:solidFill>
+                  <a:srgbClr val="FF3D2E">
+                    <a:alpha val="50000"/>
+                  </a:srgbClr>
+                </a:solidFill>
+              </a14:hiddenLine>
+            </a:ext>
+          </a:extLst>
+        </p:spPr>
+        <p:txBody>
+          <a:bodyPr wrap="square" lIns="0" tIns="0" rIns="0" bIns="0" rtlCol="0" anchor="ctr">
+            <a:noAutofit/>
+          </a:bodyPr>
+          <a:lstStyle/>
+          <a:p>
+            <a:pPr marL="0" indent="0" algn="ctr">
+              <a:spcAft>
+                <a:spcPts val="200"/>
+              </a:spcAft>
+              <a:buNone/>
+            </a:pPr>
+            <a:r>
+              <a:rPr lang="en-US" sz="1300" b="1" dirty="0">
+                <a:solidFill>
+                  <a:srgbClr val="FF7A6F"/>
+                </a:solidFill>
+                <a:latin typeface="Archivo" pitchFamily="34" charset="0"/>
+                <a:ea typeface="Archivo" pitchFamily="34" charset="-122"/>
+                <a:cs typeface="Archivo" pitchFamily="34" charset="-120"/>
+              </a:rPr>
+              <a:t>Bloqueia</a:t>
+            </a:r>
+            <a:endParaRPr lang="en-US" sz="1300" dirty="0"/>
+          </a:p>
+          <a:p>
+            <a:pPr marL="0" indent="0" algn="ctr">
+              <a:spcAft>
+                <a:spcPts val="200"/>
+              </a:spcAft>
+              <a:buNone/>
+            </a:pPr>
+            <a:r>
+              <a:rPr lang="en-US" sz="1000" dirty="0">
+                <a:solidFill>
+                  <a:srgbClr val="ECEEF4"/>
+                </a:solidFill>
+                <a:latin typeface="Martian Mono" pitchFamily="34" charset="0"/>
+                <a:ea typeface="Martian Mono" pitchFamily="34" charset="-122"/>
+                <a:cs typeface="Martian Mono" pitchFamily="34" charset="-120"/>
+              </a:rPr>
+              <a:t>TREINAMENTO_</a:t>
+            </a:r>
+            <a:endParaRPr lang="en-US" sz="1300" dirty="0"/>
+          </a:p>
+          <a:p>
+            <a:pPr marL="0" indent="0" algn="ctr">
+              <a:spcAft>
+                <a:spcPts val="200"/>
+              </a:spcAft>
+              <a:buNone/>
+            </a:pPr>
+            <a:r>
+              <a:rPr lang="en-US" sz="1000" dirty="0">
+                <a:solidFill>
+                  <a:srgbClr val="ECEEF4"/>
+                </a:solidFill>
+                <a:latin typeface="Martian Mono" pitchFamily="34" charset="0"/>
+                <a:ea typeface="Martian Mono" pitchFamily="34" charset="-122"/>
+                <a:cs typeface="Martian Mono" pitchFamily="34" charset="-120"/>
+              </a:rPr>
+              <a:t>VENCIDO</a:t>
+            </a:r>
+            <a:endParaRPr lang="en-US" sz="1300" dirty="0"/>
+          </a:p>
+        </p:txBody>
+      </p:sp>
+      <p:sp>
+        <p:nvSpPr>
+          <p:cNvPr id="40" name="Text 28 texto">
+            <a:extLst>
+              <a:ext uri="{FF2B5EF4-FFF2-40B4-BE49-F238E27FC236}">
+                <a16:creationId xmlns:a16="http://schemas.microsoft.com/office/drawing/2014/main" id="{E37E3B34-7990-6425-9B03-4BD771C58325}"/>
+              </a:ext>
+            </a:extLst>
+          </p:cNvPr>
+          <p:cNvSpPr/>
+          <p:nvPr/>
+        </p:nvSpPr>
+        <p:spPr>
+          <a:xfrm>
+            <a:off x="10045192" y="2565400"/>
+            <a:ext cx="1544320" cy="995680"/>
+          </a:xfrm>
+          <a:prstGeom prst="roundRect">
+            <a:avLst>
+              <a:gd name="adj" fmla="val 10000"/>
+            </a:avLst>
+          </a:prstGeom>
+          <a:noFill/>
+          <a:ln w="12700">
+            <a:noFill/>
+          </a:ln>
+          <a:extLst>
+            <a:ext uri="{909E8E84-426E-40DD-AFC4-6F175D3DCCD1}">
+              <a14:hiddenFill xmlns:a14="http://schemas.microsoft.com/office/drawing/2010/main">
+                <a:solidFill>
+                  <a:srgbClr val="22D07B">
+                    <a:alpha val="18000"/>
+                  </a:srgbClr>
+                </a:solidFill>
+              </a14:hiddenFill>
+            </a:ext>
+            <a:ext uri="{91240B29-F687-4F45-9708-019B960494DF}">
+              <a14:hiddenLine xmlns:a14="http://schemas.microsoft.com/office/drawing/2010/main" w="12700">
+                <a:solidFill>
+                  <a:srgbClr val="22D07B"/>
+                </a:solidFill>
+              </a14:hiddenLine>
+            </a:ext>
+          </a:extLst>
+        </p:spPr>
+        <p:txBody>
+          <a:bodyPr wrap="square" lIns="0" tIns="0" rIns="0" bIns="0" rtlCol="0" anchor="ctr">
+            <a:noAutofit/>
+          </a:bodyPr>
+          <a:lstStyle/>
+          <a:p>
+            <a:pPr marL="0" indent="0" algn="ctr">
+              <a:spcAft>
+                <a:spcPts val="400"/>
+              </a:spcAft>
+              <a:buNone/>
+            </a:pPr>
+            <a:r>
+              <a:rPr lang="en-US" sz="1700" b="1" dirty="0">
+                <a:solidFill>
+                  <a:srgbClr val="63E6A6"/>
+                </a:solidFill>
+                <a:latin typeface="Archivo" pitchFamily="34" charset="0"/>
+                <a:ea typeface="Archivo" pitchFamily="34" charset="-122"/>
+                <a:cs typeface="Archivo" pitchFamily="34" charset="-120"/>
+              </a:rPr>
+              <a:t>Liberado</a:t>
+            </a:r>
+            <a:endParaRPr lang="en-US" sz="1700" dirty="0"/>
+          </a:p>
+          <a:p>
+            <a:pPr marL="0" indent="0" algn="ctr">
+              <a:spcAft>
+                <a:spcPts val="400"/>
+              </a:spcAft>
+              <a:buNone/>
+            </a:pPr>
+            <a:r>
+              <a:rPr lang="en-US" sz="1000" dirty="0">
+                <a:solidFill>
+                  <a:srgbClr val="ECEEF4"/>
+                </a:solidFill>
+                <a:latin typeface="Martian Mono" pitchFamily="34" charset="0"/>
+                <a:ea typeface="Martian Mono" pitchFamily="34" charset="-122"/>
+                <a:cs typeface="Martian Mono" pitchFamily="34" charset="-120"/>
+              </a:rPr>
+              <a:t>AUTORIZADO</a:t>
+            </a:r>
+            <a:endParaRPr lang="en-US" sz="1700" dirty="0"/>
           </a:p>
         </p:txBody>
       </p:sp>
@@ -6570,9 +6764,11 @@
       <p:sp>
         <p:nvSpPr>
           <p:cNvPr id="2" name="Text 1"/>
-          <p:cNvSpPr/>
+          <p:cNvSpPr>
+            <a:spLocks noGrp="1"/>
+          </p:cNvSpPr>
           <p:nvPr>
-            <p:ph idx="102" type="title" hasCustomPrompt="1"/>
+            <p:ph type="title" idx="102" hasCustomPrompt="1"/>
           </p:nvPr>
         </p:nvSpPr>
         <p:spPr>
@@ -6590,7 +6786,7 @@
           <a:bodyPr wrap="square" lIns="0" tIns="0" rIns="0" bIns="0" rtlCol="0" anchor="ctr"/>
           <a:lstStyle/>
           <a:p>
-            <a:pPr algn="l" indent="0" marL="0">
+            <a:pPr marL="0" indent="0" algn="l">
               <a:buNone/>
             </a:pPr>
             <a:r>
@@ -6604,9 +6800,6 @@
               </a:rPr>
               <a:t>11  </a:t>
             </a:r>
-            <a:pPr algn="l" indent="0" marL="0">
-              <a:buNone/>
-            </a:pPr>
             <a:r>
               <a:rPr lang="en-US" sz="3200" b="1" dirty="0">
                 <a:solidFill>
@@ -6670,11 +6863,11 @@
           <a:bodyPr wrap="square" lIns="0" tIns="0" rIns="0" bIns="0" rtlCol="0" anchor="t"/>
           <a:lstStyle/>
           <a:p>
-            <a:pPr indent="0" marL="0">
-              <a:buNone/>
-            </a:pPr>
-            <a:r>
-              <a:rPr lang="en-US" sz="1000" b="1" spc="120" kern="0" dirty="0">
+            <a:pPr marL="0" indent="0">
+              <a:buNone/>
+            </a:pPr>
+            <a:r>
+              <a:rPr lang="en-US" sz="1000" b="1" kern="0" spc="120" dirty="0">
                 <a:solidFill>
                   <a:srgbClr val="FF7A6F"/>
                 </a:solidFill>
@@ -6709,7 +6902,7 @@
           <a:bodyPr wrap="square" lIns="0" tIns="0" rIns="0" bIns="0" rtlCol="0" anchor="t"/>
           <a:lstStyle/>
           <a:p>
-            <a:pPr indent="0" marL="0">
+            <a:pPr marL="0" indent="0">
               <a:buNone/>
             </a:pPr>
             <a:r>
@@ -6772,11 +6965,11 @@
           <a:bodyPr wrap="square" lIns="0" tIns="0" rIns="0" bIns="0" rtlCol="0" anchor="t"/>
           <a:lstStyle/>
           <a:p>
-            <a:pPr indent="0" marL="0">
-              <a:buNone/>
-            </a:pPr>
-            <a:r>
-              <a:rPr lang="en-US" sz="1000" b="1" spc="120" kern="0" dirty="0">
+            <a:pPr marL="0" indent="0">
+              <a:buNone/>
+            </a:pPr>
+            <a:r>
+              <a:rPr lang="en-US" sz="1000" b="1" kern="0" spc="120" dirty="0">
                 <a:solidFill>
                   <a:srgbClr val="63E6A6"/>
                 </a:solidFill>
@@ -6811,7 +7004,7 @@
           <a:bodyPr wrap="square" lIns="0" tIns="0" rIns="0" bIns="0" rtlCol="0" anchor="t"/>
           <a:lstStyle/>
           <a:p>
-            <a:pPr indent="0" marL="0">
+            <a:pPr marL="0" indent="0">
               <a:buNone/>
             </a:pPr>
             <a:r>
@@ -6877,11 +7070,11 @@
           <a:bodyPr wrap="square" lIns="0" tIns="0" rIns="0" bIns="0" rtlCol="0" anchor="t"/>
           <a:lstStyle/>
           <a:p>
-            <a:pPr indent="0" marL="0">
-              <a:buNone/>
-            </a:pPr>
-            <a:r>
-              <a:rPr lang="en-US" sz="1000" b="1" spc="120" kern="0" dirty="0">
+            <a:pPr marL="0" indent="0">
+              <a:buNone/>
+            </a:pPr>
+            <a:r>
+              <a:rPr lang="en-US" sz="1000" b="1" kern="0" spc="120" dirty="0">
                 <a:solidFill>
                   <a:srgbClr val="FF7A6F"/>
                 </a:solidFill>
@@ -6916,7 +7109,7 @@
           <a:bodyPr wrap="square" lIns="0" tIns="0" rIns="0" bIns="0" rtlCol="0" anchor="t"/>
           <a:lstStyle/>
           <a:p>
-            <a:pPr indent="0" marL="0">
+            <a:pPr marL="0" indent="0">
               <a:buNone/>
             </a:pPr>
             <a:r>
@@ -6979,11 +7172,11 @@
           <a:bodyPr wrap="square" lIns="0" tIns="0" rIns="0" bIns="0" rtlCol="0" anchor="t"/>
           <a:lstStyle/>
           <a:p>
-            <a:pPr indent="0" marL="0">
-              <a:buNone/>
-            </a:pPr>
-            <a:r>
-              <a:rPr lang="en-US" sz="1000" b="1" spc="120" kern="0" dirty="0">
+            <a:pPr marL="0" indent="0">
+              <a:buNone/>
+            </a:pPr>
+            <a:r>
+              <a:rPr lang="en-US" sz="1000" b="1" kern="0" spc="120" dirty="0">
                 <a:solidFill>
                   <a:srgbClr val="63E6A6"/>
                 </a:solidFill>
@@ -7018,7 +7211,7 @@
           <a:bodyPr wrap="square" lIns="0" tIns="0" rIns="0" bIns="0" rtlCol="0" anchor="t"/>
           <a:lstStyle/>
           <a:p>
-            <a:pPr indent="0" marL="0">
+            <a:pPr marL="0" indent="0">
               <a:buNone/>
             </a:pPr>
             <a:r>
@@ -7084,11 +7277,11 @@
           <a:bodyPr wrap="square" lIns="0" tIns="0" rIns="0" bIns="0" rtlCol="0" anchor="t"/>
           <a:lstStyle/>
           <a:p>
-            <a:pPr indent="0" marL="0">
-              <a:buNone/>
-            </a:pPr>
-            <a:r>
-              <a:rPr lang="en-US" sz="1000" b="1" spc="120" kern="0" dirty="0">
+            <a:pPr marL="0" indent="0">
+              <a:buNone/>
+            </a:pPr>
+            <a:r>
+              <a:rPr lang="en-US" sz="1000" b="1" kern="0" spc="120" dirty="0">
                 <a:solidFill>
                   <a:srgbClr val="FF7A6F"/>
                 </a:solidFill>
@@ -7123,7 +7316,7 @@
           <a:bodyPr wrap="square" lIns="0" tIns="0" rIns="0" bIns="0" rtlCol="0" anchor="t"/>
           <a:lstStyle/>
           <a:p>
-            <a:pPr indent="0" marL="0">
+            <a:pPr marL="0" indent="0">
               <a:buNone/>
             </a:pPr>
             <a:r>
@@ -7186,11 +7379,11 @@
           <a:bodyPr wrap="square" lIns="0" tIns="0" rIns="0" bIns="0" rtlCol="0" anchor="t"/>
           <a:lstStyle/>
           <a:p>
-            <a:pPr indent="0" marL="0">
-              <a:buNone/>
-            </a:pPr>
-            <a:r>
-              <a:rPr lang="en-US" sz="1000" b="1" spc="120" kern="0" dirty="0">
+            <a:pPr marL="0" indent="0">
+              <a:buNone/>
+            </a:pPr>
+            <a:r>
+              <a:rPr lang="en-US" sz="1000" b="1" kern="0" spc="120" dirty="0">
                 <a:solidFill>
                   <a:srgbClr val="63E6A6"/>
                 </a:solidFill>
@@ -7225,7 +7418,7 @@
           <a:bodyPr wrap="square" lIns="0" tIns="0" rIns="0" bIns="0" rtlCol="0" anchor="t"/>
           <a:lstStyle/>
           <a:p>
-            <a:pPr indent="0" marL="0">
+            <a:pPr marL="0" indent="0">
               <a:buNone/>
             </a:pPr>
             <a:r>
@@ -7291,7 +7484,7 @@
           <a:bodyPr wrap="square" lIns="0" tIns="0" rIns="0" bIns="0" rtlCol="0" anchor="t"/>
           <a:lstStyle/>
           <a:p>
-            <a:pPr indent="0" marL="0">
+            <a:pPr marL="0" indent="0">
               <a:buNone/>
             </a:pPr>
             <a:r>
@@ -7330,7 +7523,7 @@
           <a:bodyPr wrap="square" lIns="0" tIns="0" rIns="0" bIns="0" rtlCol="0" anchor="t"/>
           <a:lstStyle/>
           <a:p>
-            <a:pPr indent="0" marL="0">
+            <a:pPr marL="0" indent="0">
               <a:buNone/>
             </a:pPr>
             <a:r>
@@ -7369,7 +7562,7 @@
           <a:bodyPr wrap="square" lIns="0" tIns="0" rIns="0" bIns="0" rtlCol="0" anchor="ctr"/>
           <a:lstStyle/>
           <a:p>
-            <a:pPr indent="0" marL="0">
+            <a:pPr marL="0" indent="0">
               <a:buNone/>
             </a:pPr>
             <a:r>
@@ -7420,7 +7613,7 @@
           <a:bodyPr wrap="square" lIns="0" tIns="0" rIns="0" bIns="0" rtlCol="0" anchor="ctr"/>
           <a:lstStyle/>
           <a:p>
-            <a:pPr algn="ctr" indent="0" marL="0">
+            <a:pPr marL="0" indent="0" algn="ctr">
               <a:buNone/>
             </a:pPr>
             <a:r>
@@ -7482,7 +7675,7 @@
           <a:bodyPr wrap="square" lIns="0" tIns="0" rIns="0" bIns="0" rtlCol="0" anchor="ctr"/>
           <a:lstStyle/>
           <a:p>
-            <a:pPr indent="0" marL="0">
+            <a:pPr marL="0" indent="0">
               <a:buNone/>
             </a:pPr>
             <a:r>
@@ -7533,7 +7726,7 @@
           <a:bodyPr wrap="square" lIns="0" tIns="0" rIns="0" bIns="0" rtlCol="0" anchor="ctr"/>
           <a:lstStyle/>
           <a:p>
-            <a:pPr algn="ctr" indent="0" marL="0">
+            <a:pPr marL="0" indent="0" algn="ctr">
               <a:buNone/>
             </a:pPr>
             <a:r>
@@ -7595,7 +7788,7 @@
           <a:bodyPr wrap="square" lIns="0" tIns="0" rIns="0" bIns="0" rtlCol="0" anchor="ctr"/>
           <a:lstStyle/>
           <a:p>
-            <a:pPr indent="0" marL="0">
+            <a:pPr marL="0" indent="0">
               <a:buNone/>
             </a:pPr>
             <a:r>
@@ -7646,7 +7839,7 @@
           <a:bodyPr wrap="square" lIns="0" tIns="0" rIns="0" bIns="0" rtlCol="0" anchor="ctr"/>
           <a:lstStyle/>
           <a:p>
-            <a:pPr algn="ctr" indent="0" marL="0">
+            <a:pPr marL="0" indent="0" algn="ctr">
               <a:buNone/>
             </a:pPr>
             <a:r>
@@ -7708,7 +7901,7 @@
           <a:bodyPr wrap="square" lIns="0" tIns="0" rIns="0" bIns="0" rtlCol="0" anchor="ctr"/>
           <a:lstStyle/>
           <a:p>
-            <a:pPr indent="0" marL="0">
+            <a:pPr marL="0" indent="0">
               <a:buNone/>
             </a:pPr>
             <a:r>
@@ -7759,7 +7952,7 @@
           <a:bodyPr wrap="square" lIns="0" tIns="0" rIns="0" bIns="0" rtlCol="0" anchor="ctr"/>
           <a:lstStyle/>
           <a:p>
-            <a:pPr algn="ctr" indent="0" marL="0">
+            <a:pPr marL="0" indent="0" algn="ctr">
               <a:buNone/>
             </a:pPr>
             <a:r>
@@ -7821,7 +8014,7 @@
           <a:bodyPr wrap="square" lIns="0" tIns="0" rIns="0" bIns="0" rtlCol="0" anchor="ctr"/>
           <a:lstStyle/>
           <a:p>
-            <a:pPr indent="0" marL="0">
+            <a:pPr marL="0" indent="0">
               <a:buNone/>
             </a:pPr>
             <a:r>
@@ -7872,7 +8065,7 @@
           <a:bodyPr wrap="square" lIns="0" tIns="0" rIns="0" bIns="0" rtlCol="0" anchor="ctr"/>
           <a:lstStyle/>
           <a:p>
-            <a:pPr algn="ctr" indent="0" marL="0">
+            <a:pPr marL="0" indent="0" algn="ctr">
               <a:buNone/>
             </a:pPr>
             <a:r>
@@ -7892,7 +8085,7 @@
       </p:sp>
       <p:sp>
         <p:nvSpPr>
-          <p:cNvPr id="25" name="Slide Number Placeholder 0"/>
+          <p:cNvPr id="38" name="Slide Number Placeholder 0"/>
           <p:cNvSpPr>
             <a:spLocks noGrp="1"/>
           </p:cNvSpPr>
@@ -7910,7 +8103,7 @@
           </a:prstGeom>
           <a:extLst>
             <a:ext uri="{C572A759-6A51-4108-AA02-DFA0A04FC94B}">
-              <ma14:wrappingTextBoxFlag xmlns:ma14="http://schemas.microsoft.com/office/mac/drawingml/2011/main" val="0"/>
+              <ma14:wrappingTextBoxFlag xmlns="" xmlns:ma14="http://schemas.microsoft.com/office/mac/drawingml/2011/main" val="0"/>
             </a:ext>
           </a:extLst>
         </p:spPr>
@@ -7931,7 +8124,7 @@
           <a:p>
             <a:pPr algn="r"/>
             <a:fld id="{F7021451-1387-4CA6-816F-3879F97B5CBC}" type="slidenum">
-              <a:rPr b="0" lang="en-US"/>
+              <a:rPr lang="en-US" b="0"/>
               <a:t>12</a:t>
             </a:fld>
             <a:endParaRPr lang="en-US"/>
@@ -7966,9 +8159,11 @@
       <p:sp>
         <p:nvSpPr>
           <p:cNvPr id="2" name="Text 1"/>
-          <p:cNvSpPr/>
+          <p:cNvSpPr>
+            <a:spLocks noGrp="1"/>
+          </p:cNvSpPr>
           <p:nvPr>
-            <p:ph idx="102" type="title" hasCustomPrompt="1"/>
+            <p:ph type="title" idx="102" hasCustomPrompt="1"/>
           </p:nvPr>
         </p:nvSpPr>
         <p:spPr>
@@ -7986,7 +8181,7 @@
           <a:bodyPr wrap="square" lIns="0" tIns="0" rIns="0" bIns="0" rtlCol="0" anchor="ctr"/>
           <a:lstStyle/>
           <a:p>
-            <a:pPr algn="l" indent="0" marL="0">
+            <a:pPr marL="0" indent="0" algn="l">
               <a:buNone/>
             </a:pPr>
             <a:r>
@@ -8000,9 +8195,6 @@
               </a:rPr>
               <a:t>12  </a:t>
             </a:r>
-            <a:pPr algn="l" indent="0" marL="0">
-              <a:buNone/>
-            </a:pPr>
             <a:r>
               <a:rPr lang="en-US" sz="3200" b="1" dirty="0">
                 <a:solidFill>
@@ -8039,7 +8231,7 @@
           <a:bodyPr wrap="square" lIns="0" tIns="0" rIns="0" bIns="0" rtlCol="0" anchor="t"/>
           <a:lstStyle/>
           <a:p>
-            <a:pPr indent="0" marL="0">
+            <a:pPr marL="0" indent="0">
               <a:buNone/>
             </a:pPr>
             <a:r>
@@ -8115,14 +8307,14 @@
       </p:sp>
       <p:pic>
         <p:nvPicPr>
-          <p:cNvPr id="6" name="Image 0" descr="C:/Users/49816471825/AppData/Local/Temp/lockmachine/deck/icones/key-FFD23F.png">    </p:cNvPr>
+          <p:cNvPr id="6" name="Image 0" descr="C:/Users/49816471825/AppData/Local/Temp/lockmachine/deck/icones/key-FFD23F.png"/>
           <p:cNvPicPr>
             <a:picLocks noChangeAspect="1"/>
           </p:cNvPicPr>
           <p:nvPr/>
         </p:nvPicPr>
         <p:blipFill>
-          <a:blip r:embed="rId1"/>
+          <a:blip r:embed="rId3"/>
           <a:stretch>
             <a:fillRect/>
           </a:stretch>
@@ -8158,7 +8350,7 @@
           <a:bodyPr wrap="square" lIns="0" tIns="0" rIns="0" bIns="0" rtlCol="0" anchor="ctr"/>
           <a:lstStyle/>
           <a:p>
-            <a:pPr indent="0" marL="0">
+            <a:pPr marL="0" indent="0">
               <a:buNone/>
             </a:pPr>
             <a:r>
@@ -8197,7 +8389,7 @@
           <a:bodyPr wrap="square" lIns="0" tIns="0" rIns="0" bIns="0" rtlCol="0" anchor="t"/>
           <a:lstStyle/>
           <a:p>
-            <a:pPr indent="0" marL="0">
+            <a:pPr marL="0" indent="0">
               <a:buNone/>
             </a:pPr>
             <a:r>
@@ -8273,14 +8465,14 @@
       </p:sp>
       <p:pic>
         <p:nvPicPr>
-          <p:cNvPr id="11" name="Image 1" descr="C:/Users/49816471825/AppData/Local/Temp/lockmachine/deck/icones/lock-FF7A6F.png">    </p:cNvPr>
+          <p:cNvPr id="11" name="Image 1" descr="C:/Users/49816471825/AppData/Local/Temp/lockmachine/deck/icones/lock-FF7A6F.png"/>
           <p:cNvPicPr>
             <a:picLocks noChangeAspect="1"/>
           </p:cNvPicPr>
           <p:nvPr/>
         </p:nvPicPr>
         <p:blipFill>
-          <a:blip r:embed="rId2"/>
+          <a:blip r:embed="rId4"/>
           <a:stretch>
             <a:fillRect/>
           </a:stretch>
@@ -8316,7 +8508,7 @@
           <a:bodyPr wrap="square" lIns="0" tIns="0" rIns="0" bIns="0" rtlCol="0" anchor="ctr"/>
           <a:lstStyle/>
           <a:p>
-            <a:pPr indent="0" marL="0">
+            <a:pPr marL="0" indent="0">
               <a:buNone/>
             </a:pPr>
             <a:r>
@@ -8355,7 +8547,7 @@
           <a:bodyPr wrap="square" lIns="0" tIns="0" rIns="0" bIns="0" rtlCol="0" anchor="t"/>
           <a:lstStyle/>
           <a:p>
-            <a:pPr indent="0" marL="0">
+            <a:pPr marL="0" indent="0">
               <a:buNone/>
             </a:pPr>
             <a:r>
@@ -8431,14 +8623,14 @@
       </p:sp>
       <p:pic>
         <p:nvPicPr>
-          <p:cNvPr id="16" name="Image 2" descr="C:/Users/49816471825/AppData/Local/Temp/lockmachine/deck/icones/shield-22D07B.png">    </p:cNvPr>
+          <p:cNvPr id="16" name="Image 2" descr="C:/Users/49816471825/AppData/Local/Temp/lockmachine/deck/icones/shield-22D07B.png"/>
           <p:cNvPicPr>
             <a:picLocks noChangeAspect="1"/>
           </p:cNvPicPr>
           <p:nvPr/>
         </p:nvPicPr>
         <p:blipFill>
-          <a:blip r:embed="rId3"/>
+          <a:blip r:embed="rId5"/>
           <a:stretch>
             <a:fillRect/>
           </a:stretch>
@@ -8474,7 +8666,7 @@
           <a:bodyPr wrap="square" lIns="0" tIns="0" rIns="0" bIns="0" rtlCol="0" anchor="ctr"/>
           <a:lstStyle/>
           <a:p>
-            <a:pPr indent="0" marL="0">
+            <a:pPr marL="0" indent="0">
               <a:buNone/>
             </a:pPr>
             <a:r>
@@ -8513,7 +8705,7 @@
           <a:bodyPr wrap="square" lIns="0" tIns="0" rIns="0" bIns="0" rtlCol="0" anchor="t"/>
           <a:lstStyle/>
           <a:p>
-            <a:pPr indent="0" marL="0">
+            <a:pPr marL="0" indent="0">
               <a:buNone/>
             </a:pPr>
             <a:r>
@@ -8589,14 +8781,14 @@
       </p:sp>
       <p:pic>
         <p:nvPicPr>
-          <p:cNvPr id="21" name="Image 3" descr="C:/Users/49816471825/AppData/Local/Temp/lockmachine/deck/icones/db-8C9BFF.png">    </p:cNvPr>
+          <p:cNvPr id="21" name="Image 3" descr="C:/Users/49816471825/AppData/Local/Temp/lockmachine/deck/icones/db-8C9BFF.png"/>
           <p:cNvPicPr>
             <a:picLocks noChangeAspect="1"/>
           </p:cNvPicPr>
           <p:nvPr/>
         </p:nvPicPr>
         <p:blipFill>
-          <a:blip r:embed="rId4"/>
+          <a:blip r:embed="rId6"/>
           <a:stretch>
             <a:fillRect/>
           </a:stretch>
@@ -8632,7 +8824,7 @@
           <a:bodyPr wrap="square" lIns="0" tIns="0" rIns="0" bIns="0" rtlCol="0" anchor="ctr"/>
           <a:lstStyle/>
           <a:p>
-            <a:pPr indent="0" marL="0">
+            <a:pPr marL="0" indent="0">
               <a:buNone/>
             </a:pPr>
             <a:r>
@@ -8671,7 +8863,7 @@
           <a:bodyPr wrap="square" lIns="0" tIns="0" rIns="0" bIns="0" rtlCol="0" anchor="t"/>
           <a:lstStyle/>
           <a:p>
-            <a:pPr indent="0" marL="0">
+            <a:pPr marL="0" indent="0">
               <a:buNone/>
             </a:pPr>
             <a:r>
@@ -8747,14 +8939,14 @@
       </p:sp>
       <p:pic>
         <p:nvPicPr>
-          <p:cNvPr id="26" name="Image 4" descr="C:/Users/49816471825/AppData/Local/Temp/lockmachine/deck/icones/chip-FFD23F.png">    </p:cNvPr>
+          <p:cNvPr id="26" name="Image 4" descr="C:/Users/49816471825/AppData/Local/Temp/lockmachine/deck/icones/chip-FFD23F.png"/>
           <p:cNvPicPr>
             <a:picLocks noChangeAspect="1"/>
           </p:cNvPicPr>
           <p:nvPr/>
         </p:nvPicPr>
         <p:blipFill>
-          <a:blip r:embed="rId5"/>
+          <a:blip r:embed="rId7"/>
           <a:stretch>
             <a:fillRect/>
           </a:stretch>
@@ -8790,7 +8982,7 @@
           <a:bodyPr wrap="square" lIns="0" tIns="0" rIns="0" bIns="0" rtlCol="0" anchor="ctr"/>
           <a:lstStyle/>
           <a:p>
-            <a:pPr indent="0" marL="0">
+            <a:pPr marL="0" indent="0">
               <a:buNone/>
             </a:pPr>
             <a:r>
@@ -8829,7 +9021,7 @@
           <a:bodyPr wrap="square" lIns="0" tIns="0" rIns="0" bIns="0" rtlCol="0" anchor="t"/>
           <a:lstStyle/>
           <a:p>
-            <a:pPr indent="0" marL="0">
+            <a:pPr marL="0" indent="0">
               <a:buNone/>
             </a:pPr>
             <a:r>
@@ -8905,14 +9097,14 @@
       </p:sp>
       <p:pic>
         <p:nvPicPr>
-          <p:cNvPr id="31" name="Image 5" descr="C:/Users/49816471825/AppData/Local/Temp/lockmachine/deck/icones/files-A6ACC0.png">    </p:cNvPr>
+          <p:cNvPr id="31" name="Image 5" descr="C:/Users/49816471825/AppData/Local/Temp/lockmachine/deck/icones/files-A6ACC0.png"/>
           <p:cNvPicPr>
             <a:picLocks noChangeAspect="1"/>
           </p:cNvPicPr>
           <p:nvPr/>
         </p:nvPicPr>
         <p:blipFill>
-          <a:blip r:embed="rId6"/>
+          <a:blip r:embed="rId8"/>
           <a:stretch>
             <a:fillRect/>
           </a:stretch>
@@ -8948,7 +9140,7 @@
           <a:bodyPr wrap="square" lIns="0" tIns="0" rIns="0" bIns="0" rtlCol="0" anchor="ctr"/>
           <a:lstStyle/>
           <a:p>
-            <a:pPr indent="0" marL="0">
+            <a:pPr marL="0" indent="0">
               <a:buNone/>
             </a:pPr>
             <a:r>
@@ -8987,7 +9179,7 @@
           <a:bodyPr wrap="square" lIns="0" tIns="0" rIns="0" bIns="0" rtlCol="0" anchor="t"/>
           <a:lstStyle/>
           <a:p>
-            <a:pPr indent="0" marL="0">
+            <a:pPr marL="0" indent="0">
               <a:buNone/>
             </a:pPr>
             <a:r>
@@ -9007,7 +9199,7 @@
       </p:sp>
       <p:sp>
         <p:nvSpPr>
-          <p:cNvPr id="25" name="Slide Number Placeholder 0"/>
+          <p:cNvPr id="34" name="Slide Number Placeholder 0"/>
           <p:cNvSpPr>
             <a:spLocks noGrp="1"/>
           </p:cNvSpPr>
@@ -9025,7 +9217,7 @@
           </a:prstGeom>
           <a:extLst>
             <a:ext uri="{C572A759-6A51-4108-AA02-DFA0A04FC94B}">
-              <ma14:wrappingTextBoxFlag xmlns:ma14="http://schemas.microsoft.com/office/mac/drawingml/2011/main" val="0"/>
+              <ma14:wrappingTextBoxFlag xmlns="" xmlns:ma14="http://schemas.microsoft.com/office/mac/drawingml/2011/main" val="0"/>
             </a:ext>
           </a:extLst>
         </p:spPr>
@@ -9046,7 +9238,7 @@
           <a:p>
             <a:pPr algn="r"/>
             <a:fld id="{F7021451-1387-4CA6-816F-3879F97B5CBC}" type="slidenum">
-              <a:rPr b="0" lang="en-US"/>
+              <a:rPr lang="en-US" b="0"/>
               <a:t>13</a:t>
             </a:fld>
             <a:endParaRPr lang="en-US"/>
@@ -9081,9 +9273,11 @@
       <p:sp>
         <p:nvSpPr>
           <p:cNvPr id="2" name="Text 1"/>
-          <p:cNvSpPr/>
+          <p:cNvSpPr>
+            <a:spLocks noGrp="1"/>
+          </p:cNvSpPr>
           <p:nvPr>
-            <p:ph idx="102" type="title" hasCustomPrompt="1"/>
+            <p:ph type="title" idx="102" hasCustomPrompt="1"/>
           </p:nvPr>
         </p:nvSpPr>
         <p:spPr>
@@ -9101,7 +9295,7 @@
           <a:bodyPr wrap="square" lIns="0" tIns="0" rIns="0" bIns="0" rtlCol="0" anchor="ctr"/>
           <a:lstStyle/>
           <a:p>
-            <a:pPr algn="l" indent="0" marL="0">
+            <a:pPr marL="0" indent="0" algn="l">
               <a:buNone/>
             </a:pPr>
             <a:r>
@@ -9115,9 +9309,6 @@
               </a:rPr>
               <a:t>13  </a:t>
             </a:r>
-            <a:pPr algn="l" indent="0" marL="0">
-              <a:buNone/>
-            </a:pPr>
             <a:r>
               <a:rPr lang="en-US" sz="3200" b="1" dirty="0">
                 <a:solidFill>
@@ -9154,7 +9345,7 @@
           </a:solidFill>
           <a:ln/>
           <a:effectLst>
-            <a:outerShdw sx="100000" sy="100000" kx="0" ky="0" algn="bl" rotWithShape="0" blurRad="177800" dist="63500" dir="5400000">
+            <a:outerShdw blurRad="177800" dist="63500" dir="5400000" algn="bl" rotWithShape="0">
               <a:srgbClr val="000000">
                 <a:alpha val="50000"/>
               </a:srgbClr>
@@ -9164,14 +9355,14 @@
       </p:sp>
       <p:pic>
         <p:nvPicPr>
-          <p:cNvPr id="4" name="Image 0" descr="C:/Users/49816471825/AppData/Local/Temp/lockmachine/deck/slides-img/painel.png">    </p:cNvPr>
+          <p:cNvPr id="4" name="Image 0" descr="C:/Users/49816471825/AppData/Local/Temp/lockmachine/deck/slides-img/painel.png"/>
           <p:cNvPicPr>
             <a:picLocks noChangeAspect="1"/>
           </p:cNvPicPr>
           <p:nvPr/>
         </p:nvPicPr>
         <p:blipFill>
-          <a:blip r:embed="rId1"/>
+          <a:blip r:embed="rId3"/>
           <a:stretch>
             <a:fillRect/>
           </a:stretch>
@@ -9207,7 +9398,7 @@
           <a:bodyPr wrap="square" lIns="0" tIns="0" rIns="0" bIns="0" rtlCol="0" anchor="t"/>
           <a:lstStyle/>
           <a:p>
-            <a:pPr indent="0" marL="0">
+            <a:pPr marL="0" indent="0">
               <a:buNone/>
             </a:pPr>
             <a:r>
@@ -9248,7 +9439,7 @@
           <a:bodyPr wrap="square" lIns="0" tIns="0" rIns="0" bIns="0" rtlCol="0" anchor="ctr"/>
           <a:lstStyle/>
           <a:p>
-            <a:pPr algn="ctr" indent="0" marL="0">
+            <a:pPr marL="0" indent="0" algn="ctr">
               <a:buNone/>
             </a:pPr>
             <a:r>
@@ -9287,7 +9478,7 @@
           <a:bodyPr wrap="square" lIns="0" tIns="0" rIns="0" bIns="0" rtlCol="0" anchor="ctr"/>
           <a:lstStyle/>
           <a:p>
-            <a:pPr indent="0" marL="0">
+            <a:pPr marL="0" indent="0">
               <a:buNone/>
             </a:pPr>
             <a:r>
@@ -9328,7 +9519,7 @@
           <a:bodyPr wrap="square" lIns="0" tIns="0" rIns="0" bIns="0" rtlCol="0" anchor="ctr"/>
           <a:lstStyle/>
           <a:p>
-            <a:pPr algn="ctr" indent="0" marL="0">
+            <a:pPr marL="0" indent="0" algn="ctr">
               <a:buNone/>
             </a:pPr>
             <a:r>
@@ -9367,7 +9558,7 @@
           <a:bodyPr wrap="square" lIns="0" tIns="0" rIns="0" bIns="0" rtlCol="0" anchor="ctr"/>
           <a:lstStyle/>
           <a:p>
-            <a:pPr indent="0" marL="0">
+            <a:pPr marL="0" indent="0">
               <a:buNone/>
             </a:pPr>
             <a:r>
@@ -9408,7 +9599,7 @@
           <a:bodyPr wrap="square" lIns="0" tIns="0" rIns="0" bIns="0" rtlCol="0" anchor="ctr"/>
           <a:lstStyle/>
           <a:p>
-            <a:pPr algn="ctr" indent="0" marL="0">
+            <a:pPr marL="0" indent="0" algn="ctr">
               <a:buNone/>
             </a:pPr>
             <a:r>
@@ -9447,7 +9638,7 @@
           <a:bodyPr wrap="square" lIns="0" tIns="0" rIns="0" bIns="0" rtlCol="0" anchor="ctr"/>
           <a:lstStyle/>
           <a:p>
-            <a:pPr indent="0" marL="0">
+            <a:pPr marL="0" indent="0">
               <a:buNone/>
             </a:pPr>
             <a:r>
@@ -9488,7 +9679,7 @@
           <a:bodyPr wrap="square" lIns="0" tIns="0" rIns="0" bIns="0" rtlCol="0" anchor="ctr"/>
           <a:lstStyle/>
           <a:p>
-            <a:pPr algn="ctr" indent="0" marL="0">
+            <a:pPr marL="0" indent="0" algn="ctr">
               <a:buNone/>
             </a:pPr>
             <a:r>
@@ -9527,7 +9718,7 @@
           <a:bodyPr wrap="square" lIns="0" tIns="0" rIns="0" bIns="0" rtlCol="0" anchor="ctr"/>
           <a:lstStyle/>
           <a:p>
-            <a:pPr indent="0" marL="0">
+            <a:pPr marL="0" indent="0">
               <a:buNone/>
             </a:pPr>
             <a:r>
@@ -9568,7 +9759,7 @@
           <a:bodyPr wrap="square" lIns="0" tIns="0" rIns="0" bIns="0" rtlCol="0" anchor="ctr"/>
           <a:lstStyle/>
           <a:p>
-            <a:pPr algn="ctr" indent="0" marL="0">
+            <a:pPr marL="0" indent="0" algn="ctr">
               <a:buNone/>
             </a:pPr>
             <a:r>
@@ -9607,7 +9798,7 @@
           <a:bodyPr wrap="square" lIns="0" tIns="0" rIns="0" bIns="0" rtlCol="0" anchor="ctr"/>
           <a:lstStyle/>
           <a:p>
-            <a:pPr indent="0" marL="0">
+            <a:pPr marL="0" indent="0">
               <a:buNone/>
             </a:pPr>
             <a:r>
@@ -9673,11 +9864,11 @@
           <a:bodyPr wrap="square" lIns="0" tIns="0" rIns="0" bIns="0" rtlCol="0" anchor="t"/>
           <a:lstStyle/>
           <a:p>
-            <a:pPr indent="0" marL="0">
-              <a:buNone/>
-            </a:pPr>
-            <a:r>
-              <a:rPr lang="en-US" sz="1000" b="1" spc="120" kern="0" dirty="0">
+            <a:pPr marL="0" indent="0">
+              <a:buNone/>
+            </a:pPr>
+            <a:r>
+              <a:rPr lang="en-US" sz="1000" b="1" kern="0" spc="120" dirty="0">
                 <a:solidFill>
                   <a:srgbClr val="FFD23F"/>
                 </a:solidFill>
@@ -9712,7 +9903,7 @@
           <a:bodyPr wrap="square" lIns="0" tIns="0" rIns="0" bIns="0" rtlCol="0" anchor="t"/>
           <a:lstStyle/>
           <a:p>
-            <a:pPr indent="0" marL="0">
+            <a:pPr marL="0" indent="0">
               <a:buNone/>
             </a:pPr>
             <a:r>
@@ -9750,7 +9941,7 @@
           </a:prstGeom>
           <a:extLst>
             <a:ext uri="{C572A759-6A51-4108-AA02-DFA0A04FC94B}">
-              <ma14:wrappingTextBoxFlag xmlns:ma14="http://schemas.microsoft.com/office/mac/drawingml/2011/main" val="0"/>
+              <ma14:wrappingTextBoxFlag xmlns="" xmlns:ma14="http://schemas.microsoft.com/office/mac/drawingml/2011/main" val="0"/>
             </a:ext>
           </a:extLst>
         </p:spPr>
@@ -9771,7 +9962,7 @@
           <a:p>
             <a:pPr algn="r"/>
             <a:fld id="{F7021451-1387-4CA6-816F-3879F97B5CBC}" type="slidenum">
-              <a:rPr b="0" lang="en-US"/>
+              <a:rPr lang="en-US" b="0"/>
               <a:t>14</a:t>
             </a:fld>
             <a:endParaRPr lang="en-US"/>
@@ -9806,9 +9997,11 @@
       <p:sp>
         <p:nvSpPr>
           <p:cNvPr id="2" name="Text 1"/>
-          <p:cNvSpPr/>
+          <p:cNvSpPr>
+            <a:spLocks noGrp="1"/>
+          </p:cNvSpPr>
           <p:nvPr>
-            <p:ph idx="102" type="title" hasCustomPrompt="1"/>
+            <p:ph type="title" idx="102" hasCustomPrompt="1"/>
           </p:nvPr>
         </p:nvSpPr>
         <p:spPr>
@@ -9826,7 +10019,7 @@
           <a:bodyPr wrap="square" lIns="0" tIns="0" rIns="0" bIns="0" rtlCol="0" anchor="ctr"/>
           <a:lstStyle/>
           <a:p>
-            <a:pPr algn="l" indent="0" marL="0">
+            <a:pPr marL="0" indent="0" algn="l">
               <a:buNone/>
             </a:pPr>
             <a:r>
@@ -9840,9 +10033,6 @@
               </a:rPr>
               <a:t>14  </a:t>
             </a:r>
-            <a:pPr algn="l" indent="0" marL="0">
-              <a:buNone/>
-            </a:pPr>
             <a:r>
               <a:rPr lang="en-US" sz="3200" b="1" dirty="0">
                 <a:solidFill>
@@ -9884,7 +10074,7 @@
             <a:prstDash val="solid"/>
           </a:ln>
           <a:effectLst>
-            <a:outerShdw sx="100000" sy="100000" kx="0" ky="0" algn="bl" rotWithShape="0" blurRad="177800" dist="63500" dir="5400000">
+            <a:outerShdw blurRad="177800" dist="63500" dir="5400000" algn="bl" rotWithShape="0">
               <a:srgbClr val="000000">
                 <a:alpha val="50000"/>
               </a:srgbClr>
@@ -9894,14 +10084,14 @@
       </p:sp>
       <p:pic>
         <p:nvPicPr>
-          <p:cNvPr id="4" name="Image 0" descr="C:/Users/49816471825/AppData/Local/Temp/lockmachine/deck/slides-img/cel-inicio.png">    </p:cNvPr>
+          <p:cNvPr id="4" name="Image 0" descr="C:/Users/49816471825/AppData/Local/Temp/lockmachine/deck/slides-img/cel-inicio.png"/>
           <p:cNvPicPr>
             <a:picLocks noChangeAspect="1"/>
           </p:cNvPicPr>
           <p:nvPr/>
         </p:nvPicPr>
         <p:blipFill>
-          <a:blip r:embed="rId1"/>
+          <a:blip r:embed="rId3"/>
           <a:stretch>
             <a:fillRect/>
           </a:stretch>
@@ -9937,7 +10127,7 @@
           <a:bodyPr wrap="square" lIns="0" tIns="0" rIns="0" bIns="0" rtlCol="0" anchor="t"/>
           <a:lstStyle/>
           <a:p>
-            <a:pPr algn="ctr" indent="0" marL="0">
+            <a:pPr marL="0" indent="0" algn="ctr">
               <a:buNone/>
             </a:pPr>
             <a:r>
@@ -9981,7 +10171,7 @@
             <a:prstDash val="solid"/>
           </a:ln>
           <a:effectLst>
-            <a:outerShdw sx="100000" sy="100000" kx="0" ky="0" algn="bl" rotWithShape="0" blurRad="177800" dist="63500" dir="5400000">
+            <a:outerShdw blurRad="177800" dist="63500" dir="5400000" algn="bl" rotWithShape="0">
               <a:srgbClr val="000000">
                 <a:alpha val="50000"/>
               </a:srgbClr>
@@ -9991,14 +10181,14 @@
       </p:sp>
       <p:pic>
         <p:nvPicPr>
-          <p:cNvPr id="7" name="Image 1" descr="C:/Users/49816471825/AppData/Local/Temp/lockmachine/deck/slides-img/cel-capacitacoes.png">    </p:cNvPr>
+          <p:cNvPr id="7" name="Image 1" descr="C:/Users/49816471825/AppData/Local/Temp/lockmachine/deck/slides-img/cel-capacitacoes.png"/>
           <p:cNvPicPr>
             <a:picLocks noChangeAspect="1"/>
           </p:cNvPicPr>
           <p:nvPr/>
         </p:nvPicPr>
         <p:blipFill>
-          <a:blip r:embed="rId2"/>
+          <a:blip r:embed="rId4"/>
           <a:stretch>
             <a:fillRect/>
           </a:stretch>
@@ -10034,7 +10224,7 @@
           <a:bodyPr wrap="square" lIns="0" tIns="0" rIns="0" bIns="0" rtlCol="0" anchor="t"/>
           <a:lstStyle/>
           <a:p>
-            <a:pPr algn="ctr" indent="0" marL="0">
+            <a:pPr marL="0" indent="0" algn="ctr">
               <a:buNone/>
             </a:pPr>
             <a:r>
@@ -10078,7 +10268,7 @@
             <a:prstDash val="solid"/>
           </a:ln>
           <a:effectLst>
-            <a:outerShdw sx="100000" sy="100000" kx="0" ky="0" algn="bl" rotWithShape="0" blurRad="177800" dist="63500" dir="5400000">
+            <a:outerShdw blurRad="177800" dist="63500" dir="5400000" algn="bl" rotWithShape="0">
               <a:srgbClr val="000000">
                 <a:alpha val="50000"/>
               </a:srgbClr>
@@ -10088,14 +10278,14 @@
       </p:sp>
       <p:pic>
         <p:nvPicPr>
-          <p:cNvPr id="10" name="Image 2" descr="C:/Users/49816471825/AppData/Local/Temp/lockmachine/deck/slides-img/cel-maquinas.png">    </p:cNvPr>
+          <p:cNvPr id="10" name="Image 2" descr="C:/Users/49816471825/AppData/Local/Temp/lockmachine/deck/slides-img/cel-maquinas.png"/>
           <p:cNvPicPr>
             <a:picLocks noChangeAspect="1"/>
           </p:cNvPicPr>
           <p:nvPr/>
         </p:nvPicPr>
         <p:blipFill>
-          <a:blip r:embed="rId3"/>
+          <a:blip r:embed="rId5"/>
           <a:stretch>
             <a:fillRect/>
           </a:stretch>
@@ -10131,7 +10321,7 @@
           <a:bodyPr wrap="square" lIns="0" tIns="0" rIns="0" bIns="0" rtlCol="0" anchor="t"/>
           <a:lstStyle/>
           <a:p>
-            <a:pPr algn="ctr" indent="0" marL="0">
+            <a:pPr marL="0" indent="0" algn="ctr">
               <a:buNone/>
             </a:pPr>
             <a:r>
@@ -10170,7 +10360,7 @@
           <a:bodyPr wrap="square" lIns="0" tIns="0" rIns="0" bIns="0" rtlCol="0" anchor="t"/>
           <a:lstStyle/>
           <a:p>
-            <a:pPr indent="0" marL="0">
+            <a:pPr marL="0" indent="0">
               <a:buNone/>
             </a:pPr>
             <a:r>
@@ -10352,14 +10542,14 @@
       </p:sp>
       <p:pic>
         <p:nvPicPr>
-          <p:cNvPr id="16" name="Image 3" descr="C:/Users/49816471825/AppData/Local/Temp/lockmachine/deck/icones/globe-22D07B.png">    </p:cNvPr>
+          <p:cNvPr id="16" name="Image 3" descr="C:/Users/49816471825/AppData/Local/Temp/lockmachine/deck/icones/globe-22D07B.png"/>
           <p:cNvPicPr>
             <a:picLocks noChangeAspect="1"/>
           </p:cNvPicPr>
           <p:nvPr/>
         </p:nvPicPr>
         <p:blipFill>
-          <a:blip r:embed="rId4"/>
+          <a:blip r:embed="rId6"/>
           <a:stretch>
             <a:fillRect/>
           </a:stretch>
@@ -10395,11 +10585,11 @@
           <a:bodyPr wrap="square" lIns="0" tIns="0" rIns="0" bIns="0" rtlCol="0" anchor="ctr"/>
           <a:lstStyle/>
           <a:p>
-            <a:pPr indent="0" marL="0">
-              <a:buNone/>
-            </a:pPr>
-            <a:r>
-              <a:rPr lang="en-US" sz="1200" dirty="0">
+            <a:pPr marL="0" indent="0">
+              <a:buNone/>
+            </a:pPr>
+            <a:r>
+              <a:rPr lang="pt-BR" sz="1200">
                 <a:solidFill>
                   <a:srgbClr val="A6ACC0"/>
                 </a:solidFill>
@@ -10407,7 +10597,7 @@
                 <a:ea typeface="Archivo" pitchFamily="34" charset="-122"/>
                 <a:cs typeface="Archivo" pitchFamily="34" charset="-120"/>
               </a:rPr>
-              <a:t>Funciona no navegador hoje; vira APK para Android depois da publicação com HTTPS.</a:t>
+              <a:t>Funciona no navegador e já está no ar com HTTPS; o APK para Android é o próximo passo.</a:t>
             </a:r>
             <a:endParaRPr lang="en-US" sz="1200" dirty="0"/>
           </a:p>
@@ -10433,7 +10623,7 @@
           </a:prstGeom>
           <a:extLst>
             <a:ext uri="{C572A759-6A51-4108-AA02-DFA0A04FC94B}">
-              <ma14:wrappingTextBoxFlag xmlns:ma14="http://schemas.microsoft.com/office/mac/drawingml/2011/main" val="0"/>
+              <ma14:wrappingTextBoxFlag xmlns="" xmlns:ma14="http://schemas.microsoft.com/office/mac/drawingml/2011/main" val="0"/>
             </a:ext>
           </a:extLst>
         </p:spPr>
@@ -10454,7 +10644,7 @@
           <a:p>
             <a:pPr algn="r"/>
             <a:fld id="{F7021451-1387-4CA6-816F-3879F97B5CBC}" type="slidenum">
-              <a:rPr b="0" lang="en-US"/>
+              <a:rPr lang="en-US" b="0"/>
               <a:t>15</a:t>
             </a:fld>
             <a:endParaRPr lang="en-US"/>
@@ -10489,9 +10679,11 @@
       <p:sp>
         <p:nvSpPr>
           <p:cNvPr id="2" name="Text 1"/>
-          <p:cNvSpPr/>
+          <p:cNvSpPr>
+            <a:spLocks noGrp="1"/>
+          </p:cNvSpPr>
           <p:nvPr>
-            <p:ph idx="102" type="title" hasCustomPrompt="1"/>
+            <p:ph type="title" idx="102" hasCustomPrompt="1"/>
           </p:nvPr>
         </p:nvSpPr>
         <p:spPr>
@@ -10509,7 +10701,7 @@
           <a:bodyPr wrap="square" lIns="0" tIns="0" rIns="0" bIns="0" rtlCol="0" anchor="ctr"/>
           <a:lstStyle/>
           <a:p>
-            <a:pPr algn="l" indent="0" marL="0">
+            <a:pPr marL="0" indent="0" algn="l">
               <a:buNone/>
             </a:pPr>
             <a:r>
@@ -10523,9 +10715,6 @@
               </a:rPr>
               <a:t>15  </a:t>
             </a:r>
-            <a:pPr algn="l" indent="0" marL="0">
-              <a:buNone/>
-            </a:pPr>
             <a:r>
               <a:rPr lang="en-US" sz="3200" b="1" dirty="0">
                 <a:solidFill>
@@ -10562,7 +10751,7 @@
           <a:bodyPr wrap="square" lIns="0" tIns="0" rIns="0" bIns="0" rtlCol="0" anchor="t"/>
           <a:lstStyle/>
           <a:p>
-            <a:pPr indent="0" marL="0">
+            <a:pPr marL="0" indent="0">
               <a:buNone/>
             </a:pPr>
             <a:r>
@@ -10601,11 +10790,11 @@
           <a:bodyPr wrap="square" lIns="0" tIns="0" rIns="0" bIns="0" rtlCol="0" anchor="t"/>
           <a:lstStyle/>
           <a:p>
-            <a:pPr indent="0" marL="0">
-              <a:buNone/>
-            </a:pPr>
-            <a:r>
-              <a:rPr lang="en-US" sz="1000" b="1" spc="120" kern="0" dirty="0">
+            <a:pPr marL="0" indent="0">
+              <a:buNone/>
+            </a:pPr>
+            <a:r>
+              <a:rPr lang="en-US" sz="1000" b="1" kern="0" spc="120" dirty="0">
                 <a:solidFill>
                   <a:srgbClr val="7D849C"/>
                 </a:solidFill>
@@ -10679,7 +10868,7 @@
           <a:bodyPr wrap="square" lIns="0" tIns="0" rIns="0" bIns="0" rtlCol="0" anchor="ctr"/>
           <a:lstStyle/>
           <a:p>
-            <a:pPr algn="ctr" indent="0" marL="0">
+            <a:pPr marL="0" indent="0" algn="ctr">
               <a:buNone/>
             </a:pPr>
             <a:r>
@@ -10718,7 +10907,7 @@
           <a:bodyPr wrap="square" lIns="0" tIns="0" rIns="0" bIns="0" rtlCol="0" anchor="ctr"/>
           <a:lstStyle/>
           <a:p>
-            <a:pPr indent="0" marL="0">
+            <a:pPr marL="0" indent="0">
               <a:buNone/>
             </a:pPr>
             <a:r>
@@ -10735,7 +10924,7 @@
             <a:endParaRPr lang="en-US" sz="1400" dirty="0"/>
           </a:p>
           <a:p>
-            <a:pPr indent="0" marL="0">
+            <a:pPr marL="0" indent="0">
               <a:buNone/>
             </a:pPr>
             <a:r>
@@ -10813,7 +11002,7 @@
           <a:bodyPr wrap="square" lIns="0" tIns="0" rIns="0" bIns="0" rtlCol="0" anchor="ctr"/>
           <a:lstStyle/>
           <a:p>
-            <a:pPr algn="ctr" indent="0" marL="0">
+            <a:pPr marL="0" indent="0" algn="ctr">
               <a:buNone/>
             </a:pPr>
             <a:r>
@@ -10852,7 +11041,7 @@
           <a:bodyPr wrap="square" lIns="0" tIns="0" rIns="0" bIns="0" rtlCol="0" anchor="ctr"/>
           <a:lstStyle/>
           <a:p>
-            <a:pPr indent="0" marL="0">
+            <a:pPr marL="0" indent="0">
               <a:buNone/>
             </a:pPr>
             <a:r>
@@ -10869,7 +11058,7 @@
             <a:endParaRPr lang="en-US" sz="1400" dirty="0"/>
           </a:p>
           <a:p>
-            <a:pPr indent="0" marL="0">
+            <a:pPr marL="0" indent="0">
               <a:buNone/>
             </a:pPr>
             <a:r>
@@ -10947,7 +11136,7 @@
           <a:bodyPr wrap="square" lIns="0" tIns="0" rIns="0" bIns="0" rtlCol="0" anchor="ctr"/>
           <a:lstStyle/>
           <a:p>
-            <a:pPr algn="ctr" indent="0" marL="0">
+            <a:pPr marL="0" indent="0" algn="ctr">
               <a:buNone/>
             </a:pPr>
             <a:r>
@@ -10986,7 +11175,7 @@
           <a:bodyPr wrap="square" lIns="0" tIns="0" rIns="0" bIns="0" rtlCol="0" anchor="ctr"/>
           <a:lstStyle/>
           <a:p>
-            <a:pPr indent="0" marL="0">
+            <a:pPr marL="0" indent="0">
               <a:buNone/>
             </a:pPr>
             <a:r>
@@ -11003,7 +11192,7 @@
             <a:endParaRPr lang="en-US" sz="1400" dirty="0"/>
           </a:p>
           <a:p>
-            <a:pPr indent="0" marL="0">
+            <a:pPr marL="0" indent="0">
               <a:buNone/>
             </a:pPr>
             <a:r>
@@ -11111,7 +11300,7 @@
           <a:bodyPr wrap="square" lIns="0" tIns="0" rIns="0" bIns="0" rtlCol="0" anchor="ctr"/>
           <a:lstStyle/>
           <a:p>
-            <a:pPr indent="0" marL="0">
+            <a:pPr marL="0" indent="0">
               <a:buNone/>
             </a:pPr>
             <a:r>
@@ -11325,7 +11514,7 @@
           <a:bodyPr wrap="square" lIns="0" tIns="0" rIns="0" bIns="0" rtlCol="0" anchor="ctr"/>
           <a:lstStyle/>
           <a:p>
-            <a:pPr indent="0" marL="0">
+            <a:pPr marL="0" indent="0">
               <a:buNone/>
             </a:pPr>
             <a:r>
@@ -11448,7 +11637,7 @@
           </a:prstGeom>
           <a:extLst>
             <a:ext uri="{C572A759-6A51-4108-AA02-DFA0A04FC94B}">
-              <ma14:wrappingTextBoxFlag xmlns:ma14="http://schemas.microsoft.com/office/mac/drawingml/2011/main" val="0"/>
+              <ma14:wrappingTextBoxFlag xmlns="" xmlns:ma14="http://schemas.microsoft.com/office/mac/drawingml/2011/main" val="0"/>
             </a:ext>
           </a:extLst>
         </p:spPr>
@@ -11469,7 +11658,7 @@
           <a:p>
             <a:pPr algn="r"/>
             <a:fld id="{F7021451-1387-4CA6-816F-3879F97B5CBC}" type="slidenum">
-              <a:rPr b="0" lang="en-US"/>
+              <a:rPr lang="en-US" b="0"/>
               <a:t>16</a:t>
             </a:fld>
             <a:endParaRPr lang="en-US"/>
@@ -11504,9 +11693,11 @@
       <p:sp>
         <p:nvSpPr>
           <p:cNvPr id="2" name="Text 1"/>
-          <p:cNvSpPr/>
+          <p:cNvSpPr>
+            <a:spLocks noGrp="1"/>
+          </p:cNvSpPr>
           <p:nvPr>
-            <p:ph idx="102" type="title" hasCustomPrompt="1"/>
+            <p:ph type="title" idx="102" hasCustomPrompt="1"/>
           </p:nvPr>
         </p:nvSpPr>
         <p:spPr>
@@ -11524,7 +11715,7 @@
           <a:bodyPr wrap="square" lIns="0" tIns="0" rIns="0" bIns="0" rtlCol="0" anchor="ctr"/>
           <a:lstStyle/>
           <a:p>
-            <a:pPr algn="l" indent="0" marL="0">
+            <a:pPr marL="0" indent="0" algn="l">
               <a:buNone/>
             </a:pPr>
             <a:r>
@@ -11538,9 +11729,6 @@
               </a:rPr>
               <a:t>16  </a:t>
             </a:r>
-            <a:pPr algn="l" indent="0" marL="0">
-              <a:buNone/>
-            </a:pPr>
             <a:r>
               <a:rPr lang="en-US" sz="3200" b="1" dirty="0">
                 <a:solidFill>
@@ -11604,7 +11792,7 @@
           <a:bodyPr wrap="square" lIns="0" tIns="0" rIns="0" bIns="0" rtlCol="0" anchor="b"/>
           <a:lstStyle/>
           <a:p>
-            <a:pPr indent="0" marL="0">
+            <a:pPr marL="0" indent="0">
               <a:buNone/>
             </a:pPr>
             <a:r>
@@ -11618,9 +11806,6 @@
               </a:rPr>
               <a:t>6</a:t>
             </a:r>
-            <a:pPr indent="0" marL="0">
-              <a:buNone/>
-            </a:pPr>
             <a:r>
               <a:rPr lang="en-US" sz="2800" b="1" dirty="0">
                 <a:solidFill>
@@ -11657,7 +11842,7 @@
           <a:bodyPr wrap="square" lIns="0" tIns="0" rIns="0" bIns="0" rtlCol="0" anchor="t"/>
           <a:lstStyle/>
           <a:p>
-            <a:pPr indent="0" marL="0">
+            <a:pPr marL="0" indent="0">
               <a:buNone/>
             </a:pPr>
             <a:r>
@@ -11696,7 +11881,7 @@
           <a:bodyPr wrap="square" lIns="0" tIns="0" rIns="0" bIns="0" rtlCol="0" anchor="t"/>
           <a:lstStyle/>
           <a:p>
-            <a:pPr indent="0" marL="0">
+            <a:pPr marL="0" indent="0">
               <a:buNone/>
             </a:pPr>
             <a:r>
@@ -11735,7 +11920,7 @@
           <a:bodyPr wrap="square" lIns="0" tIns="0" rIns="0" bIns="0" rtlCol="0" anchor="t"/>
           <a:lstStyle/>
           <a:p>
-            <a:pPr indent="0" marL="0">
+            <a:pPr marL="0" indent="0">
               <a:buNone/>
             </a:pPr>
             <a:r>
@@ -11801,7 +11986,7 @@
           <a:bodyPr wrap="square" lIns="0" tIns="0" rIns="0" bIns="0" rtlCol="0" anchor="ctr"/>
           <a:lstStyle/>
           <a:p>
-            <a:pPr indent="0" marL="0">
+            <a:pPr marL="0" indent="0">
               <a:buNone/>
             </a:pPr>
             <a:r>
@@ -11840,7 +12025,7 @@
           <a:bodyPr wrap="square" lIns="0" tIns="0" rIns="0" bIns="0" rtlCol="0" anchor="ctr"/>
           <a:lstStyle/>
           <a:p>
-            <a:pPr indent="0" marL="0">
+            <a:pPr marL="0" indent="0">
               <a:buNone/>
             </a:pPr>
             <a:r>
@@ -11891,7 +12076,7 @@
           <a:bodyPr wrap="square" lIns="0" tIns="0" rIns="0" bIns="0" rtlCol="0" anchor="ctr"/>
           <a:lstStyle/>
           <a:p>
-            <a:pPr algn="ctr" indent="0" marL="0">
+            <a:pPr marL="0" indent="0" algn="ctr">
               <a:buNone/>
             </a:pPr>
             <a:r>
@@ -11957,7 +12142,7 @@
           <a:bodyPr wrap="square" lIns="0" tIns="0" rIns="0" bIns="0" rtlCol="0" anchor="ctr"/>
           <a:lstStyle/>
           <a:p>
-            <a:pPr indent="0" marL="0">
+            <a:pPr marL="0" indent="0">
               <a:buNone/>
             </a:pPr>
             <a:r>
@@ -11996,7 +12181,7 @@
           <a:bodyPr wrap="square" lIns="0" tIns="0" rIns="0" bIns="0" rtlCol="0" anchor="ctr"/>
           <a:lstStyle/>
           <a:p>
-            <a:pPr indent="0" marL="0">
+            <a:pPr marL="0" indent="0">
               <a:buNone/>
             </a:pPr>
             <a:r>
@@ -12047,7 +12232,7 @@
           <a:bodyPr wrap="square" lIns="0" tIns="0" rIns="0" bIns="0" rtlCol="0" anchor="ctr"/>
           <a:lstStyle/>
           <a:p>
-            <a:pPr algn="ctr" indent="0" marL="0">
+            <a:pPr marL="0" indent="0" algn="ctr">
               <a:buNone/>
             </a:pPr>
             <a:r>
@@ -12113,7 +12298,7 @@
           <a:bodyPr wrap="square" lIns="0" tIns="0" rIns="0" bIns="0" rtlCol="0" anchor="ctr"/>
           <a:lstStyle/>
           <a:p>
-            <a:pPr indent="0" marL="0">
+            <a:pPr marL="0" indent="0">
               <a:buNone/>
             </a:pPr>
             <a:r>
@@ -12152,7 +12337,7 @@
           <a:bodyPr wrap="square" lIns="0" tIns="0" rIns="0" bIns="0" rtlCol="0" anchor="ctr"/>
           <a:lstStyle/>
           <a:p>
-            <a:pPr indent="0" marL="0">
+            <a:pPr marL="0" indent="0">
               <a:buNone/>
             </a:pPr>
             <a:r>
@@ -12203,7 +12388,7 @@
           <a:bodyPr wrap="square" lIns="0" tIns="0" rIns="0" bIns="0" rtlCol="0" anchor="ctr"/>
           <a:lstStyle/>
           <a:p>
-            <a:pPr algn="ctr" indent="0" marL="0">
+            <a:pPr marL="0" indent="0" algn="ctr">
               <a:buNone/>
             </a:pPr>
             <a:r>
@@ -12269,7 +12454,7 @@
           <a:bodyPr wrap="square" lIns="0" tIns="0" rIns="0" bIns="0" rtlCol="0" anchor="ctr"/>
           <a:lstStyle/>
           <a:p>
-            <a:pPr indent="0" marL="0">
+            <a:pPr marL="0" indent="0">
               <a:buNone/>
             </a:pPr>
             <a:r>
@@ -12308,7 +12493,7 @@
           <a:bodyPr wrap="square" lIns="0" tIns="0" rIns="0" bIns="0" rtlCol="0" anchor="ctr"/>
           <a:lstStyle/>
           <a:p>
-            <a:pPr indent="0" marL="0">
+            <a:pPr marL="0" indent="0">
               <a:buNone/>
             </a:pPr>
             <a:r>
@@ -12359,7 +12544,7 @@
           <a:bodyPr wrap="square" lIns="0" tIns="0" rIns="0" bIns="0" rtlCol="0" anchor="ctr"/>
           <a:lstStyle/>
           <a:p>
-            <a:pPr algn="ctr" indent="0" marL="0">
+            <a:pPr marL="0" indent="0" algn="ctr">
               <a:buNone/>
             </a:pPr>
             <a:r>
@@ -12425,7 +12610,7 @@
           <a:bodyPr wrap="square" lIns="0" tIns="0" rIns="0" bIns="0" rtlCol="0" anchor="ctr"/>
           <a:lstStyle/>
           <a:p>
-            <a:pPr indent="0" marL="0">
+            <a:pPr marL="0" indent="0">
               <a:buNone/>
             </a:pPr>
             <a:r>
@@ -12464,7 +12649,7 @@
           <a:bodyPr wrap="square" lIns="0" tIns="0" rIns="0" bIns="0" rtlCol="0" anchor="ctr"/>
           <a:lstStyle/>
           <a:p>
-            <a:pPr indent="0" marL="0">
+            <a:pPr marL="0" indent="0">
               <a:buNone/>
             </a:pPr>
             <a:r>
@@ -12515,7 +12700,7 @@
           <a:bodyPr wrap="square" lIns="0" tIns="0" rIns="0" bIns="0" rtlCol="0" anchor="ctr"/>
           <a:lstStyle/>
           <a:p>
-            <a:pPr algn="ctr" indent="0" marL="0">
+            <a:pPr marL="0" indent="0" algn="ctr">
               <a:buNone/>
             </a:pPr>
             <a:r>
@@ -12581,7 +12766,7 @@
           <a:bodyPr wrap="square" lIns="0" tIns="0" rIns="0" bIns="0" rtlCol="0" anchor="ctr"/>
           <a:lstStyle/>
           <a:p>
-            <a:pPr indent="0" marL="0">
+            <a:pPr marL="0" indent="0">
               <a:buNone/>
             </a:pPr>
             <a:r>
@@ -12620,7 +12805,7 @@
           <a:bodyPr wrap="square" lIns="0" tIns="0" rIns="0" bIns="0" rtlCol="0" anchor="ctr"/>
           <a:lstStyle/>
           <a:p>
-            <a:pPr indent="0" marL="0">
+            <a:pPr marL="0" indent="0">
               <a:buNone/>
             </a:pPr>
             <a:r>
@@ -12671,7 +12856,7 @@
           <a:bodyPr wrap="square" lIns="0" tIns="0" rIns="0" bIns="0" rtlCol="0" anchor="ctr"/>
           <a:lstStyle/>
           <a:p>
-            <a:pPr algn="ctr" indent="0" marL="0">
+            <a:pPr marL="0" indent="0" algn="ctr">
               <a:buNone/>
             </a:pPr>
             <a:r>
@@ -12737,7 +12922,7 @@
           <a:bodyPr wrap="square" lIns="0" tIns="0" rIns="0" bIns="0" rtlCol="0" anchor="ctr"/>
           <a:lstStyle/>
           <a:p>
-            <a:pPr indent="0" marL="0">
+            <a:pPr marL="0" indent="0">
               <a:buNone/>
             </a:pPr>
             <a:r>
@@ -12776,11 +12961,11 @@
           <a:bodyPr wrap="square" lIns="0" tIns="0" rIns="0" bIns="0" rtlCol="0" anchor="ctr"/>
           <a:lstStyle/>
           <a:p>
-            <a:pPr indent="0" marL="0">
-              <a:buNone/>
-            </a:pPr>
-            <a:r>
-              <a:rPr lang="en-US" sz="1200" dirty="0">
+            <a:pPr marL="0" indent="0">
+              <a:buNone/>
+            </a:pPr>
+            <a:r>
+              <a:rPr lang="pt-BR" sz="1200">
                 <a:solidFill>
                   <a:srgbClr val="A6ACC0"/>
                 </a:solidFill>
@@ -12788,7 +12973,7 @@
                 <a:ea typeface="Archivo" pitchFamily="34" charset="-122"/>
                 <a:cs typeface="Archivo" pitchFamily="34" charset="-120"/>
               </a:rPr>
-              <a:t>Depende da publicação</a:t>
+              <a:t>Site no ar; falta gerar</a:t>
             </a:r>
             <a:endParaRPr lang="en-US" sz="1200" dirty="0"/>
           </a:p>
@@ -12827,7 +13012,7 @@
           <a:bodyPr wrap="square" lIns="0" tIns="0" rIns="0" bIns="0" rtlCol="0" anchor="ctr"/>
           <a:lstStyle/>
           <a:p>
-            <a:pPr algn="ctr" indent="0" marL="0">
+            <a:pPr marL="0" indent="0" algn="ctr">
               <a:buNone/>
             </a:pPr>
             <a:r>
@@ -12893,7 +13078,7 @@
           <a:bodyPr wrap="square" lIns="0" tIns="0" rIns="0" bIns="0" rtlCol="0" anchor="ctr"/>
           <a:lstStyle/>
           <a:p>
-            <a:pPr indent="0" marL="0">
+            <a:pPr marL="0" indent="0">
               <a:buNone/>
             </a:pPr>
             <a:r>
@@ -12932,7 +13117,7 @@
           <a:bodyPr wrap="square" lIns="0" tIns="0" rIns="0" bIns="0" rtlCol="0" anchor="ctr"/>
           <a:lstStyle/>
           <a:p>
-            <a:pPr indent="0" marL="0">
+            <a:pPr marL="0" indent="0">
               <a:buNone/>
             </a:pPr>
             <a:r>
@@ -12983,7 +13168,7 @@
           <a:bodyPr wrap="square" lIns="0" tIns="0" rIns="0" bIns="0" rtlCol="0" anchor="ctr"/>
           <a:lstStyle/>
           <a:p>
-            <a:pPr algn="ctr" indent="0" marL="0">
+            <a:pPr marL="0" indent="0" algn="ctr">
               <a:buNone/>
             </a:pPr>
             <a:r>
@@ -13049,7 +13234,7 @@
           <a:bodyPr wrap="square" lIns="0" tIns="0" rIns="0" bIns="0" rtlCol="0" anchor="ctr"/>
           <a:lstStyle/>
           <a:p>
-            <a:pPr indent="0" marL="0">
+            <a:pPr marL="0" indent="0">
               <a:buNone/>
             </a:pPr>
             <a:r>
@@ -13088,7 +13273,7 @@
           <a:bodyPr wrap="square" lIns="0" tIns="0" rIns="0" bIns="0" rtlCol="0" anchor="ctr"/>
           <a:lstStyle/>
           <a:p>
-            <a:pPr indent="0" marL="0">
+            <a:pPr marL="0" indent="0">
               <a:buNone/>
             </a:pPr>
             <a:r>
@@ -13139,7 +13324,7 @@
           <a:bodyPr wrap="square" lIns="0" tIns="0" rIns="0" bIns="0" rtlCol="0" anchor="ctr"/>
           <a:lstStyle/>
           <a:p>
-            <a:pPr algn="ctr" indent="0" marL="0">
+            <a:pPr marL="0" indent="0" algn="ctr">
               <a:buNone/>
             </a:pPr>
             <a:r>
@@ -13159,7 +13344,7 @@
       </p:sp>
       <p:sp>
         <p:nvSpPr>
-          <p:cNvPr id="25" name="Slide Number Placeholder 0"/>
+          <p:cNvPr id="44" name="Slide Number Placeholder 0"/>
           <p:cNvSpPr>
             <a:spLocks noGrp="1"/>
           </p:cNvSpPr>
@@ -13177,7 +13362,7 @@
           </a:prstGeom>
           <a:extLst>
             <a:ext uri="{C572A759-6A51-4108-AA02-DFA0A04FC94B}">
-              <ma14:wrappingTextBoxFlag xmlns:ma14="http://schemas.microsoft.com/office/mac/drawingml/2011/main" val="0"/>
+              <ma14:wrappingTextBoxFlag xmlns="" xmlns:ma14="http://schemas.microsoft.com/office/mac/drawingml/2011/main" val="0"/>
             </a:ext>
           </a:extLst>
         </p:spPr>
@@ -13198,7 +13383,7 @@
           <a:p>
             <a:pPr algn="r"/>
             <a:fld id="{F7021451-1387-4CA6-816F-3879F97B5CBC}" type="slidenum">
-              <a:rPr b="0" lang="en-US"/>
+              <a:rPr lang="en-US" b="0"/>
               <a:t>17</a:t>
             </a:fld>
             <a:endParaRPr lang="en-US"/>
@@ -13233,9 +13418,11 @@
       <p:sp>
         <p:nvSpPr>
           <p:cNvPr id="2" name="Text 1"/>
-          <p:cNvSpPr/>
+          <p:cNvSpPr>
+            <a:spLocks noGrp="1"/>
+          </p:cNvSpPr>
           <p:nvPr>
-            <p:ph idx="102" type="title" hasCustomPrompt="1"/>
+            <p:ph type="title" idx="102" hasCustomPrompt="1"/>
           </p:nvPr>
         </p:nvSpPr>
         <p:spPr>
@@ -13253,7 +13440,7 @@
           <a:bodyPr wrap="square" lIns="0" tIns="0" rIns="0" bIns="0" rtlCol="0" anchor="ctr"/>
           <a:lstStyle/>
           <a:p>
-            <a:pPr algn="l" indent="0" marL="0">
+            <a:pPr marL="0" indent="0" algn="l">
               <a:buNone/>
             </a:pPr>
             <a:r>
@@ -13267,9 +13454,6 @@
               </a:rPr>
               <a:t>17  </a:t>
             </a:r>
-            <a:pPr algn="l" indent="0" marL="0">
-              <a:buNone/>
-            </a:pPr>
             <a:r>
               <a:rPr lang="en-US" sz="3200" b="1" dirty="0">
                 <a:solidFill>
@@ -13333,7 +13517,7 @@
           <a:bodyPr wrap="square" lIns="0" tIns="0" rIns="0" bIns="0" rtlCol="0" anchor="t"/>
           <a:lstStyle/>
           <a:p>
-            <a:pPr indent="0" marL="0">
+            <a:pPr marL="0" indent="0">
               <a:buNone/>
             </a:pPr>
             <a:r>
@@ -13401,7 +13585,7 @@
               <a:buChar char="•"/>
             </a:pPr>
             <a:r>
-              <a:rPr lang="en-US" sz="1400" dirty="0">
+              <a:rPr lang="pt-BR" sz="1400">
                 <a:solidFill>
                   <a:srgbClr val="A6ACC0"/>
                 </a:solidFill>
@@ -13409,7 +13593,7 @@
                 <a:ea typeface="Archivo" pitchFamily="34" charset="-122"/>
                 <a:cs typeface="Archivo" pitchFamily="34" charset="-120"/>
               </a:rPr>
-              <a:t>APK: precisa do site publicado com HTTPS</a:t>
+              <a:t>APK: o site já está no ar, falta gerar</a:t>
             </a:r>
             <a:endParaRPr lang="en-US" sz="1400" dirty="0"/>
           </a:p>
@@ -13505,7 +13689,7 @@
           <a:bodyPr wrap="square" lIns="0" tIns="0" rIns="0" bIns="0" rtlCol="0" anchor="t"/>
           <a:lstStyle/>
           <a:p>
-            <a:pPr indent="0" marL="0">
+            <a:pPr marL="0" indent="0">
               <a:buNone/>
             </a:pPr>
             <a:r>
@@ -13629,7 +13813,7 @@
           <a:bodyPr wrap="square" lIns="0" tIns="0" rIns="0" bIns="0" rtlCol="0" anchor="t"/>
           <a:lstStyle/>
           <a:p>
-            <a:pPr indent="0" marL="0">
+            <a:pPr marL="0" indent="0">
               <a:buNone/>
             </a:pPr>
             <a:r>
@@ -13685,7 +13869,7 @@
             <a:avLst/>
           </a:prstGeom>
           <a:solidFill>
-            <a:srgbClr val="FFD23F"/>
+            <a:srgbClr val="22D07B"/>
           </a:solidFill>
           <a:ln/>
         </p:spPr>
@@ -13693,13 +13877,13 @@
           <a:bodyPr wrap="square" lIns="0" tIns="0" rIns="0" bIns="0" rtlCol="0" anchor="ctr"/>
           <a:lstStyle/>
           <a:p>
-            <a:pPr algn="ctr" indent="0" marL="0">
+            <a:pPr marL="0" indent="0" algn="ctr">
               <a:buNone/>
             </a:pPr>
             <a:r>
               <a:rPr lang="en-US" sz="1300" b="1" dirty="0">
                 <a:solidFill>
-                  <a:srgbClr val="1C212D"/>
+                  <a:srgbClr val="000000"/>
                 </a:solidFill>
                 <a:latin typeface="Archivo" pitchFamily="34" charset="0"/>
                 <a:ea typeface="Archivo" pitchFamily="34" charset="-122"/>
@@ -13707,7 +13891,11 @@
               </a:rPr>
               <a:t>1</a:t>
             </a:r>
-            <a:endParaRPr lang="en-US" sz="1300" dirty="0"/>
+            <a:endParaRPr lang="en-US" sz="1300" dirty="0">
+              <a:solidFill>
+                <a:srgbClr val="000000"/>
+              </a:solidFill>
+            </a:endParaRPr>
           </a:p>
         </p:txBody>
       </p:sp>
@@ -13732,7 +13920,7 @@
           <a:bodyPr wrap="square" lIns="0" tIns="0" rIns="0" bIns="0" rtlCol="0" anchor="t"/>
           <a:lstStyle/>
           <a:p>
-            <a:pPr indent="0" marL="0">
+            <a:pPr marL="0" indent="0">
               <a:buNone/>
             </a:pPr>
             <a:r>
@@ -13749,11 +13937,11 @@
             <a:endParaRPr lang="en-US" sz="1400" dirty="0"/>
           </a:p>
           <a:p>
-            <a:pPr indent="0" marL="0">
-              <a:buNone/>
-            </a:pPr>
-            <a:r>
-              <a:rPr lang="en-US" sz="1200" dirty="0">
+            <a:pPr marL="0" indent="0">
+              <a:buNone/>
+            </a:pPr>
+            <a:r>
+              <a:rPr lang="pt-BR" sz="1200">
                 <a:solidFill>
                   <a:srgbClr val="A6ACC0"/>
                 </a:solidFill>
@@ -13761,7 +13949,7 @@
                 <a:ea typeface="Archivo" pitchFamily="34" charset="-122"/>
                 <a:cs typeface="Archivo" pitchFamily="34" charset="-120"/>
               </a:rPr>
-              <a:t>Site, API e banco no cPanel da escola, com HTTPS</a:t>
+              <a:t>No ar em somoslinkwave.com.br, com HTTPS</a:t>
             </a:r>
             <a:endParaRPr lang="en-US" sz="1400" dirty="0"/>
           </a:p>
@@ -13775,7 +13963,7 @@
         </p:nvSpPr>
         <p:spPr>
           <a:xfrm>
-            <a:off x="10862158" y="1847088"/>
+            <a:off x="10862158" y="2532888"/>
             <a:ext cx="778154" cy="292608"/>
           </a:xfrm>
           <a:prstGeom prst="roundRect">
@@ -13800,7 +13988,7 @@
           <a:bodyPr wrap="square" lIns="0" tIns="0" rIns="0" bIns="0" rtlCol="0" anchor="ctr"/>
           <a:lstStyle/>
           <a:p>
-            <a:pPr algn="ctr" indent="0" marL="0">
+            <a:pPr marL="0" indent="0" algn="ctr">
               <a:buNone/>
             </a:pPr>
             <a:r>
@@ -13827,6 +14015,107 @@
         <p:spPr>
           <a:xfrm>
             <a:off x="6035040" y="2496312"/>
+            <a:ext cx="384048" cy="384048"/>
+          </a:xfrm>
+          <a:prstGeom prst="ellipse">
+            <a:avLst/>
+          </a:prstGeom>
+          <a:solidFill>
+            <a:srgbClr val="FFD23F"/>
+          </a:solidFill>
+          <a:ln/>
+        </p:spPr>
+        <p:txBody>
+          <a:bodyPr wrap="square" lIns="0" tIns="0" rIns="0" bIns="0" rtlCol="0" anchor="ctr"/>
+          <a:lstStyle/>
+          <a:p>
+            <a:pPr marL="0" indent="0" algn="ctr">
+              <a:buNone/>
+            </a:pPr>
+            <a:r>
+              <a:rPr lang="en-US" sz="1300" b="1" dirty="0">
+                <a:solidFill>
+                  <a:srgbClr val="000000"/>
+                </a:solidFill>
+                <a:latin typeface="Archivo" pitchFamily="34" charset="0"/>
+                <a:ea typeface="Archivo" pitchFamily="34" charset="-122"/>
+                <a:cs typeface="Archivo" pitchFamily="34" charset="-120"/>
+              </a:rPr>
+              <a:t>2</a:t>
+            </a:r>
+            <a:endParaRPr lang="en-US" sz="1300" dirty="0">
+              <a:solidFill>
+                <a:srgbClr val="000000"/>
+              </a:solidFill>
+            </a:endParaRPr>
+          </a:p>
+        </p:txBody>
+      </p:sp>
+      <p:sp>
+        <p:nvSpPr>
+          <p:cNvPr id="15" name="Text 13"/>
+          <p:cNvSpPr txBox="1"/>
+          <p:nvPr/>
+        </p:nvSpPr>
+        <p:spPr>
+          <a:xfrm>
+            <a:off x="6583680" y="2450592"/>
+            <a:ext cx="4206240" cy="594360"/>
+          </a:xfrm>
+          <a:prstGeom prst="rect">
+            <a:avLst/>
+          </a:prstGeom>
+          <a:noFill/>
+          <a:ln/>
+        </p:spPr>
+        <p:txBody>
+          <a:bodyPr wrap="square" lIns="0" tIns="0" rIns="0" bIns="0" rtlCol="0" anchor="t"/>
+          <a:lstStyle/>
+          <a:p>
+            <a:pPr marL="0" indent="0">
+              <a:buNone/>
+            </a:pPr>
+            <a:r>
+              <a:rPr lang="en-US" sz="1500" b="1" dirty="0">
+                <a:solidFill>
+                  <a:srgbClr val="ECEEF4"/>
+                </a:solidFill>
+                <a:latin typeface="Archivo" pitchFamily="34" charset="0"/>
+                <a:ea typeface="Archivo" pitchFamily="34" charset="-122"/>
+                <a:cs typeface="Archivo" pitchFamily="34" charset="-120"/>
+              </a:rPr>
+              <a:t>Gerar o APK</a:t>
+            </a:r>
+            <a:endParaRPr lang="en-US" sz="1400" dirty="0"/>
+          </a:p>
+          <a:p>
+            <a:pPr marL="0" indent="0">
+              <a:buNone/>
+            </a:pPr>
+            <a:r>
+              <a:rPr lang="en-US" sz="1200" dirty="0">
+                <a:solidFill>
+                  <a:srgbClr val="A6ACC0"/>
+                </a:solidFill>
+                <a:latin typeface="Archivo" pitchFamily="34" charset="0"/>
+                <a:ea typeface="Archivo" pitchFamily="34" charset="-122"/>
+                <a:cs typeface="Archivo" pitchFamily="34" charset="-120"/>
+              </a:rPr>
+              <a:t>Empacotar o app publicado pelo PWABuilder</a:t>
+            </a:r>
+            <a:endParaRPr lang="en-US" sz="1400" dirty="0"/>
+          </a:p>
+        </p:txBody>
+      </p:sp>
+      <p:sp>
+        <p:nvSpPr>
+          <p:cNvPr id="16" name="Text 14"/>
+          <p:cNvSpPr/>
+          <p:nvPr/>
+        </p:nvSpPr>
+        <p:spPr>
+          <a:xfrm>
+            <a:off x="6035040" y="3182112"/>
             <a:ext cx="384048" cy="384048"/>
           </a:xfrm>
           <a:prstGeom prst="ellipse">
@@ -13841,7 +14130,7 @@
           <a:bodyPr wrap="square" lIns="0" tIns="0" rIns="0" bIns="0" rtlCol="0" anchor="ctr"/>
           <a:lstStyle/>
           <a:p>
-            <a:pPr algn="ctr" indent="0" marL="0">
+            <a:pPr marL="0" indent="0" algn="ctr">
               <a:buNone/>
             </a:pPr>
             <a:r>
@@ -13853,7 +14142,7 @@
                 <a:ea typeface="Archivo" pitchFamily="34" charset="-122"/>
                 <a:cs typeface="Archivo" pitchFamily="34" charset="-120"/>
               </a:rPr>
-              <a:t>2</a:t>
+              <a:t>3</a:t>
             </a:r>
             <a:endParaRPr lang="en-US" sz="1300" dirty="0"/>
           </a:p>
@@ -13861,13 +14150,13 @@
       </p:sp>
       <p:sp>
         <p:nvSpPr>
-          <p:cNvPr id="15" name="Text 13"/>
+          <p:cNvPr id="17" name="Text 15"/>
           <p:cNvSpPr txBox="1"/>
           <p:nvPr/>
         </p:nvSpPr>
         <p:spPr>
           <a:xfrm>
-            <a:off x="6583680" y="2450592"/>
+            <a:off x="6583680" y="3136392"/>
             <a:ext cx="4206240" cy="594360"/>
           </a:xfrm>
           <a:prstGeom prst="rect">
@@ -13880,7 +14169,7 @@
           <a:bodyPr wrap="square" lIns="0" tIns="0" rIns="0" bIns="0" rtlCol="0" anchor="t"/>
           <a:lstStyle/>
           <a:p>
-            <a:pPr indent="0" marL="0">
+            <a:pPr marL="0" indent="0">
               <a:buNone/>
             </a:pPr>
             <a:r>
@@ -13892,12 +14181,12 @@
                 <a:ea typeface="Archivo" pitchFamily="34" charset="-122"/>
                 <a:cs typeface="Archivo" pitchFamily="34" charset="-120"/>
               </a:rPr>
-              <a:t>Gerar o APK</a:t>
+              <a:t>Montar a bancada</a:t>
             </a:r>
             <a:endParaRPr lang="en-US" sz="1400" dirty="0"/>
           </a:p>
           <a:p>
-            <a:pPr indent="0" marL="0">
+            <a:pPr marL="0" indent="0">
               <a:buNone/>
             </a:pPr>
             <a:r>
@@ -13909,7 +14198,7 @@
                 <a:ea typeface="Archivo" pitchFamily="34" charset="-122"/>
                 <a:cs typeface="Archivo" pitchFamily="34" charset="-120"/>
               </a:rPr>
-              <a:t>Empacotar o app publicado pelo PWABuilder</a:t>
+              <a:t>ESP32, MFRC522, relé e LEDs com o firmware</a:t>
             </a:r>
             <a:endParaRPr lang="en-US" sz="1400" dirty="0"/>
           </a:p>
@@ -13917,13 +14206,13 @@
       </p:sp>
       <p:sp>
         <p:nvSpPr>
-          <p:cNvPr id="16" name="Text 14"/>
+          <p:cNvPr id="18" name="Text 16"/>
           <p:cNvSpPr/>
           <p:nvPr/>
         </p:nvSpPr>
         <p:spPr>
           <a:xfrm>
-            <a:off x="6035040" y="3182112"/>
+            <a:off x="6035040" y="3867912"/>
             <a:ext cx="384048" cy="384048"/>
           </a:xfrm>
           <a:prstGeom prst="ellipse">
@@ -13938,7 +14227,7 @@
           <a:bodyPr wrap="square" lIns="0" tIns="0" rIns="0" bIns="0" rtlCol="0" anchor="ctr"/>
           <a:lstStyle/>
           <a:p>
-            <a:pPr algn="ctr" indent="0" marL="0">
+            <a:pPr marL="0" indent="0" algn="ctr">
               <a:buNone/>
             </a:pPr>
             <a:r>
@@ -13950,7 +14239,7 @@
                 <a:ea typeface="Archivo" pitchFamily="34" charset="-122"/>
                 <a:cs typeface="Archivo" pitchFamily="34" charset="-120"/>
               </a:rPr>
-              <a:t>3</a:t>
+              <a:t>4</a:t>
             </a:r>
             <a:endParaRPr lang="en-US" sz="1300" dirty="0"/>
           </a:p>
@@ -13958,13 +14247,13 @@
       </p:sp>
       <p:sp>
         <p:nvSpPr>
-          <p:cNvPr id="17" name="Text 15"/>
+          <p:cNvPr id="19" name="Text 17"/>
           <p:cNvSpPr txBox="1"/>
           <p:nvPr/>
         </p:nvSpPr>
         <p:spPr>
           <a:xfrm>
-            <a:off x="6583680" y="3136392"/>
+            <a:off x="6583680" y="3822192"/>
             <a:ext cx="4206240" cy="594360"/>
           </a:xfrm>
           <a:prstGeom prst="rect">
@@ -13977,7 +14266,7 @@
           <a:bodyPr wrap="square" lIns="0" tIns="0" rIns="0" bIns="0" rtlCol="0" anchor="t"/>
           <a:lstStyle/>
           <a:p>
-            <a:pPr indent="0" marL="0">
+            <a:pPr marL="0" indent="0">
               <a:buNone/>
             </a:pPr>
             <a:r>
@@ -13989,12 +14278,12 @@
                 <a:ea typeface="Archivo" pitchFamily="34" charset="-122"/>
                 <a:cs typeface="Archivo" pitchFamily="34" charset="-120"/>
               </a:rPr>
-              <a:t>Montar a bancada</a:t>
+              <a:t>Executar os testes</a:t>
             </a:r>
             <a:endParaRPr lang="en-US" sz="1400" dirty="0"/>
           </a:p>
           <a:p>
-            <a:pPr indent="0" marL="0">
+            <a:pPr marL="0" indent="0">
               <a:buNone/>
             </a:pPr>
             <a:r>
@@ -14006,7 +14295,7 @@
                 <a:ea typeface="Archivo" pitchFamily="34" charset="-122"/>
                 <a:cs typeface="Archivo" pitchFamily="34" charset="-120"/>
               </a:rPr>
-              <a:t>ESP32, MFRC522, relé e LEDs com o firmware</a:t>
+              <a:t>Casos funcionais e de falha</a:t>
             </a:r>
             <a:endParaRPr lang="en-US" sz="1400" dirty="0"/>
           </a:p>
@@ -14014,13 +14303,13 @@
       </p:sp>
       <p:sp>
         <p:nvSpPr>
-          <p:cNvPr id="18" name="Text 16"/>
+          <p:cNvPr id="20" name="Text 18"/>
           <p:cNvSpPr/>
           <p:nvPr/>
         </p:nvSpPr>
         <p:spPr>
           <a:xfrm>
-            <a:off x="6035040" y="3867912"/>
+            <a:off x="6035040" y="4553712"/>
             <a:ext cx="384048" cy="384048"/>
           </a:xfrm>
           <a:prstGeom prst="ellipse">
@@ -14035,7 +14324,7 @@
           <a:bodyPr wrap="square" lIns="0" tIns="0" rIns="0" bIns="0" rtlCol="0" anchor="ctr"/>
           <a:lstStyle/>
           <a:p>
-            <a:pPr algn="ctr" indent="0" marL="0">
+            <a:pPr marL="0" indent="0" algn="ctr">
               <a:buNone/>
             </a:pPr>
             <a:r>
@@ -14047,7 +14336,7 @@
                 <a:ea typeface="Archivo" pitchFamily="34" charset="-122"/>
                 <a:cs typeface="Archivo" pitchFamily="34" charset="-120"/>
               </a:rPr>
-              <a:t>4</a:t>
+              <a:t>5</a:t>
             </a:r>
             <a:endParaRPr lang="en-US" sz="1300" dirty="0"/>
           </a:p>
@@ -14055,13 +14344,13 @@
       </p:sp>
       <p:sp>
         <p:nvSpPr>
-          <p:cNvPr id="19" name="Text 17"/>
+          <p:cNvPr id="21" name="Text 19"/>
           <p:cNvSpPr txBox="1"/>
           <p:nvPr/>
         </p:nvSpPr>
         <p:spPr>
           <a:xfrm>
-            <a:off x="6583680" y="3822192"/>
+            <a:off x="6583680" y="4507992"/>
             <a:ext cx="4206240" cy="594360"/>
           </a:xfrm>
           <a:prstGeom prst="rect">
@@ -14074,7 +14363,7 @@
           <a:bodyPr wrap="square" lIns="0" tIns="0" rIns="0" bIns="0" rtlCol="0" anchor="t"/>
           <a:lstStyle/>
           <a:p>
-            <a:pPr indent="0" marL="0">
+            <a:pPr marL="0" indent="0">
               <a:buNone/>
             </a:pPr>
             <a:r>
@@ -14086,12 +14375,12 @@
                 <a:ea typeface="Archivo" pitchFamily="34" charset="-122"/>
                 <a:cs typeface="Archivo" pitchFamily="34" charset="-120"/>
               </a:rPr>
-              <a:t>Executar os testes</a:t>
+              <a:t>Registrar evidências</a:t>
             </a:r>
             <a:endParaRPr lang="en-US" sz="1400" dirty="0"/>
           </a:p>
           <a:p>
-            <a:pPr indent="0" marL="0">
+            <a:pPr marL="0" indent="0">
               <a:buNone/>
             </a:pPr>
             <a:r>
@@ -14103,7 +14392,7 @@
                 <a:ea typeface="Archivo" pitchFamily="34" charset="-122"/>
                 <a:cs typeface="Archivo" pitchFamily="34" charset="-120"/>
               </a:rPr>
-              <a:t>Casos funcionais e de falha</a:t>
+              <a:t>Capturas, consultas e fotos (EV-XX)</a:t>
             </a:r>
             <a:endParaRPr lang="en-US" sz="1400" dirty="0"/>
           </a:p>
@@ -14111,13 +14400,13 @@
       </p:sp>
       <p:sp>
         <p:nvSpPr>
-          <p:cNvPr id="20" name="Text 18"/>
+          <p:cNvPr id="22" name="Text 20"/>
           <p:cNvSpPr/>
           <p:nvPr/>
         </p:nvSpPr>
         <p:spPr>
           <a:xfrm>
-            <a:off x="6035040" y="4553712"/>
+            <a:off x="6035040" y="5239512"/>
             <a:ext cx="384048" cy="384048"/>
           </a:xfrm>
           <a:prstGeom prst="ellipse">
@@ -14132,104 +14421,7 @@
           <a:bodyPr wrap="square" lIns="0" tIns="0" rIns="0" bIns="0" rtlCol="0" anchor="ctr"/>
           <a:lstStyle/>
           <a:p>
-            <a:pPr algn="ctr" indent="0" marL="0">
-              <a:buNone/>
-            </a:pPr>
-            <a:r>
-              <a:rPr lang="en-US" sz="1300" b="1" dirty="0">
-                <a:solidFill>
-                  <a:srgbClr val="ECEEF4"/>
-                </a:solidFill>
-                <a:latin typeface="Archivo" pitchFamily="34" charset="0"/>
-                <a:ea typeface="Archivo" pitchFamily="34" charset="-122"/>
-                <a:cs typeface="Archivo" pitchFamily="34" charset="-120"/>
-              </a:rPr>
-              <a:t>5</a:t>
-            </a:r>
-            <a:endParaRPr lang="en-US" sz="1300" dirty="0"/>
-          </a:p>
-        </p:txBody>
-      </p:sp>
-      <p:sp>
-        <p:nvSpPr>
-          <p:cNvPr id="21" name="Text 19"/>
-          <p:cNvSpPr txBox="1"/>
-          <p:nvPr/>
-        </p:nvSpPr>
-        <p:spPr>
-          <a:xfrm>
-            <a:off x="6583680" y="4507992"/>
-            <a:ext cx="4206240" cy="594360"/>
-          </a:xfrm>
-          <a:prstGeom prst="rect">
-            <a:avLst/>
-          </a:prstGeom>
-          <a:noFill/>
-          <a:ln/>
-        </p:spPr>
-        <p:txBody>
-          <a:bodyPr wrap="square" lIns="0" tIns="0" rIns="0" bIns="0" rtlCol="0" anchor="t"/>
-          <a:lstStyle/>
-          <a:p>
-            <a:pPr indent="0" marL="0">
-              <a:buNone/>
-            </a:pPr>
-            <a:r>
-              <a:rPr lang="en-US" sz="1500" b="1" dirty="0">
-                <a:solidFill>
-                  <a:srgbClr val="ECEEF4"/>
-                </a:solidFill>
-                <a:latin typeface="Archivo" pitchFamily="34" charset="0"/>
-                <a:ea typeface="Archivo" pitchFamily="34" charset="-122"/>
-                <a:cs typeface="Archivo" pitchFamily="34" charset="-120"/>
-              </a:rPr>
-              <a:t>Registrar evidências</a:t>
-            </a:r>
-            <a:endParaRPr lang="en-US" sz="1400" dirty="0"/>
-          </a:p>
-          <a:p>
-            <a:pPr indent="0" marL="0">
-              <a:buNone/>
-            </a:pPr>
-            <a:r>
-              <a:rPr lang="en-US" sz="1200" dirty="0">
-                <a:solidFill>
-                  <a:srgbClr val="A6ACC0"/>
-                </a:solidFill>
-                <a:latin typeface="Archivo" pitchFamily="34" charset="0"/>
-                <a:ea typeface="Archivo" pitchFamily="34" charset="-122"/>
-                <a:cs typeface="Archivo" pitchFamily="34" charset="-120"/>
-              </a:rPr>
-              <a:t>Capturas, consultas e fotos (EV-XX)</a:t>
-            </a:r>
-            <a:endParaRPr lang="en-US" sz="1400" dirty="0"/>
-          </a:p>
-        </p:txBody>
-      </p:sp>
-      <p:sp>
-        <p:nvSpPr>
-          <p:cNvPr id="22" name="Text 20"/>
-          <p:cNvSpPr/>
-          <p:nvPr/>
-        </p:nvSpPr>
-        <p:spPr>
-          <a:xfrm>
-            <a:off x="6035040" y="5239512"/>
-            <a:ext cx="384048" cy="384048"/>
-          </a:xfrm>
-          <a:prstGeom prst="ellipse">
-            <a:avLst/>
-          </a:prstGeom>
-          <a:solidFill>
-            <a:srgbClr val="1C212D"/>
-          </a:solidFill>
-          <a:ln/>
-        </p:spPr>
-        <p:txBody>
-          <a:bodyPr wrap="square" lIns="0" tIns="0" rIns="0" bIns="0" rtlCol="0" anchor="ctr"/>
-          <a:lstStyle/>
-          <a:p>
-            <a:pPr algn="ctr" indent="0" marL="0">
+            <a:pPr marL="0" indent="0" algn="ctr">
               <a:buNone/>
             </a:pPr>
             <a:r>
@@ -14268,7 +14460,7 @@
           <a:bodyPr wrap="square" lIns="0" tIns="0" rIns="0" bIns="0" rtlCol="0" anchor="t"/>
           <a:lstStyle/>
           <a:p>
-            <a:pPr indent="0" marL="0">
+            <a:pPr marL="0" indent="0">
               <a:buNone/>
             </a:pPr>
             <a:r>
@@ -14285,7 +14477,7 @@
             <a:endParaRPr lang="en-US" sz="1400" dirty="0"/>
           </a:p>
           <a:p>
-            <a:pPr indent="0" marL="0">
+            <a:pPr marL="0" indent="0">
               <a:buNone/>
             </a:pPr>
             <a:r>
@@ -14323,7 +14515,7 @@
           </a:prstGeom>
           <a:extLst>
             <a:ext uri="{C572A759-6A51-4108-AA02-DFA0A04FC94B}">
-              <ma14:wrappingTextBoxFlag xmlns:ma14="http://schemas.microsoft.com/office/mac/drawingml/2011/main" val="0"/>
+              <ma14:wrappingTextBoxFlag xmlns="" xmlns:ma14="http://schemas.microsoft.com/office/mac/drawingml/2011/main" val="0"/>
             </a:ext>
           </a:extLst>
         </p:spPr>
@@ -14344,10 +14536,71 @@
           <a:p>
             <a:pPr algn="r"/>
             <a:fld id="{F7021451-1387-4CA6-816F-3879F97B5CBC}" type="slidenum">
-              <a:rPr b="0" lang="en-US"/>
+              <a:rPr lang="en-US" b="0"/>
               <a:t>18</a:t>
             </a:fld>
             <a:endParaRPr lang="en-US"/>
+          </a:p>
+        </p:txBody>
+      </p:sp>
+      <p:sp>
+        <p:nvSpPr>
+          <p:cNvPr id="24" name="Selo Feito">
+            <a:extLst>
+              <a:ext uri="{FF2B5EF4-FFF2-40B4-BE49-F238E27FC236}">
+                <a16:creationId xmlns:a16="http://schemas.microsoft.com/office/drawing/2014/main" id="{C908757F-D952-549B-D698-A008731CDD19}"/>
+              </a:ext>
+            </a:extLst>
+          </p:cNvPr>
+          <p:cNvSpPr/>
+          <p:nvPr/>
+        </p:nvSpPr>
+        <p:spPr>
+          <a:xfrm>
+            <a:off x="10862158" y="1847088"/>
+            <a:ext cx="778154" cy="292608"/>
+          </a:xfrm>
+          <a:prstGeom prst="roundRect">
+            <a:avLst>
+              <a:gd name="adj" fmla="val 50000"/>
+            </a:avLst>
+          </a:prstGeom>
+          <a:solidFill>
+            <a:srgbClr val="22D07B">
+              <a:alpha val="18000"/>
+            </a:srgbClr>
+          </a:solidFill>
+          <a:ln w="9525">
+            <a:solidFill>
+              <a:srgbClr val="22D07B">
+                <a:alpha val="45000"/>
+              </a:srgbClr>
+            </a:solidFill>
+          </a:ln>
+        </p:spPr>
+        <p:txBody>
+          <a:bodyPr wrap="square" lIns="0" tIns="0" rIns="0" bIns="0" rtlCol="0" anchor="ctr"/>
+          <a:lstStyle/>
+          <a:p>
+            <a:pPr marL="0" indent="0" algn="ctr">
+              <a:buNone/>
+            </a:pPr>
+            <a:r>
+              <a:rPr lang="en-US" sz="1100" b="1">
+                <a:solidFill>
+                  <a:srgbClr val="63E6A6"/>
+                </a:solidFill>
+                <a:latin typeface="Archivo" pitchFamily="34" charset="0"/>
+                <a:ea typeface="Archivo" pitchFamily="34" charset="-122"/>
+                <a:cs typeface="Archivo" pitchFamily="34" charset="-120"/>
+              </a:rPr>
+              <a:t>Feito</a:t>
+            </a:r>
+            <a:endParaRPr lang="en-US" sz="1100" dirty="0">
+              <a:solidFill>
+                <a:srgbClr val="63E6A6"/>
+              </a:solidFill>
+            </a:endParaRPr>
           </a:p>
         </p:txBody>
       </p:sp>
@@ -14379,9 +14632,11 @@
       <p:sp>
         <p:nvSpPr>
           <p:cNvPr id="2" name="Text 1"/>
-          <p:cNvSpPr/>
+          <p:cNvSpPr>
+            <a:spLocks noGrp="1"/>
+          </p:cNvSpPr>
           <p:nvPr>
-            <p:ph idx="102" type="title" hasCustomPrompt="1"/>
+            <p:ph type="title" idx="102" hasCustomPrompt="1"/>
           </p:nvPr>
         </p:nvSpPr>
         <p:spPr>
@@ -14399,7 +14654,7 @@
           <a:bodyPr wrap="square" lIns="0" tIns="0" rIns="0" bIns="0" rtlCol="0" anchor="ctr"/>
           <a:lstStyle/>
           <a:p>
-            <a:pPr algn="l" indent="0" marL="0">
+            <a:pPr marL="0" indent="0" algn="l">
               <a:buNone/>
             </a:pPr>
             <a:r>
@@ -14413,9 +14668,6 @@
               </a:rPr>
               <a:t>18  </a:t>
             </a:r>
-            <a:pPr algn="l" indent="0" marL="0">
-              <a:buNone/>
-            </a:pPr>
             <a:r>
               <a:rPr lang="en-US" sz="3200" b="1" dirty="0">
                 <a:solidFill>
@@ -14489,14 +14741,14 @@
       </p:sp>
       <p:pic>
         <p:nvPicPr>
-          <p:cNvPr id="5" name="Image 0" descr="C:/Users/49816471825/AppData/Local/Temp/lockmachine/deck/icones/x-FF7A6F.png">    </p:cNvPr>
+          <p:cNvPr id="5" name="Image 0" descr="C:/Users/49816471825/AppData/Local/Temp/lockmachine/deck/icones/x-FF7A6F.png"/>
           <p:cNvPicPr>
             <a:picLocks noChangeAspect="1"/>
           </p:cNvPicPr>
           <p:nvPr/>
         </p:nvPicPr>
         <p:blipFill>
-          <a:blip r:embed="rId1"/>
+          <a:blip r:embed="rId3"/>
           <a:stretch>
             <a:fillRect/>
           </a:stretch>
@@ -14532,11 +14784,11 @@
           <a:bodyPr wrap="square" lIns="0" tIns="0" rIns="0" bIns="0" rtlCol="0" anchor="t"/>
           <a:lstStyle/>
           <a:p>
-            <a:pPr indent="0" marL="0">
-              <a:buNone/>
-            </a:pPr>
-            <a:r>
-              <a:rPr lang="en-US" sz="1000" b="1" spc="120" kern="0" dirty="0">
+            <a:pPr marL="0" indent="0">
+              <a:buNone/>
+            </a:pPr>
+            <a:r>
+              <a:rPr lang="en-US" sz="1000" b="1" kern="0" spc="120" dirty="0">
                 <a:solidFill>
                   <a:srgbClr val="FF7A6F"/>
                 </a:solidFill>
@@ -14571,7 +14823,7 @@
           <a:bodyPr wrap="square" lIns="0" tIns="0" rIns="0" bIns="0" rtlCol="0" anchor="t"/>
           <a:lstStyle/>
           <a:p>
-            <a:pPr indent="0" marL="0">
+            <a:pPr marL="0" indent="0">
               <a:lnSpc>
                 <a:spcPct val="110000"/>
               </a:lnSpc>
@@ -14674,14 +14926,14 @@
       </p:sp>
       <p:pic>
         <p:nvPicPr>
-          <p:cNvPr id="11" name="Image 1" descr="C:/Users/49816471825/AppData/Local/Temp/lockmachine/deck/icones/server-8C9BFF.png">    </p:cNvPr>
+          <p:cNvPr id="11" name="Image 1" descr="C:/Users/49816471825/AppData/Local/Temp/lockmachine/deck/icones/server-8C9BFF.png"/>
           <p:cNvPicPr>
             <a:picLocks noChangeAspect="1"/>
           </p:cNvPicPr>
           <p:nvPr/>
         </p:nvPicPr>
         <p:blipFill>
-          <a:blip r:embed="rId2"/>
+          <a:blip r:embed="rId4"/>
           <a:stretch>
             <a:fillRect/>
           </a:stretch>
@@ -14717,11 +14969,11 @@
           <a:bodyPr wrap="square" lIns="0" tIns="0" rIns="0" bIns="0" rtlCol="0" anchor="t"/>
           <a:lstStyle/>
           <a:p>
-            <a:pPr indent="0" marL="0">
-              <a:buNone/>
-            </a:pPr>
-            <a:r>
-              <a:rPr lang="en-US" sz="1000" b="1" spc="120" kern="0" dirty="0">
+            <a:pPr marL="0" indent="0">
+              <a:buNone/>
+            </a:pPr>
+            <a:r>
+              <a:rPr lang="en-US" sz="1000" b="1" kern="0" spc="120" dirty="0">
                 <a:solidFill>
                   <a:srgbClr val="8C9BFF"/>
                 </a:solidFill>
@@ -14756,7 +15008,7 @@
           <a:bodyPr wrap="square" lIns="0" tIns="0" rIns="0" bIns="0" rtlCol="0" anchor="t"/>
           <a:lstStyle/>
           <a:p>
-            <a:pPr indent="0" marL="0">
+            <a:pPr marL="0" indent="0">
               <a:lnSpc>
                 <a:spcPct val="110000"/>
               </a:lnSpc>
@@ -14859,14 +15111,14 @@
       </p:sp>
       <p:pic>
         <p:nvPicPr>
-          <p:cNvPr id="17" name="Image 2" descr="C:/Users/49816471825/AppData/Local/Temp/lockmachine/deck/icones/users-FFD23F.png">    </p:cNvPr>
+          <p:cNvPr id="17" name="Image 2" descr="C:/Users/49816471825/AppData/Local/Temp/lockmachine/deck/icones/users-FFD23F.png"/>
           <p:cNvPicPr>
             <a:picLocks noChangeAspect="1"/>
           </p:cNvPicPr>
           <p:nvPr/>
         </p:nvPicPr>
         <p:blipFill>
-          <a:blip r:embed="rId3"/>
+          <a:blip r:embed="rId5"/>
           <a:stretch>
             <a:fillRect/>
           </a:stretch>
@@ -14902,11 +15154,11 @@
           <a:bodyPr wrap="square" lIns="0" tIns="0" rIns="0" bIns="0" rtlCol="0" anchor="t"/>
           <a:lstStyle/>
           <a:p>
-            <a:pPr indent="0" marL="0">
-              <a:buNone/>
-            </a:pPr>
-            <a:r>
-              <a:rPr lang="en-US" sz="1000" b="1" spc="120" kern="0" dirty="0">
+            <a:pPr marL="0" indent="0">
+              <a:buNone/>
+            </a:pPr>
+            <a:r>
+              <a:rPr lang="en-US" sz="1000" b="1" kern="0" spc="120" dirty="0">
                 <a:solidFill>
                   <a:srgbClr val="FFD23F"/>
                 </a:solidFill>
@@ -14941,7 +15193,7 @@
           <a:bodyPr wrap="square" lIns="0" tIns="0" rIns="0" bIns="0" rtlCol="0" anchor="t"/>
           <a:lstStyle/>
           <a:p>
-            <a:pPr indent="0" marL="0">
+            <a:pPr marL="0" indent="0">
               <a:lnSpc>
                 <a:spcPct val="110000"/>
               </a:lnSpc>
@@ -15044,14 +15296,14 @@
       </p:sp>
       <p:pic>
         <p:nvPicPr>
-          <p:cNvPr id="23" name="Image 3" descr="C:/Users/49816471825/AppData/Local/Temp/lockmachine/deck/icones/globe-22D07B.png">    </p:cNvPr>
+          <p:cNvPr id="23" name="Image 3" descr="C:/Users/49816471825/AppData/Local/Temp/lockmachine/deck/icones/globe-22D07B.png"/>
           <p:cNvPicPr>
             <a:picLocks noChangeAspect="1"/>
           </p:cNvPicPr>
           <p:nvPr/>
         </p:nvPicPr>
         <p:blipFill>
-          <a:blip r:embed="rId4"/>
+          <a:blip r:embed="rId6"/>
           <a:stretch>
             <a:fillRect/>
           </a:stretch>
@@ -15087,11 +15339,11 @@
           <a:bodyPr wrap="square" lIns="0" tIns="0" rIns="0" bIns="0" rtlCol="0" anchor="t"/>
           <a:lstStyle/>
           <a:p>
-            <a:pPr indent="0" marL="0">
-              <a:buNone/>
-            </a:pPr>
-            <a:r>
-              <a:rPr lang="en-US" sz="1000" b="1" spc="120" kern="0" dirty="0">
+            <a:pPr marL="0" indent="0">
+              <a:buNone/>
+            </a:pPr>
+            <a:r>
+              <a:rPr lang="en-US" sz="1000" b="1" kern="0" spc="120" dirty="0">
                 <a:solidFill>
                   <a:srgbClr val="22D07B"/>
                 </a:solidFill>
@@ -15126,7 +15378,7 @@
           <a:bodyPr wrap="square" lIns="0" tIns="0" rIns="0" bIns="0" rtlCol="0" anchor="t"/>
           <a:lstStyle/>
           <a:p>
-            <a:pPr indent="0" marL="0">
+            <a:pPr marL="0" indent="0">
               <a:lnSpc>
                 <a:spcPct val="110000"/>
               </a:lnSpc>
@@ -15168,7 +15420,7 @@
           <a:bodyPr wrap="square" lIns="0" tIns="0" rIns="0" bIns="0" rtlCol="0" anchor="ctr"/>
           <a:lstStyle/>
           <a:p>
-            <a:pPr indent="0" marL="0">
+            <a:pPr marL="0" indent="0">
               <a:buNone/>
             </a:pPr>
             <a:r>
@@ -15182,9 +15434,6 @@
               </a:rPr>
               <a:t>Sem capacitação </a:t>
             </a:r>
-            <a:pPr indent="0" marL="0">
-              <a:buNone/>
-            </a:pPr>
             <a:r>
               <a:rPr lang="en-US" sz="3800" b="1" dirty="0">
                 <a:solidFill>
@@ -15196,9 +15445,6 @@
               </a:rPr>
               <a:t>válida</a:t>
             </a:r>
-            <a:pPr indent="0" marL="0">
-              <a:buNone/>
-            </a:pPr>
             <a:r>
               <a:rPr lang="en-US" sz="3800" b="1" dirty="0">
                 <a:solidFill>
@@ -15216,7 +15462,7 @@
       </p:sp>
       <p:sp>
         <p:nvSpPr>
-          <p:cNvPr id="25" name="Slide Number Placeholder 0"/>
+          <p:cNvPr id="27" name="Slide Number Placeholder 0"/>
           <p:cNvSpPr>
             <a:spLocks noGrp="1"/>
           </p:cNvSpPr>
@@ -15234,7 +15480,7 @@
           </a:prstGeom>
           <a:extLst>
             <a:ext uri="{C572A759-6A51-4108-AA02-DFA0A04FC94B}">
-              <ma14:wrappingTextBoxFlag xmlns:ma14="http://schemas.microsoft.com/office/mac/drawingml/2011/main" val="0"/>
+              <ma14:wrappingTextBoxFlag xmlns="" xmlns:ma14="http://schemas.microsoft.com/office/mac/drawingml/2011/main" val="0"/>
             </a:ext>
           </a:extLst>
         </p:spPr>
@@ -15255,7 +15501,7 @@
           <a:p>
             <a:pPr algn="r"/>
             <a:fld id="{F7021451-1387-4CA6-816F-3879F97B5CBC}" type="slidenum">
-              <a:rPr b="0" lang="en-US"/>
+              <a:rPr lang="en-US" b="0"/>
               <a:t>19</a:t>
             </a:fld>
             <a:endParaRPr lang="en-US"/>
@@ -15290,9 +15536,11 @@
       <p:sp>
         <p:nvSpPr>
           <p:cNvPr id="2" name="Text 1"/>
-          <p:cNvSpPr/>
+          <p:cNvSpPr>
+            <a:spLocks noGrp="1"/>
+          </p:cNvSpPr>
           <p:nvPr>
-            <p:ph idx="102" type="title" hasCustomPrompt="1"/>
+            <p:ph type="title" idx="102" hasCustomPrompt="1"/>
           </p:nvPr>
         </p:nvSpPr>
         <p:spPr>
@@ -15310,7 +15558,7 @@
           <a:bodyPr wrap="square" lIns="0" tIns="0" rIns="0" bIns="0" rtlCol="0" anchor="ctr"/>
           <a:lstStyle/>
           <a:p>
-            <a:pPr algn="l" indent="0" marL="0">
+            <a:pPr marL="0" indent="0" algn="l">
               <a:buNone/>
             </a:pPr>
             <a:r>
@@ -15324,9 +15572,6 @@
               </a:rPr>
               <a:t>01  </a:t>
             </a:r>
-            <a:pPr algn="l" indent="0" marL="0">
-              <a:buNone/>
-            </a:pPr>
             <a:r>
               <a:rPr lang="en-US" sz="3200" b="1" dirty="0">
                 <a:solidFill>
@@ -15363,7 +15608,7 @@
           <a:bodyPr wrap="square" lIns="0" tIns="0" rIns="0" bIns="0" rtlCol="0" anchor="t"/>
           <a:lstStyle/>
           <a:p>
-            <a:pPr indent="0" marL="0">
+            <a:pPr marL="0" indent="0">
               <a:buNone/>
             </a:pPr>
             <a:r>
@@ -15377,9 +15622,6 @@
               </a:rPr>
               <a:t>O cartão identifica. </a:t>
             </a:r>
-            <a:pPr indent="0" marL="0">
-              <a:buNone/>
-            </a:pPr>
             <a:r>
               <a:rPr lang="en-US" sz="3000" b="1" dirty="0">
                 <a:solidFill>
@@ -15416,7 +15658,7 @@
           <a:bodyPr wrap="square" lIns="0" tIns="0" rIns="0" bIns="0" rtlCol="0" anchor="t"/>
           <a:lstStyle/>
           <a:p>
-            <a:pPr indent="0" marL="0">
+            <a:pPr marL="0" indent="0">
               <a:lnSpc>
                 <a:spcPct val="110000"/>
               </a:lnSpc>
@@ -15495,14 +15737,14 @@
       </p:sp>
       <p:pic>
         <p:nvPicPr>
-          <p:cNvPr id="7" name="Image 0" descr="C:/Users/49816471825/AppData/Local/Temp/lockmachine/deck/icones/rfid-FFD23F.png">    </p:cNvPr>
+          <p:cNvPr id="7" name="Image 0" descr="C:/Users/49816471825/AppData/Local/Temp/lockmachine/deck/icones/rfid-FFD23F.png"/>
           <p:cNvPicPr>
             <a:picLocks noChangeAspect="1"/>
           </p:cNvPicPr>
           <p:nvPr/>
         </p:nvPicPr>
         <p:blipFill>
-          <a:blip r:embed="rId1"/>
+          <a:blip r:embed="rId3"/>
           <a:stretch>
             <a:fillRect/>
           </a:stretch>
@@ -15538,7 +15780,7 @@
           <a:bodyPr wrap="square" lIns="0" tIns="0" rIns="0" bIns="0" rtlCol="0" anchor="t"/>
           <a:lstStyle/>
           <a:p>
-            <a:pPr algn="r" indent="0" marL="0">
+            <a:pPr marL="0" indent="0" algn="r">
               <a:buNone/>
             </a:pPr>
             <a:r>
@@ -15577,7 +15819,7 @@
           <a:bodyPr wrap="square" lIns="0" tIns="0" rIns="0" bIns="0" rtlCol="0" anchor="t"/>
           <a:lstStyle/>
           <a:p>
-            <a:pPr indent="0" marL="0">
+            <a:pPr marL="0" indent="0">
               <a:buNone/>
             </a:pPr>
             <a:r>
@@ -15616,7 +15858,7 @@
           <a:bodyPr wrap="square" lIns="0" tIns="0" rIns="0" bIns="0" rtlCol="0" anchor="t"/>
           <a:lstStyle/>
           <a:p>
-            <a:pPr indent="0" marL="0">
+            <a:pPr marL="0" indent="0">
               <a:lnSpc>
                 <a:spcPct val="110000"/>
               </a:lnSpc>
@@ -15719,14 +15961,14 @@
       </p:sp>
       <p:pic>
         <p:nvPicPr>
-          <p:cNvPr id="14" name="Image 1" descr="C:/Users/49816471825/AppData/Local/Temp/lockmachine/deck/icones/server-8C9BFF.png">    </p:cNvPr>
+          <p:cNvPr id="14" name="Image 1" descr="C:/Users/49816471825/AppData/Local/Temp/lockmachine/deck/icones/server-8C9BFF.png"/>
           <p:cNvPicPr>
             <a:picLocks noChangeAspect="1"/>
           </p:cNvPicPr>
           <p:nvPr/>
         </p:nvPicPr>
         <p:blipFill>
-          <a:blip r:embed="rId2"/>
+          <a:blip r:embed="rId4"/>
           <a:stretch>
             <a:fillRect/>
           </a:stretch>
@@ -15762,7 +16004,7 @@
           <a:bodyPr wrap="square" lIns="0" tIns="0" rIns="0" bIns="0" rtlCol="0" anchor="t"/>
           <a:lstStyle/>
           <a:p>
-            <a:pPr algn="r" indent="0" marL="0">
+            <a:pPr marL="0" indent="0" algn="r">
               <a:buNone/>
             </a:pPr>
             <a:r>
@@ -15801,7 +16043,7 @@
           <a:bodyPr wrap="square" lIns="0" tIns="0" rIns="0" bIns="0" rtlCol="0" anchor="t"/>
           <a:lstStyle/>
           <a:p>
-            <a:pPr indent="0" marL="0">
+            <a:pPr marL="0" indent="0">
               <a:buNone/>
             </a:pPr>
             <a:r>
@@ -15840,7 +16082,7 @@
           <a:bodyPr wrap="square" lIns="0" tIns="0" rIns="0" bIns="0" rtlCol="0" anchor="t"/>
           <a:lstStyle/>
           <a:p>
-            <a:pPr indent="0" marL="0">
+            <a:pPr marL="0" indent="0">
               <a:lnSpc>
                 <a:spcPct val="110000"/>
               </a:lnSpc>
@@ -15943,14 +16185,14 @@
       </p:sp>
       <p:pic>
         <p:nvPicPr>
-          <p:cNvPr id="21" name="Image 2" descr="C:/Users/49816471825/AppData/Local/Temp/lockmachine/deck/icones/db-22D07B.png">    </p:cNvPr>
+          <p:cNvPr id="21" name="Image 2" descr="C:/Users/49816471825/AppData/Local/Temp/lockmachine/deck/icones/db-22D07B.png"/>
           <p:cNvPicPr>
             <a:picLocks noChangeAspect="1"/>
           </p:cNvPicPr>
           <p:nvPr/>
         </p:nvPicPr>
         <p:blipFill>
-          <a:blip r:embed="rId3"/>
+          <a:blip r:embed="rId5"/>
           <a:stretch>
             <a:fillRect/>
           </a:stretch>
@@ -15986,7 +16228,7 @@
           <a:bodyPr wrap="square" lIns="0" tIns="0" rIns="0" bIns="0" rtlCol="0" anchor="t"/>
           <a:lstStyle/>
           <a:p>
-            <a:pPr algn="r" indent="0" marL="0">
+            <a:pPr marL="0" indent="0" algn="r">
               <a:buNone/>
             </a:pPr>
             <a:r>
@@ -16025,7 +16267,7 @@
           <a:bodyPr wrap="square" lIns="0" tIns="0" rIns="0" bIns="0" rtlCol="0" anchor="t"/>
           <a:lstStyle/>
           <a:p>
-            <a:pPr indent="0" marL="0">
+            <a:pPr marL="0" indent="0">
               <a:buNone/>
             </a:pPr>
             <a:r>
@@ -16064,7 +16306,7 @@
           <a:bodyPr wrap="square" lIns="0" tIns="0" rIns="0" bIns="0" rtlCol="0" anchor="t"/>
           <a:lstStyle/>
           <a:p>
-            <a:pPr indent="0" marL="0">
+            <a:pPr marL="0" indent="0">
               <a:lnSpc>
                 <a:spcPct val="110000"/>
               </a:lnSpc>
@@ -16105,7 +16347,7 @@
           </a:prstGeom>
           <a:extLst>
             <a:ext uri="{C572A759-6A51-4108-AA02-DFA0A04FC94B}">
-              <ma14:wrappingTextBoxFlag xmlns:ma14="http://schemas.microsoft.com/office/mac/drawingml/2011/main" val="0"/>
+              <ma14:wrappingTextBoxFlag xmlns="" xmlns:ma14="http://schemas.microsoft.com/office/mac/drawingml/2011/main" val="0"/>
             </a:ext>
           </a:extLst>
         </p:spPr>
@@ -16126,7 +16368,7 @@
           <a:p>
             <a:pPr algn="r"/>
             <a:fld id="{F7021451-1387-4CA6-816F-3879F97B5CBC}" type="slidenum">
-              <a:rPr b="0" lang="en-US"/>
+              <a:rPr lang="en-US" b="0"/>
               <a:t>2</a:t>
             </a:fld>
             <a:endParaRPr lang="en-US"/>
@@ -16161,9 +16403,11 @@
       <p:sp>
         <p:nvSpPr>
           <p:cNvPr id="2" name="Text 1"/>
-          <p:cNvSpPr/>
+          <p:cNvSpPr>
+            <a:spLocks noGrp="1"/>
+          </p:cNvSpPr>
           <p:nvPr>
-            <p:ph idx="102" type="title" hasCustomPrompt="1"/>
+            <p:ph type="title" idx="102" hasCustomPrompt="1"/>
           </p:nvPr>
         </p:nvSpPr>
         <p:spPr>
@@ -16181,7 +16425,7 @@
           <a:bodyPr wrap="square" lIns="0" tIns="0" rIns="0" bIns="0" rtlCol="0" anchor="ctr"/>
           <a:lstStyle/>
           <a:p>
-            <a:pPr algn="l" indent="0" marL="0">
+            <a:pPr marL="0" indent="0" algn="l">
               <a:buNone/>
             </a:pPr>
             <a:r>
@@ -16195,9 +16439,6 @@
               </a:rPr>
               <a:t>19  </a:t>
             </a:r>
-            <a:pPr algn="l" indent="0" marL="0">
-              <a:buNone/>
-            </a:pPr>
             <a:r>
               <a:rPr lang="en-US" sz="3200" b="1" dirty="0">
                 <a:solidFill>
@@ -16271,14 +16512,14 @@
       </p:sp>
       <p:pic>
         <p:nvPicPr>
-          <p:cNvPr id="5" name="Image 0" descr="C:/Users/49816471825/AppData/Local/Temp/lockmachine/deck/icones/shield-22D07B.png">    </p:cNvPr>
+          <p:cNvPr id="5" name="Image 0" descr="C:/Users/49816471825/AppData/Local/Temp/lockmachine/deck/icones/shield-22D07B.png"/>
           <p:cNvPicPr>
             <a:picLocks noChangeAspect="1"/>
           </p:cNvPicPr>
           <p:nvPr/>
         </p:nvPicPr>
         <p:blipFill>
-          <a:blip r:embed="rId1"/>
+          <a:blip r:embed="rId3"/>
           <a:stretch>
             <a:fillRect/>
           </a:stretch>
@@ -16314,11 +16555,11 @@
           <a:bodyPr wrap="square" lIns="0" tIns="0" rIns="0" bIns="0" rtlCol="0" anchor="t"/>
           <a:lstStyle/>
           <a:p>
-            <a:pPr indent="0" marL="0">
-              <a:buNone/>
-            </a:pPr>
-            <a:r>
-              <a:rPr lang="en-US" sz="1000" b="1" spc="120" kern="0" dirty="0">
+            <a:pPr marL="0" indent="0">
+              <a:buNone/>
+            </a:pPr>
+            <a:r>
+              <a:rPr lang="en-US" sz="1000" b="1" kern="0" spc="120" dirty="0">
                 <a:solidFill>
                   <a:srgbClr val="A6ACC0"/>
                 </a:solidFill>
@@ -16353,7 +16594,7 @@
           <a:bodyPr wrap="square" lIns="0" tIns="0" rIns="0" bIns="0" rtlCol="0" anchor="t"/>
           <a:lstStyle/>
           <a:p>
-            <a:pPr indent="0" marL="0">
+            <a:pPr marL="0" indent="0">
               <a:spcAft>
                 <a:spcPts val="1000"/>
               </a:spcAft>
@@ -16373,7 +16614,7 @@
             <a:endParaRPr lang="en-US" sz="1300" dirty="0"/>
           </a:p>
           <a:p>
-            <a:pPr indent="0" marL="0">
+            <a:pPr marL="0" indent="0">
               <a:spcAft>
                 <a:spcPts val="1000"/>
               </a:spcAft>
@@ -16452,14 +16693,14 @@
       </p:sp>
       <p:pic>
         <p:nvPicPr>
-          <p:cNvPr id="10" name="Image 1" descr="C:/Users/49816471825/AppData/Local/Temp/lockmachine/deck/icones/machine-FFD23F.png">    </p:cNvPr>
+          <p:cNvPr id="10" name="Image 1" descr="C:/Users/49816471825/AppData/Local/Temp/lockmachine/deck/icones/machine-FFD23F.png"/>
           <p:cNvPicPr>
             <a:picLocks noChangeAspect="1"/>
           </p:cNvPicPr>
           <p:nvPr/>
         </p:nvPicPr>
         <p:blipFill>
-          <a:blip r:embed="rId2"/>
+          <a:blip r:embed="rId4"/>
           <a:stretch>
             <a:fillRect/>
           </a:stretch>
@@ -16495,11 +16736,11 @@
           <a:bodyPr wrap="square" lIns="0" tIns="0" rIns="0" bIns="0" rtlCol="0" anchor="t"/>
           <a:lstStyle/>
           <a:p>
-            <a:pPr indent="0" marL="0">
-              <a:buNone/>
-            </a:pPr>
-            <a:r>
-              <a:rPr lang="en-US" sz="1000" b="1" spc="120" kern="0" dirty="0">
+            <a:pPr marL="0" indent="0">
+              <a:buNone/>
+            </a:pPr>
+            <a:r>
+              <a:rPr lang="en-US" sz="1000" b="1" kern="0" spc="120" dirty="0">
                 <a:solidFill>
                   <a:srgbClr val="A6ACC0"/>
                 </a:solidFill>
@@ -16534,7 +16775,7 @@
           <a:bodyPr wrap="square" lIns="0" tIns="0" rIns="0" bIns="0" rtlCol="0" anchor="t"/>
           <a:lstStyle/>
           <a:p>
-            <a:pPr indent="0" marL="0">
+            <a:pPr marL="0" indent="0">
               <a:spcAft>
                 <a:spcPts val="1000"/>
               </a:spcAft>
@@ -16554,7 +16795,7 @@
             <a:endParaRPr lang="en-US" sz="1300" dirty="0"/>
           </a:p>
           <a:p>
-            <a:pPr indent="0" marL="0">
+            <a:pPr marL="0" indent="0">
               <a:spcAft>
                 <a:spcPts val="1000"/>
               </a:spcAft>
@@ -16574,7 +16815,7 @@
             <a:endParaRPr lang="en-US" sz="1300" dirty="0"/>
           </a:p>
           <a:p>
-            <a:pPr indent="0" marL="0">
+            <a:pPr marL="0" indent="0">
               <a:spcAft>
                 <a:spcPts val="1000"/>
               </a:spcAft>
@@ -16653,14 +16894,14 @@
       </p:sp>
       <p:pic>
         <p:nvPicPr>
-          <p:cNvPr id="15" name="Image 2" descr="C:/Users/49816471825/AppData/Local/Temp/lockmachine/deck/icones/chip-FFD23F.png">    </p:cNvPr>
+          <p:cNvPr id="15" name="Image 2" descr="C:/Users/49816471825/AppData/Local/Temp/lockmachine/deck/icones/chip-FFD23F.png"/>
           <p:cNvPicPr>
             <a:picLocks noChangeAspect="1"/>
           </p:cNvPicPr>
           <p:nvPr/>
         </p:nvPicPr>
         <p:blipFill>
-          <a:blip r:embed="rId3"/>
+          <a:blip r:embed="rId5"/>
           <a:stretch>
             <a:fillRect/>
           </a:stretch>
@@ -16696,11 +16937,11 @@
           <a:bodyPr wrap="square" lIns="0" tIns="0" rIns="0" bIns="0" rtlCol="0" anchor="t"/>
           <a:lstStyle/>
           <a:p>
-            <a:pPr indent="0" marL="0">
-              <a:buNone/>
-            </a:pPr>
-            <a:r>
-              <a:rPr lang="en-US" sz="1000" b="1" spc="120" kern="0" dirty="0">
+            <a:pPr marL="0" indent="0">
+              <a:buNone/>
+            </a:pPr>
+            <a:r>
+              <a:rPr lang="en-US" sz="1000" b="1" kern="0" spc="120" dirty="0">
                 <a:solidFill>
                   <a:srgbClr val="A6ACC0"/>
                 </a:solidFill>
@@ -16735,7 +16976,7 @@
           <a:bodyPr wrap="square" lIns="0" tIns="0" rIns="0" bIns="0" rtlCol="0" anchor="t"/>
           <a:lstStyle/>
           <a:p>
-            <a:pPr indent="0" marL="0">
+            <a:pPr marL="0" indent="0">
               <a:spcAft>
                 <a:spcPts val="1000"/>
               </a:spcAft>
@@ -16755,7 +16996,7 @@
             <a:endParaRPr lang="en-US" sz="1300" dirty="0"/>
           </a:p>
           <a:p>
-            <a:pPr indent="0" marL="0">
+            <a:pPr marL="0" indent="0">
               <a:spcAft>
                 <a:spcPts val="1000"/>
               </a:spcAft>
@@ -16775,7 +17016,7 @@
             <a:endParaRPr lang="en-US" sz="1300" dirty="0"/>
           </a:p>
           <a:p>
-            <a:pPr indent="0" marL="0">
+            <a:pPr marL="0" indent="0">
               <a:spcAft>
                 <a:spcPts val="1000"/>
               </a:spcAft>
@@ -16795,7 +17036,7 @@
             <a:endParaRPr lang="en-US" sz="1300" dirty="0"/>
           </a:p>
           <a:p>
-            <a:pPr indent="0" marL="0">
+            <a:pPr marL="0" indent="0">
               <a:spcAft>
                 <a:spcPts val="1000"/>
               </a:spcAft>
@@ -16815,7 +17056,7 @@
             <a:endParaRPr lang="en-US" sz="1300" dirty="0"/>
           </a:p>
           <a:p>
-            <a:pPr indent="0" marL="0">
+            <a:pPr marL="0" indent="0">
               <a:spcAft>
                 <a:spcPts val="1000"/>
               </a:spcAft>
@@ -16857,7 +17098,7 @@
           <a:bodyPr wrap="square" lIns="0" tIns="0" rIns="0" bIns="0" rtlCol="0" anchor="ctr"/>
           <a:lstStyle/>
           <a:p>
-            <a:pPr indent="0" marL="0">
+            <a:pPr marL="0" indent="0">
               <a:buNone/>
             </a:pPr>
             <a:r>
@@ -16895,7 +17136,7 @@
           </a:prstGeom>
           <a:extLst>
             <a:ext uri="{C572A759-6A51-4108-AA02-DFA0A04FC94B}">
-              <ma14:wrappingTextBoxFlag xmlns:ma14="http://schemas.microsoft.com/office/mac/drawingml/2011/main" val="0"/>
+              <ma14:wrappingTextBoxFlag xmlns="" xmlns:ma14="http://schemas.microsoft.com/office/mac/drawingml/2011/main" val="0"/>
             </a:ext>
           </a:extLst>
         </p:spPr>
@@ -16916,7 +17157,7 @@
           <a:p>
             <a:pPr algn="r"/>
             <a:fld id="{F7021451-1387-4CA6-816F-3879F97B5CBC}" type="slidenum">
-              <a:rPr b="0" lang="en-US"/>
+              <a:rPr lang="en-US" b="0"/>
               <a:t>20</a:t>
             </a:fld>
             <a:endParaRPr lang="en-US"/>
@@ -16950,14 +17191,14 @@
       </p:grpSpPr>
       <p:pic>
         <p:nvPicPr>
-          <p:cNvPr id="2" name="Image 0" descr="C:/Users/49816471825/AppData/Local/Temp/lockmachine/deck/slides-img/fim-simbolo.png">    </p:cNvPr>
+          <p:cNvPr id="2" name="Image 0" descr="C:/Users/49816471825/AppData/Local/Temp/lockmachine/deck/slides-img/fim-simbolo.png"/>
           <p:cNvPicPr>
             <a:picLocks noChangeAspect="1"/>
           </p:cNvPicPr>
           <p:nvPr/>
         </p:nvPicPr>
         <p:blipFill>
-          <a:blip r:embed="rId1"/>
+          <a:blip r:embed="rId3"/>
           <a:stretch>
             <a:fillRect/>
           </a:stretch>
@@ -16974,14 +17215,14 @@
       </p:pic>
       <p:pic>
         <p:nvPicPr>
-          <p:cNvPr id="3" name="Image 1" descr="C:/Users/49816471825/AppData/Local/Temp/lockmachine/deck/slides-img/degrade.png">    </p:cNvPr>
+          <p:cNvPr id="3" name="Image 1" descr="C:/Users/49816471825/AppData/Local/Temp/lockmachine/deck/slides-img/degrade.png"/>
           <p:cNvPicPr>
             <a:picLocks noChangeAspect="1"/>
           </p:cNvPicPr>
           <p:nvPr/>
         </p:nvPicPr>
         <p:blipFill>
-          <a:blip r:embed="rId2"/>
+          <a:blip r:embed="rId4"/>
           <a:stretch>
             <a:fillRect/>
           </a:stretch>
@@ -17017,7 +17258,7 @@
           <a:bodyPr wrap="square" lIns="0" tIns="0" rIns="0" bIns="0" rtlCol="0" anchor="ctr"/>
           <a:lstStyle/>
           <a:p>
-            <a:pPr indent="0" marL="0">
+            <a:pPr marL="0" indent="0">
               <a:buNone/>
             </a:pPr>
             <a:r>
@@ -17056,7 +17297,7 @@
           <a:bodyPr wrap="square" lIns="0" tIns="0" rIns="0" bIns="0" rtlCol="0" anchor="ctr"/>
           <a:lstStyle/>
           <a:p>
-            <a:pPr indent="0" marL="0">
+            <a:pPr marL="0" indent="0">
               <a:buNone/>
             </a:pPr>
             <a:r>
@@ -17095,11 +17336,11 @@
           <a:bodyPr wrap="square" lIns="0" tIns="0" rIns="0" bIns="0" rtlCol="0" anchor="t"/>
           <a:lstStyle/>
           <a:p>
-            <a:pPr indent="0" marL="0">
-              <a:buNone/>
-            </a:pPr>
-            <a:r>
-              <a:rPr lang="en-US" sz="1000" b="1" spc="120" kern="0" dirty="0">
+            <a:pPr marL="0" indent="0">
+              <a:buNone/>
+            </a:pPr>
+            <a:r>
+              <a:rPr lang="en-US" sz="1000" b="1" kern="0" spc="120" dirty="0">
                 <a:solidFill>
                   <a:srgbClr val="7D849C"/>
                 </a:solidFill>
@@ -17136,7 +17377,7 @@
           <a:bodyPr wrap="square" lIns="0" tIns="0" rIns="0" bIns="0" rtlCol="0" anchor="ctr"/>
           <a:lstStyle/>
           <a:p>
-            <a:pPr algn="ctr" indent="0" marL="0">
+            <a:pPr marL="0" indent="0" algn="ctr">
               <a:buNone/>
             </a:pPr>
             <a:r>
@@ -17175,7 +17416,7 @@
           <a:bodyPr wrap="square" lIns="0" tIns="0" rIns="0" bIns="0" rtlCol="0" anchor="ctr"/>
           <a:lstStyle/>
           <a:p>
-            <a:pPr indent="0" marL="0">
+            <a:pPr marL="0" indent="0">
               <a:buNone/>
             </a:pPr>
             <a:r>
@@ -17189,9 +17430,6 @@
               </a:rPr>
               <a:t>Leonardo Kronka Rodrigues  </a:t>
             </a:r>
-            <a:pPr indent="0" marL="0">
-              <a:buNone/>
-            </a:pPr>
             <a:r>
               <a:rPr lang="en-US" sz="1200" dirty="0">
                 <a:solidFill>
@@ -17230,7 +17468,7 @@
           <a:bodyPr wrap="square" lIns="0" tIns="0" rIns="0" bIns="0" rtlCol="0" anchor="ctr"/>
           <a:lstStyle/>
           <a:p>
-            <a:pPr algn="ctr" indent="0" marL="0">
+            <a:pPr marL="0" indent="0" algn="ctr">
               <a:buNone/>
             </a:pPr>
             <a:r>
@@ -17269,7 +17507,7 @@
           <a:bodyPr wrap="square" lIns="0" tIns="0" rIns="0" bIns="0" rtlCol="0" anchor="ctr"/>
           <a:lstStyle/>
           <a:p>
-            <a:pPr indent="0" marL="0">
+            <a:pPr marL="0" indent="0">
               <a:buNone/>
             </a:pPr>
             <a:r>
@@ -17283,9 +17521,6 @@
               </a:rPr>
               <a:t>Cauê Henrique de Oliveira  </a:t>
             </a:r>
-            <a:pPr indent="0" marL="0">
-              <a:buNone/>
-            </a:pPr>
             <a:r>
               <a:rPr lang="en-US" sz="1200" dirty="0">
                 <a:solidFill>
@@ -17324,7 +17559,7 @@
           <a:bodyPr wrap="square" lIns="0" tIns="0" rIns="0" bIns="0" rtlCol="0" anchor="ctr"/>
           <a:lstStyle/>
           <a:p>
-            <a:pPr algn="ctr" indent="0" marL="0">
+            <a:pPr marL="0" indent="0" algn="ctr">
               <a:buNone/>
             </a:pPr>
             <a:r>
@@ -17363,7 +17598,7 @@
           <a:bodyPr wrap="square" lIns="0" tIns="0" rIns="0" bIns="0" rtlCol="0" anchor="ctr"/>
           <a:lstStyle/>
           <a:p>
-            <a:pPr indent="0" marL="0">
+            <a:pPr marL="0" indent="0">
               <a:buNone/>
             </a:pPr>
             <a:r>
@@ -17377,9 +17612,6 @@
               </a:rPr>
               <a:t>Evelyn Caporali Escanavaque  </a:t>
             </a:r>
-            <a:pPr indent="0" marL="0">
-              <a:buNone/>
-            </a:pPr>
             <a:r>
               <a:rPr lang="en-US" sz="1200" dirty="0">
                 <a:solidFill>
@@ -17422,7 +17654,7 @@
           <a:bodyPr wrap="square" lIns="0" tIns="0" rIns="0" bIns="0" rtlCol="0" anchor="ctr"/>
           <a:lstStyle/>
           <a:p>
-            <a:pPr algn="ctr" indent="0" marL="0">
+            <a:pPr marL="0" indent="0" algn="ctr">
               <a:buNone/>
             </a:pPr>
             <a:r>
@@ -17461,7 +17693,7 @@
           <a:bodyPr wrap="square" lIns="0" tIns="0" rIns="0" bIns="0" rtlCol="0" anchor="ctr"/>
           <a:lstStyle/>
           <a:p>
-            <a:pPr indent="0" marL="0">
+            <a:pPr marL="0" indent="0">
               <a:buNone/>
             </a:pPr>
             <a:r>
@@ -17475,9 +17707,6 @@
               </a:rPr>
               <a:t>João Victor Monteiro Gamero  </a:t>
             </a:r>
-            <a:pPr indent="0" marL="0">
-              <a:buNone/>
-            </a:pPr>
             <a:r>
               <a:rPr lang="en-US" sz="1200" dirty="0">
                 <a:solidFill>
@@ -17516,7 +17745,7 @@
           <a:bodyPr wrap="square" lIns="0" tIns="0" rIns="0" bIns="0" rtlCol="0" anchor="ctr"/>
           <a:lstStyle/>
           <a:p>
-            <a:pPr algn="ctr" indent="0" marL="0">
+            <a:pPr marL="0" indent="0" algn="ctr">
               <a:buNone/>
             </a:pPr>
             <a:r>
@@ -17555,7 +17784,7 @@
           <a:bodyPr wrap="square" lIns="0" tIns="0" rIns="0" bIns="0" rtlCol="0" anchor="ctr"/>
           <a:lstStyle/>
           <a:p>
-            <a:pPr indent="0" marL="0">
+            <a:pPr marL="0" indent="0">
               <a:buNone/>
             </a:pPr>
             <a:r>
@@ -17569,9 +17798,6 @@
               </a:rPr>
               <a:t>Gabriel Miranda  </a:t>
             </a:r>
-            <a:pPr indent="0" marL="0">
-              <a:buNone/>
-            </a:pPr>
             <a:r>
               <a:rPr lang="en-US" sz="1200" dirty="0">
                 <a:solidFill>
@@ -17589,14 +17815,14 @@
       </p:sp>
       <p:pic>
         <p:nvPicPr>
-          <p:cNvPr id="17" name="Image 2" descr="C:/Users/49816471825/Desktop/linkwave-lockmachine/assets/brand/linkwave-horizontal-escuro.png">    </p:cNvPr>
+          <p:cNvPr id="17" name="Image 2" descr="C:/Users/49816471825/Desktop/linkwave-lockmachine/assets/brand/linkwave-horizontal-escuro.png"/>
           <p:cNvPicPr>
             <a:picLocks noChangeAspect="1"/>
           </p:cNvPicPr>
           <p:nvPr/>
         </p:nvPicPr>
         <p:blipFill>
-          <a:blip r:embed="rId3"/>
+          <a:blip r:embed="rId5"/>
           <a:stretch>
             <a:fillRect/>
           </a:stretch>
@@ -17613,14 +17839,14 @@
       </p:pic>
       <p:pic>
         <p:nvPicPr>
-          <p:cNvPr id="18" name="Image 3" descr="C:/Users/49816471825/Desktop/linkwave-lockmachine/assets/brand/lockmachine-horizontal-escuro.png">    </p:cNvPr>
+          <p:cNvPr id="18" name="Image 3" descr="C:/Users/49816471825/Desktop/linkwave-lockmachine/assets/brand/lockmachine-horizontal-escuro.png"/>
           <p:cNvPicPr>
             <a:picLocks noChangeAspect="1"/>
           </p:cNvPicPr>
           <p:nvPr/>
         </p:nvPicPr>
         <p:blipFill>
-          <a:blip r:embed="rId4"/>
+          <a:blip r:embed="rId6"/>
           <a:stretch>
             <a:fillRect/>
           </a:stretch>
@@ -17663,9 +17889,11 @@
       <p:sp>
         <p:nvSpPr>
           <p:cNvPr id="2" name="Text 1"/>
-          <p:cNvSpPr/>
+          <p:cNvSpPr>
+            <a:spLocks noGrp="1"/>
+          </p:cNvSpPr>
           <p:nvPr>
-            <p:ph idx="102" type="title" hasCustomPrompt="1"/>
+            <p:ph type="title" idx="102" hasCustomPrompt="1"/>
           </p:nvPr>
         </p:nvSpPr>
         <p:spPr>
@@ -17683,7 +17911,7 @@
           <a:bodyPr wrap="square" lIns="0" tIns="0" rIns="0" bIns="0" rtlCol="0" anchor="ctr"/>
           <a:lstStyle/>
           <a:p>
-            <a:pPr algn="l" indent="0" marL="0">
+            <a:pPr marL="0" indent="0" algn="l">
               <a:buNone/>
             </a:pPr>
             <a:r>
@@ -17697,9 +17925,6 @@
               </a:rPr>
               <a:t>02  </a:t>
             </a:r>
-            <a:pPr algn="l" indent="0" marL="0">
-              <a:buNone/>
-            </a:pPr>
             <a:r>
               <a:rPr lang="en-US" sz="3200" b="1" dirty="0">
                 <a:solidFill>
@@ -17736,7 +17961,7 @@
           <a:bodyPr wrap="square" lIns="0" tIns="0" rIns="0" bIns="0" rtlCol="0" anchor="t"/>
           <a:lstStyle/>
           <a:p>
-            <a:pPr indent="0" marL="0">
+            <a:pPr marL="0" indent="0">
               <a:buNone/>
             </a:pPr>
             <a:r>
@@ -17775,7 +18000,7 @@
           <a:bodyPr wrap="square" lIns="0" tIns="0" rIns="0" bIns="0" rtlCol="0" anchor="t"/>
           <a:lstStyle/>
           <a:p>
-            <a:pPr indent="0" marL="0">
+            <a:pPr marL="0" indent="0">
               <a:buNone/>
             </a:pPr>
             <a:r>
@@ -17814,7 +18039,7 @@
           </a:solidFill>
           <a:ln/>
           <a:effectLst>
-            <a:outerShdw sx="100000" sy="100000" kx="0" ky="0" algn="bl" rotWithShape="0" blurRad="177800" dist="63500" dir="5400000">
+            <a:outerShdw blurRad="177800" dist="63500" dir="5400000" algn="bl" rotWithShape="0">
               <a:srgbClr val="000000">
                 <a:alpha val="50000"/>
               </a:srgbClr>
@@ -17825,43 +18050,12 @@
           <a:bodyPr wrap="square" lIns="127000" tIns="127000" rIns="127000" bIns="127000" rtlCol="0" anchor="ctr"/>
           <a:lstStyle/>
           <a:p>
-            <a:pPr indent="0" marL="0">
+            <a:pPr marL="0" indent="0">
               <a:spcAft>
                 <a:spcPts val="400"/>
               </a:spcAft>
               <a:buNone/>
             </a:pPr>
-            <a:r>
-              <a:rPr lang="en-US" sz="1000" b="1" spc="60" kern="0" dirty="0">
-                <a:solidFill>
-                  <a:srgbClr val="5A6075"/>
-                </a:solidFill>
-                <a:latin typeface="Archivo" pitchFamily="34" charset="0"/>
-                <a:ea typeface="Archivo" pitchFamily="34" charset="-122"/>
-                <a:cs typeface="Archivo" pitchFamily="34" charset="-120"/>
-              </a:rPr>
-              <a:t>CADASTRO DO OPERADOR</a:t>
-            </a:r>
-            <a:endParaRPr lang="en-US" sz="1000" dirty="0"/>
-          </a:p>
-          <a:p>
-            <a:pPr indent="0" marL="0">
-              <a:spcAft>
-                <a:spcPts val="400"/>
-              </a:spcAft>
-              <a:buNone/>
-            </a:pPr>
-            <a:r>
-              <a:rPr lang="en-US" sz="1600" b="1" dirty="0">
-                <a:solidFill>
-                  <a:srgbClr val="1C212D"/>
-                </a:solidFill>
-                <a:latin typeface="Archivo" pitchFamily="34" charset="0"/>
-                <a:ea typeface="Archivo" pitchFamily="34" charset="-122"/>
-                <a:cs typeface="Archivo" pitchFamily="34" charset="-120"/>
-              </a:rPr>
-              <a:t>na planilha do RH</a:t>
-            </a:r>
             <a:endParaRPr lang="en-US" sz="1000" dirty="0"/>
           </a:p>
         </p:txBody>
@@ -17887,7 +18081,7 @@
           </a:solidFill>
           <a:ln/>
           <a:effectLst>
-            <a:outerShdw sx="100000" sy="100000" kx="0" ky="0" algn="bl" rotWithShape="0" blurRad="177800" dist="63500" dir="5400000">
+            <a:outerShdw blurRad="177800" dist="63500" dir="5400000" algn="bl" rotWithShape="0">
               <a:srgbClr val="000000">
                 <a:alpha val="50000"/>
               </a:srgbClr>
@@ -17898,43 +18092,12 @@
           <a:bodyPr wrap="square" lIns="127000" tIns="127000" rIns="127000" bIns="127000" rtlCol="0" anchor="ctr"/>
           <a:lstStyle/>
           <a:p>
-            <a:pPr indent="0" marL="0">
+            <a:pPr marL="0" indent="0">
               <a:spcAft>
                 <a:spcPts val="400"/>
               </a:spcAft>
               <a:buNone/>
             </a:pPr>
-            <a:r>
-              <a:rPr lang="en-US" sz="1000" b="1" spc="60" kern="0" dirty="0">
-                <a:solidFill>
-                  <a:srgbClr val="5A6075"/>
-                </a:solidFill>
-                <a:latin typeface="Archivo" pitchFamily="34" charset="0"/>
-                <a:ea typeface="Archivo" pitchFamily="34" charset="-122"/>
-                <a:cs typeface="Archivo" pitchFamily="34" charset="-120"/>
-              </a:rPr>
-              <a:t>CARTÃO DO OPERADOR</a:t>
-            </a:r>
-            <a:endParaRPr lang="en-US" sz="1000" dirty="0"/>
-          </a:p>
-          <a:p>
-            <a:pPr indent="0" marL="0">
-              <a:spcAft>
-                <a:spcPts val="400"/>
-              </a:spcAft>
-              <a:buNone/>
-            </a:pPr>
-            <a:r>
-              <a:rPr lang="en-US" sz="1600" b="1" dirty="0">
-                <a:solidFill>
-                  <a:srgbClr val="1C212D"/>
-                </a:solidFill>
-                <a:latin typeface="Archivo" pitchFamily="34" charset="0"/>
-                <a:ea typeface="Archivo" pitchFamily="34" charset="-122"/>
-                <a:cs typeface="Archivo" pitchFamily="34" charset="-120"/>
-              </a:rPr>
-              <a:t>numa gaveta da portaria</a:t>
-            </a:r>
             <a:endParaRPr lang="en-US" sz="1000" dirty="0"/>
           </a:p>
         </p:txBody>
@@ -17960,7 +18123,7 @@
           </a:solidFill>
           <a:ln/>
           <a:effectLst>
-            <a:outerShdw sx="100000" sy="100000" kx="0" ky="0" algn="bl" rotWithShape="0" blurRad="177800" dist="63500" dir="5400000">
+            <a:outerShdw blurRad="177800" dist="63500" dir="5400000" algn="bl" rotWithShape="0">
               <a:srgbClr val="000000">
                 <a:alpha val="50000"/>
               </a:srgbClr>
@@ -17971,43 +18134,12 @@
           <a:bodyPr wrap="square" lIns="127000" tIns="127000" rIns="127000" bIns="127000" rtlCol="0" anchor="ctr"/>
           <a:lstStyle/>
           <a:p>
-            <a:pPr indent="0" marL="0">
+            <a:pPr marL="0" indent="0">
               <a:spcAft>
                 <a:spcPts val="400"/>
               </a:spcAft>
               <a:buNone/>
             </a:pPr>
-            <a:r>
-              <a:rPr lang="en-US" sz="1000" b="1" spc="60" kern="0" dirty="0">
-                <a:solidFill>
-                  <a:srgbClr val="5A6075"/>
-                </a:solidFill>
-                <a:latin typeface="Archivo" pitchFamily="34" charset="0"/>
-                <a:ea typeface="Archivo" pitchFamily="34" charset="-122"/>
-                <a:cs typeface="Archivo" pitchFamily="34" charset="-120"/>
-              </a:rPr>
-              <a:t>TREINAMENTO CONCLUÍDO</a:t>
-            </a:r>
-            <a:endParaRPr lang="en-US" sz="1000" dirty="0"/>
-          </a:p>
-          <a:p>
-            <a:pPr indent="0" marL="0">
-              <a:spcAft>
-                <a:spcPts val="400"/>
-              </a:spcAft>
-              <a:buNone/>
-            </a:pPr>
-            <a:r>
-              <a:rPr lang="en-US" sz="1600" b="1" dirty="0">
-                <a:solidFill>
-                  <a:srgbClr val="1C212D"/>
-                </a:solidFill>
-                <a:latin typeface="Archivo" pitchFamily="34" charset="0"/>
-                <a:ea typeface="Archivo" pitchFamily="34" charset="-122"/>
-                <a:cs typeface="Archivo" pitchFamily="34" charset="-120"/>
-              </a:rPr>
-              <a:t>no certificado impresso</a:t>
-            </a:r>
             <a:endParaRPr lang="en-US" sz="1000" dirty="0"/>
           </a:p>
         </p:txBody>
@@ -18033,7 +18165,7 @@
           </a:solidFill>
           <a:ln/>
           <a:effectLst>
-            <a:outerShdw sx="100000" sy="100000" kx="0" ky="0" algn="bl" rotWithShape="0" blurRad="177800" dist="63500" dir="5400000">
+            <a:outerShdw blurRad="177800" dist="63500" dir="5400000" algn="bl" rotWithShape="0">
               <a:srgbClr val="000000">
                 <a:alpha val="50000"/>
               </a:srgbClr>
@@ -18044,43 +18176,12 @@
           <a:bodyPr wrap="square" lIns="127000" tIns="127000" rIns="127000" bIns="127000" rtlCol="0" anchor="ctr"/>
           <a:lstStyle/>
           <a:p>
-            <a:pPr indent="0" marL="0">
+            <a:pPr marL="0" indent="0">
               <a:spcAft>
                 <a:spcPts val="400"/>
               </a:spcAft>
               <a:buNone/>
             </a:pPr>
-            <a:r>
-              <a:rPr lang="en-US" sz="1000" b="1" spc="60" kern="0" dirty="0">
-                <a:solidFill>
-                  <a:srgbClr val="5A6075"/>
-                </a:solidFill>
-                <a:latin typeface="Archivo" pitchFamily="34" charset="0"/>
-                <a:ea typeface="Archivo" pitchFamily="34" charset="-122"/>
-                <a:cs typeface="Archivo" pitchFamily="34" charset="-120"/>
-              </a:rPr>
-              <a:t>DATA DE VALIDADE</a:t>
-            </a:r>
-            <a:endParaRPr lang="en-US" sz="1000" dirty="0"/>
-          </a:p>
-          <a:p>
-            <a:pPr indent="0" marL="0">
-              <a:spcAft>
-                <a:spcPts val="400"/>
-              </a:spcAft>
-              <a:buNone/>
-            </a:pPr>
-            <a:r>
-              <a:rPr lang="en-US" sz="1600" b="1" dirty="0">
-                <a:solidFill>
-                  <a:srgbClr val="1C212D"/>
-                </a:solidFill>
-                <a:latin typeface="Archivo" pitchFamily="34" charset="0"/>
-                <a:ea typeface="Archivo" pitchFamily="34" charset="-122"/>
-                <a:cs typeface="Archivo" pitchFamily="34" charset="-120"/>
-              </a:rPr>
-              <a:t>anotada à mão</a:t>
-            </a:r>
             <a:endParaRPr lang="en-US" sz="1000" dirty="0"/>
           </a:p>
         </p:txBody>
@@ -18106,7 +18207,7 @@
           </a:solidFill>
           <a:ln/>
           <a:effectLst>
-            <a:outerShdw sx="100000" sy="100000" kx="0" ky="0" algn="bl" rotWithShape="0" blurRad="177800" dist="63500" dir="5400000">
+            <a:outerShdw blurRad="177800" dist="63500" dir="5400000" algn="bl" rotWithShape="0">
               <a:srgbClr val="000000">
                 <a:alpha val="50000"/>
               </a:srgbClr>
@@ -18117,43 +18218,12 @@
           <a:bodyPr wrap="square" lIns="127000" tIns="127000" rIns="127000" bIns="127000" rtlCol="0" anchor="ctr"/>
           <a:lstStyle/>
           <a:p>
-            <a:pPr indent="0" marL="0">
+            <a:pPr marL="0" indent="0">
               <a:spcAft>
                 <a:spcPts val="400"/>
               </a:spcAft>
               <a:buNone/>
             </a:pPr>
-            <a:r>
-              <a:rPr lang="en-US" sz="1000" b="1" spc="60" kern="0" dirty="0">
-                <a:solidFill>
-                  <a:srgbClr val="5A6075"/>
-                </a:solidFill>
-                <a:latin typeface="Archivo" pitchFamily="34" charset="0"/>
-                <a:ea typeface="Archivo" pitchFamily="34" charset="-122"/>
-                <a:cs typeface="Archivo" pitchFamily="34" charset="-120"/>
-              </a:rPr>
-              <a:t>MÁQUINA SOLICITADA</a:t>
-            </a:r>
-            <a:endParaRPr lang="en-US" sz="1000" dirty="0"/>
-          </a:p>
-          <a:p>
-            <a:pPr indent="0" marL="0">
-              <a:spcAft>
-                <a:spcPts val="400"/>
-              </a:spcAft>
-              <a:buNone/>
-            </a:pPr>
-            <a:r>
-              <a:rPr lang="en-US" sz="1600" b="1" dirty="0">
-                <a:solidFill>
-                  <a:srgbClr val="1C212D"/>
-                </a:solidFill>
-                <a:latin typeface="Archivo" pitchFamily="34" charset="0"/>
-                <a:ea typeface="Archivo" pitchFamily="34" charset="-122"/>
-                <a:cs typeface="Archivo" pitchFamily="34" charset="-120"/>
-              </a:rPr>
-              <a:t>num pedido verbal</a:t>
-            </a:r>
             <a:endParaRPr lang="en-US" sz="1000" dirty="0"/>
           </a:p>
         </p:txBody>
@@ -18179,7 +18249,7 @@
           </a:solidFill>
           <a:ln/>
           <a:effectLst>
-            <a:outerShdw sx="100000" sy="100000" kx="0" ky="0" algn="bl" rotWithShape="0" blurRad="177800" dist="63500" dir="5400000">
+            <a:outerShdw blurRad="177800" dist="63500" dir="5400000" algn="bl" rotWithShape="0">
               <a:srgbClr val="000000">
                 <a:alpha val="50000"/>
               </a:srgbClr>
@@ -18190,43 +18260,12 @@
           <a:bodyPr wrap="square" lIns="127000" tIns="127000" rIns="127000" bIns="127000" rtlCol="0" anchor="ctr"/>
           <a:lstStyle/>
           <a:p>
-            <a:pPr indent="0" marL="0">
+            <a:pPr marL="0" indent="0">
               <a:spcAft>
                 <a:spcPts val="400"/>
               </a:spcAft>
               <a:buNone/>
             </a:pPr>
-            <a:r>
-              <a:rPr lang="en-US" sz="1000" b="1" spc="60" kern="0" dirty="0">
-                <a:solidFill>
-                  <a:srgbClr val="5A6075"/>
-                </a:solidFill>
-                <a:latin typeface="Archivo" pitchFamily="34" charset="0"/>
-                <a:ea typeface="Archivo" pitchFamily="34" charset="-122"/>
-                <a:cs typeface="Archivo" pitchFamily="34" charset="-120"/>
-              </a:rPr>
-              <a:t>RESULTADO DO ACESSO</a:t>
-            </a:r>
-            <a:endParaRPr lang="en-US" sz="1000" dirty="0"/>
-          </a:p>
-          <a:p>
-            <a:pPr indent="0" marL="0">
-              <a:spcAft>
-                <a:spcPts val="400"/>
-              </a:spcAft>
-              <a:buNone/>
-            </a:pPr>
-            <a:r>
-              <a:rPr lang="en-US" sz="1600" b="1" dirty="0">
-                <a:solidFill>
-                  <a:srgbClr val="C42A1D"/>
-                </a:solidFill>
-                <a:latin typeface="Archivo" pitchFamily="34" charset="0"/>
-                <a:ea typeface="Archivo" pitchFamily="34" charset="-122"/>
-                <a:cs typeface="Archivo" pitchFamily="34" charset="-120"/>
-              </a:rPr>
-              <a:t>sem registro</a:t>
-            </a:r>
             <a:endParaRPr lang="en-US" sz="1000" dirty="0"/>
           </a:p>
         </p:txBody>
@@ -18279,7 +18318,7 @@
           <a:bodyPr wrap="square" lIns="0" tIns="0" rIns="0" bIns="0" rtlCol="0" anchor="t"/>
           <a:lstStyle/>
           <a:p>
-            <a:pPr indent="0" marL="0">
+            <a:pPr marL="0" indent="0">
               <a:buNone/>
             </a:pPr>
             <a:r>
@@ -18360,7 +18399,7 @@
           <a:bodyPr wrap="square" lIns="0" tIns="0" rIns="0" bIns="0" rtlCol="0" anchor="t"/>
           <a:lstStyle/>
           <a:p>
-            <a:pPr indent="0" marL="0">
+            <a:pPr marL="0" indent="0">
               <a:buNone/>
             </a:pPr>
             <a:r>
@@ -18377,7 +18416,7 @@
             <a:endParaRPr lang="en-US" sz="1400" dirty="0"/>
           </a:p>
           <a:p>
-            <a:pPr indent="0" marL="0">
+            <a:pPr marL="0" indent="0">
               <a:buNone/>
             </a:pPr>
             <a:r>
@@ -18458,7 +18497,7 @@
           <a:bodyPr wrap="square" lIns="0" tIns="0" rIns="0" bIns="0" rtlCol="0" anchor="t"/>
           <a:lstStyle/>
           <a:p>
-            <a:pPr indent="0" marL="0">
+            <a:pPr marL="0" indent="0">
               <a:buNone/>
             </a:pPr>
             <a:r>
@@ -18475,7 +18514,7 @@
             <a:endParaRPr lang="en-US" sz="1400" dirty="0"/>
           </a:p>
           <a:p>
-            <a:pPr indent="0" marL="0">
+            <a:pPr marL="0" indent="0">
               <a:buNone/>
             </a:pPr>
             <a:r>
@@ -18556,7 +18595,7 @@
           <a:bodyPr wrap="square" lIns="0" tIns="0" rIns="0" bIns="0" rtlCol="0" anchor="t"/>
           <a:lstStyle/>
           <a:p>
-            <a:pPr indent="0" marL="0">
+            <a:pPr marL="0" indent="0">
               <a:buNone/>
             </a:pPr>
             <a:r>
@@ -18573,7 +18612,7 @@
             <a:endParaRPr lang="en-US" sz="1400" dirty="0"/>
           </a:p>
           <a:p>
-            <a:pPr indent="0" marL="0">
+            <a:pPr marL="0" indent="0">
               <a:buNone/>
             </a:pPr>
             <a:r>
@@ -18612,7 +18651,7 @@
           <a:bodyPr wrap="square" lIns="0" tIns="0" rIns="0" bIns="0" rtlCol="0" anchor="t"/>
           <a:lstStyle/>
           <a:p>
-            <a:pPr indent="0" marL="0">
+            <a:pPr marL="0" indent="0">
               <a:buNone/>
             </a:pPr>
             <a:r>
@@ -18651,7 +18690,7 @@
           <a:bodyPr wrap="square" lIns="0" tIns="0" rIns="0" bIns="0" rtlCol="0" anchor="t"/>
           <a:lstStyle/>
           <a:p>
-            <a:pPr indent="0" marL="0">
+            <a:pPr marL="0" indent="0">
               <a:buNone/>
             </a:pPr>
             <a:r>
@@ -18690,7 +18729,7 @@
           <a:bodyPr wrap="square" lIns="0" tIns="0" rIns="0" bIns="0" rtlCol="0" anchor="t"/>
           <a:lstStyle/>
           <a:p>
-            <a:pPr indent="0" marL="0">
+            <a:pPr marL="0" indent="0">
               <a:buNone/>
             </a:pPr>
             <a:r>
@@ -18728,7 +18767,7 @@
           </a:prstGeom>
           <a:extLst>
             <a:ext uri="{C572A759-6A51-4108-AA02-DFA0A04FC94B}">
-              <ma14:wrappingTextBoxFlag xmlns:ma14="http://schemas.microsoft.com/office/mac/drawingml/2011/main" val="0"/>
+              <ma14:wrappingTextBoxFlag xmlns="" xmlns:ma14="http://schemas.microsoft.com/office/mac/drawingml/2011/main" val="0"/>
             </a:ext>
           </a:extLst>
         </p:spPr>
@@ -18749,10 +18788,568 @@
           <a:p>
             <a:pPr algn="r"/>
             <a:fld id="{F7021451-1387-4CA6-816F-3879F97B5CBC}" type="slidenum">
-              <a:rPr b="0" lang="en-US"/>
+              <a:rPr lang="en-US" b="0"/>
               <a:t>3</a:t>
             </a:fld>
             <a:endParaRPr lang="en-US"/>
+          </a:p>
+        </p:txBody>
+      </p:sp>
+      <p:sp>
+        <p:nvSpPr>
+          <p:cNvPr id="26" name="Text 3 texto">
+            <a:extLst>
+              <a:ext uri="{FF2B5EF4-FFF2-40B4-BE49-F238E27FC236}">
+                <a16:creationId xmlns:a16="http://schemas.microsoft.com/office/drawing/2014/main" id="{CB1319DC-07DA-6554-1EA3-A7B68C1C78FA}"/>
+              </a:ext>
+            </a:extLst>
+          </p:cNvPr>
+          <p:cNvSpPr/>
+          <p:nvPr/>
+        </p:nvSpPr>
+        <p:spPr>
+          <a:xfrm rot="21450000">
+            <a:off x="675640" y="2915920"/>
+            <a:ext cx="1958848" cy="934720"/>
+          </a:xfrm>
+          <a:prstGeom prst="roundRect">
+            <a:avLst>
+              <a:gd name="adj" fmla="val 7692"/>
+            </a:avLst>
+          </a:prstGeom>
+          <a:noFill/>
+          <a:ln/>
+          <a:effectLst/>
+          <a:extLst>
+            <a:ext uri="{909E8E84-426E-40DD-AFC4-6F175D3DCCD1}">
+              <a14:hiddenFill xmlns:a14="http://schemas.microsoft.com/office/drawing/2010/main">
+                <a:solidFill>
+                  <a:srgbClr val="E9EBF2"/>
+                </a:solidFill>
+              </a14:hiddenFill>
+            </a:ext>
+            <a:ext uri="{AF507438-7753-43E0-B8FC-AC1667EBCBE1}">
+              <a14:hiddenEffects xmlns:a14="http://schemas.microsoft.com/office/drawing/2010/main">
+                <a:effectLst>
+                  <a:outerShdw blurRad="177800" dist="63500" dir="5400000" algn="bl" rotWithShape="0">
+                    <a:srgbClr val="000000">
+                      <a:alpha val="50000"/>
+                    </a:srgbClr>
+                  </a:outerShdw>
+                </a:effectLst>
+              </a14:hiddenEffects>
+            </a:ext>
+          </a:extLst>
+        </p:spPr>
+        <p:txBody>
+          <a:bodyPr wrap="square" lIns="0" tIns="0" rIns="0" bIns="0" rtlCol="0" anchor="ctr">
+            <a:noAutofit/>
+          </a:bodyPr>
+          <a:lstStyle/>
+          <a:p>
+            <a:pPr marL="0" indent="0">
+              <a:spcAft>
+                <a:spcPts val="400"/>
+              </a:spcAft>
+              <a:buNone/>
+            </a:pPr>
+            <a:r>
+              <a:rPr lang="en-US" sz="1000" b="1" kern="0" spc="60" dirty="0">
+                <a:solidFill>
+                  <a:srgbClr val="5A6075"/>
+                </a:solidFill>
+                <a:latin typeface="Archivo" pitchFamily="34" charset="0"/>
+                <a:ea typeface="Archivo" pitchFamily="34" charset="-122"/>
+                <a:cs typeface="Archivo" pitchFamily="34" charset="-120"/>
+              </a:rPr>
+              <a:t>CADASTRO DO OPERADOR</a:t>
+            </a:r>
+            <a:endParaRPr lang="en-US" sz="1000" dirty="0"/>
+          </a:p>
+          <a:p>
+            <a:pPr marL="0" indent="0">
+              <a:spcAft>
+                <a:spcPts val="400"/>
+              </a:spcAft>
+              <a:buNone/>
+            </a:pPr>
+            <a:r>
+              <a:rPr lang="en-US" sz="1600" b="1" dirty="0">
+                <a:solidFill>
+                  <a:srgbClr val="1C212D"/>
+                </a:solidFill>
+                <a:latin typeface="Archivo" pitchFamily="34" charset="0"/>
+                <a:ea typeface="Archivo" pitchFamily="34" charset="-122"/>
+                <a:cs typeface="Archivo" pitchFamily="34" charset="-120"/>
+              </a:rPr>
+              <a:t>na planilha do RH</a:t>
+            </a:r>
+            <a:endParaRPr lang="en-US" sz="1000" dirty="0"/>
+          </a:p>
+        </p:txBody>
+      </p:sp>
+      <p:sp>
+        <p:nvSpPr>
+          <p:cNvPr id="27" name="Text 4 texto">
+            <a:extLst>
+              <a:ext uri="{FF2B5EF4-FFF2-40B4-BE49-F238E27FC236}">
+                <a16:creationId xmlns:a16="http://schemas.microsoft.com/office/drawing/2014/main" id="{F99F53AC-0BD8-16D9-DB05-085A1C883CBD}"/>
+              </a:ext>
+            </a:extLst>
+          </p:cNvPr>
+          <p:cNvSpPr/>
+          <p:nvPr/>
+        </p:nvSpPr>
+        <p:spPr>
+          <a:xfrm rot="90000">
+            <a:off x="3071368" y="2915920"/>
+            <a:ext cx="1958848" cy="934720"/>
+          </a:xfrm>
+          <a:prstGeom prst="roundRect">
+            <a:avLst>
+              <a:gd name="adj" fmla="val 7692"/>
+            </a:avLst>
+          </a:prstGeom>
+          <a:noFill/>
+          <a:ln/>
+          <a:effectLst/>
+          <a:extLst>
+            <a:ext uri="{909E8E84-426E-40DD-AFC4-6F175D3DCCD1}">
+              <a14:hiddenFill xmlns:a14="http://schemas.microsoft.com/office/drawing/2010/main">
+                <a:solidFill>
+                  <a:srgbClr val="E9EBF2"/>
+                </a:solidFill>
+              </a14:hiddenFill>
+            </a:ext>
+            <a:ext uri="{AF507438-7753-43E0-B8FC-AC1667EBCBE1}">
+              <a14:hiddenEffects xmlns:a14="http://schemas.microsoft.com/office/drawing/2010/main">
+                <a:effectLst>
+                  <a:outerShdw blurRad="177800" dist="63500" dir="5400000" algn="bl" rotWithShape="0">
+                    <a:srgbClr val="000000">
+                      <a:alpha val="50000"/>
+                    </a:srgbClr>
+                  </a:outerShdw>
+                </a:effectLst>
+              </a14:hiddenEffects>
+            </a:ext>
+          </a:extLst>
+        </p:spPr>
+        <p:txBody>
+          <a:bodyPr wrap="square" lIns="0" tIns="0" rIns="0" bIns="0" rtlCol="0" anchor="ctr">
+            <a:noAutofit/>
+          </a:bodyPr>
+          <a:lstStyle/>
+          <a:p>
+            <a:pPr marL="0" indent="0">
+              <a:spcAft>
+                <a:spcPts val="400"/>
+              </a:spcAft>
+              <a:buNone/>
+            </a:pPr>
+            <a:r>
+              <a:rPr lang="en-US" sz="1000" b="1" kern="0" spc="60" dirty="0">
+                <a:solidFill>
+                  <a:srgbClr val="5A6075"/>
+                </a:solidFill>
+                <a:latin typeface="Archivo" pitchFamily="34" charset="0"/>
+                <a:ea typeface="Archivo" pitchFamily="34" charset="-122"/>
+                <a:cs typeface="Archivo" pitchFamily="34" charset="-120"/>
+              </a:rPr>
+              <a:t>CARTÃO DO OPERADOR</a:t>
+            </a:r>
+            <a:endParaRPr lang="en-US" sz="1000" dirty="0"/>
+          </a:p>
+          <a:p>
+            <a:pPr marL="0" indent="0">
+              <a:spcAft>
+                <a:spcPts val="400"/>
+              </a:spcAft>
+              <a:buNone/>
+            </a:pPr>
+            <a:r>
+              <a:rPr lang="en-US" sz="1600" b="1" dirty="0">
+                <a:solidFill>
+                  <a:srgbClr val="1C212D"/>
+                </a:solidFill>
+                <a:latin typeface="Archivo" pitchFamily="34" charset="0"/>
+                <a:ea typeface="Archivo" pitchFamily="34" charset="-122"/>
+                <a:cs typeface="Archivo" pitchFamily="34" charset="-120"/>
+              </a:rPr>
+              <a:t>numa gaveta da portaria</a:t>
+            </a:r>
+            <a:endParaRPr lang="en-US" sz="1000" dirty="0"/>
+          </a:p>
+        </p:txBody>
+      </p:sp>
+      <p:sp>
+        <p:nvSpPr>
+          <p:cNvPr id="28" name="Text 5 texto">
+            <a:extLst>
+              <a:ext uri="{FF2B5EF4-FFF2-40B4-BE49-F238E27FC236}">
+                <a16:creationId xmlns:a16="http://schemas.microsoft.com/office/drawing/2014/main" id="{4AEFBE43-82D7-BBD5-686F-E5786DF59808}"/>
+              </a:ext>
+            </a:extLst>
+          </p:cNvPr>
+          <p:cNvSpPr/>
+          <p:nvPr/>
+        </p:nvSpPr>
+        <p:spPr>
+          <a:xfrm rot="21527999">
+            <a:off x="5467096" y="2915920"/>
+            <a:ext cx="1958848" cy="934720"/>
+          </a:xfrm>
+          <a:prstGeom prst="roundRect">
+            <a:avLst>
+              <a:gd name="adj" fmla="val 7692"/>
+            </a:avLst>
+          </a:prstGeom>
+          <a:noFill/>
+          <a:ln/>
+          <a:effectLst/>
+          <a:extLst>
+            <a:ext uri="{909E8E84-426E-40DD-AFC4-6F175D3DCCD1}">
+              <a14:hiddenFill xmlns:a14="http://schemas.microsoft.com/office/drawing/2010/main">
+                <a:solidFill>
+                  <a:srgbClr val="E9EBF2"/>
+                </a:solidFill>
+              </a14:hiddenFill>
+            </a:ext>
+            <a:ext uri="{AF507438-7753-43E0-B8FC-AC1667EBCBE1}">
+              <a14:hiddenEffects xmlns:a14="http://schemas.microsoft.com/office/drawing/2010/main">
+                <a:effectLst>
+                  <a:outerShdw blurRad="177800" dist="63500" dir="5400000" algn="bl" rotWithShape="0">
+                    <a:srgbClr val="000000">
+                      <a:alpha val="50000"/>
+                    </a:srgbClr>
+                  </a:outerShdw>
+                </a:effectLst>
+              </a14:hiddenEffects>
+            </a:ext>
+          </a:extLst>
+        </p:spPr>
+        <p:txBody>
+          <a:bodyPr wrap="square" lIns="0" tIns="0" rIns="0" bIns="0" rtlCol="0" anchor="ctr">
+            <a:noAutofit/>
+          </a:bodyPr>
+          <a:lstStyle/>
+          <a:p>
+            <a:pPr marL="0" indent="0">
+              <a:spcAft>
+                <a:spcPts val="400"/>
+              </a:spcAft>
+              <a:buNone/>
+            </a:pPr>
+            <a:r>
+              <a:rPr lang="en-US" sz="1000" b="1" kern="0" spc="60" dirty="0">
+                <a:solidFill>
+                  <a:srgbClr val="5A6075"/>
+                </a:solidFill>
+                <a:latin typeface="Archivo" pitchFamily="34" charset="0"/>
+                <a:ea typeface="Archivo" pitchFamily="34" charset="-122"/>
+                <a:cs typeface="Archivo" pitchFamily="34" charset="-120"/>
+              </a:rPr>
+              <a:t>TREINAMENTO CONCLUÍDO</a:t>
+            </a:r>
+            <a:endParaRPr lang="en-US" sz="1000" dirty="0"/>
+          </a:p>
+          <a:p>
+            <a:pPr marL="0" indent="0">
+              <a:spcAft>
+                <a:spcPts val="400"/>
+              </a:spcAft>
+              <a:buNone/>
+            </a:pPr>
+            <a:r>
+              <a:rPr lang="en-US" sz="1600" b="1" dirty="0">
+                <a:solidFill>
+                  <a:srgbClr val="1C212D"/>
+                </a:solidFill>
+                <a:latin typeface="Archivo" pitchFamily="34" charset="0"/>
+                <a:ea typeface="Archivo" pitchFamily="34" charset="-122"/>
+                <a:cs typeface="Archivo" pitchFamily="34" charset="-120"/>
+              </a:rPr>
+              <a:t>no certificado impresso</a:t>
+            </a:r>
+            <a:endParaRPr lang="en-US" sz="1000" dirty="0"/>
+          </a:p>
+        </p:txBody>
+      </p:sp>
+      <p:sp>
+        <p:nvSpPr>
+          <p:cNvPr id="29" name="Text 6 texto">
+            <a:extLst>
+              <a:ext uri="{FF2B5EF4-FFF2-40B4-BE49-F238E27FC236}">
+                <a16:creationId xmlns:a16="http://schemas.microsoft.com/office/drawing/2014/main" id="{5CBDC0BD-56A7-1D95-2B16-75918E2A403F}"/>
+              </a:ext>
+            </a:extLst>
+          </p:cNvPr>
+          <p:cNvSpPr/>
+          <p:nvPr/>
+        </p:nvSpPr>
+        <p:spPr>
+          <a:xfrm rot="120000">
+            <a:off x="675640" y="4488688"/>
+            <a:ext cx="1958848" cy="934720"/>
+          </a:xfrm>
+          <a:prstGeom prst="roundRect">
+            <a:avLst>
+              <a:gd name="adj" fmla="val 7692"/>
+            </a:avLst>
+          </a:prstGeom>
+          <a:noFill/>
+          <a:ln/>
+          <a:effectLst/>
+          <a:extLst>
+            <a:ext uri="{909E8E84-426E-40DD-AFC4-6F175D3DCCD1}">
+              <a14:hiddenFill xmlns:a14="http://schemas.microsoft.com/office/drawing/2010/main">
+                <a:solidFill>
+                  <a:srgbClr val="E9EBF2"/>
+                </a:solidFill>
+              </a14:hiddenFill>
+            </a:ext>
+            <a:ext uri="{AF507438-7753-43E0-B8FC-AC1667EBCBE1}">
+              <a14:hiddenEffects xmlns:a14="http://schemas.microsoft.com/office/drawing/2010/main">
+                <a:effectLst>
+                  <a:outerShdw blurRad="177800" dist="63500" dir="5400000" algn="bl" rotWithShape="0">
+                    <a:srgbClr val="000000">
+                      <a:alpha val="50000"/>
+                    </a:srgbClr>
+                  </a:outerShdw>
+                </a:effectLst>
+              </a14:hiddenEffects>
+            </a:ext>
+          </a:extLst>
+        </p:spPr>
+        <p:txBody>
+          <a:bodyPr wrap="square" lIns="0" tIns="0" rIns="0" bIns="0" rtlCol="0" anchor="ctr">
+            <a:noAutofit/>
+          </a:bodyPr>
+          <a:lstStyle/>
+          <a:p>
+            <a:pPr marL="0" indent="0">
+              <a:spcAft>
+                <a:spcPts val="400"/>
+              </a:spcAft>
+              <a:buNone/>
+            </a:pPr>
+            <a:r>
+              <a:rPr lang="en-US" sz="1000" b="1" kern="0" spc="60" dirty="0">
+                <a:solidFill>
+                  <a:srgbClr val="5A6075"/>
+                </a:solidFill>
+                <a:latin typeface="Archivo" pitchFamily="34" charset="0"/>
+                <a:ea typeface="Archivo" pitchFamily="34" charset="-122"/>
+                <a:cs typeface="Archivo" pitchFamily="34" charset="-120"/>
+              </a:rPr>
+              <a:t>DATA DE VALIDADE</a:t>
+            </a:r>
+            <a:endParaRPr lang="en-US" sz="1000" dirty="0"/>
+          </a:p>
+          <a:p>
+            <a:pPr marL="0" indent="0">
+              <a:spcAft>
+                <a:spcPts val="400"/>
+              </a:spcAft>
+              <a:buNone/>
+            </a:pPr>
+            <a:r>
+              <a:rPr lang="en-US" sz="1600" b="1" dirty="0">
+                <a:solidFill>
+                  <a:srgbClr val="1C212D"/>
+                </a:solidFill>
+                <a:latin typeface="Archivo" pitchFamily="34" charset="0"/>
+                <a:ea typeface="Archivo" pitchFamily="34" charset="-122"/>
+                <a:cs typeface="Archivo" pitchFamily="34" charset="-120"/>
+              </a:rPr>
+              <a:t>anotada à mão</a:t>
+            </a:r>
+            <a:endParaRPr lang="en-US" sz="1000" dirty="0"/>
+          </a:p>
+        </p:txBody>
+      </p:sp>
+      <p:sp>
+        <p:nvSpPr>
+          <p:cNvPr id="30" name="Text 7 texto">
+            <a:extLst>
+              <a:ext uri="{FF2B5EF4-FFF2-40B4-BE49-F238E27FC236}">
+                <a16:creationId xmlns:a16="http://schemas.microsoft.com/office/drawing/2014/main" id="{EB00A3E3-8E2E-8378-1EEC-3460C2959C30}"/>
+              </a:ext>
+            </a:extLst>
+          </p:cNvPr>
+          <p:cNvSpPr/>
+          <p:nvPr/>
+        </p:nvSpPr>
+        <p:spPr>
+          <a:xfrm rot="21510000">
+            <a:off x="3071368" y="4488688"/>
+            <a:ext cx="1958848" cy="934720"/>
+          </a:xfrm>
+          <a:prstGeom prst="roundRect">
+            <a:avLst>
+              <a:gd name="adj" fmla="val 7692"/>
+            </a:avLst>
+          </a:prstGeom>
+          <a:noFill/>
+          <a:ln/>
+          <a:effectLst/>
+          <a:extLst>
+            <a:ext uri="{909E8E84-426E-40DD-AFC4-6F175D3DCCD1}">
+              <a14:hiddenFill xmlns:a14="http://schemas.microsoft.com/office/drawing/2010/main">
+                <a:solidFill>
+                  <a:srgbClr val="E9EBF2"/>
+                </a:solidFill>
+              </a14:hiddenFill>
+            </a:ext>
+            <a:ext uri="{AF507438-7753-43E0-B8FC-AC1667EBCBE1}">
+              <a14:hiddenEffects xmlns:a14="http://schemas.microsoft.com/office/drawing/2010/main">
+                <a:effectLst>
+                  <a:outerShdw blurRad="177800" dist="63500" dir="5400000" algn="bl" rotWithShape="0">
+                    <a:srgbClr val="000000">
+                      <a:alpha val="50000"/>
+                    </a:srgbClr>
+                  </a:outerShdw>
+                </a:effectLst>
+              </a14:hiddenEffects>
+            </a:ext>
+          </a:extLst>
+        </p:spPr>
+        <p:txBody>
+          <a:bodyPr wrap="square" lIns="0" tIns="0" rIns="0" bIns="0" rtlCol="0" anchor="ctr">
+            <a:noAutofit/>
+          </a:bodyPr>
+          <a:lstStyle/>
+          <a:p>
+            <a:pPr marL="0" indent="0">
+              <a:spcAft>
+                <a:spcPts val="400"/>
+              </a:spcAft>
+              <a:buNone/>
+            </a:pPr>
+            <a:r>
+              <a:rPr lang="en-US" sz="1000" b="1" kern="0" spc="60" dirty="0">
+                <a:solidFill>
+                  <a:srgbClr val="5A6075"/>
+                </a:solidFill>
+                <a:latin typeface="Archivo" pitchFamily="34" charset="0"/>
+                <a:ea typeface="Archivo" pitchFamily="34" charset="-122"/>
+                <a:cs typeface="Archivo" pitchFamily="34" charset="-120"/>
+              </a:rPr>
+              <a:t>MÁQUINA SOLICITADA</a:t>
+            </a:r>
+            <a:endParaRPr lang="en-US" sz="1000" dirty="0"/>
+          </a:p>
+          <a:p>
+            <a:pPr marL="0" indent="0">
+              <a:spcAft>
+                <a:spcPts val="400"/>
+              </a:spcAft>
+              <a:buNone/>
+            </a:pPr>
+            <a:r>
+              <a:rPr lang="en-US" sz="1600" b="1" dirty="0">
+                <a:solidFill>
+                  <a:srgbClr val="1C212D"/>
+                </a:solidFill>
+                <a:latin typeface="Archivo" pitchFamily="34" charset="0"/>
+                <a:ea typeface="Archivo" pitchFamily="34" charset="-122"/>
+                <a:cs typeface="Archivo" pitchFamily="34" charset="-120"/>
+              </a:rPr>
+              <a:t>num pedido verbal</a:t>
+            </a:r>
+            <a:endParaRPr lang="en-US" sz="1000" dirty="0"/>
+          </a:p>
+        </p:txBody>
+      </p:sp>
+      <p:sp>
+        <p:nvSpPr>
+          <p:cNvPr id="31" name="Text 8 texto">
+            <a:extLst>
+              <a:ext uri="{FF2B5EF4-FFF2-40B4-BE49-F238E27FC236}">
+                <a16:creationId xmlns:a16="http://schemas.microsoft.com/office/drawing/2014/main" id="{E6659393-9F50-B309-307B-C348C7A52C53}"/>
+              </a:ext>
+            </a:extLst>
+          </p:cNvPr>
+          <p:cNvSpPr/>
+          <p:nvPr/>
+        </p:nvSpPr>
+        <p:spPr>
+          <a:xfrm rot="150000">
+            <a:off x="5467096" y="4488688"/>
+            <a:ext cx="1958848" cy="934720"/>
+          </a:xfrm>
+          <a:prstGeom prst="roundRect">
+            <a:avLst>
+              <a:gd name="adj" fmla="val 7692"/>
+            </a:avLst>
+          </a:prstGeom>
+          <a:noFill/>
+          <a:ln/>
+          <a:effectLst/>
+          <a:extLst>
+            <a:ext uri="{909E8E84-426E-40DD-AFC4-6F175D3DCCD1}">
+              <a14:hiddenFill xmlns:a14="http://schemas.microsoft.com/office/drawing/2010/main">
+                <a:solidFill>
+                  <a:srgbClr val="E9EBF2"/>
+                </a:solidFill>
+              </a14:hiddenFill>
+            </a:ext>
+            <a:ext uri="{AF507438-7753-43E0-B8FC-AC1667EBCBE1}">
+              <a14:hiddenEffects xmlns:a14="http://schemas.microsoft.com/office/drawing/2010/main">
+                <a:effectLst>
+                  <a:outerShdw blurRad="177800" dist="63500" dir="5400000" algn="bl" rotWithShape="0">
+                    <a:srgbClr val="000000">
+                      <a:alpha val="50000"/>
+                    </a:srgbClr>
+                  </a:outerShdw>
+                </a:effectLst>
+              </a14:hiddenEffects>
+            </a:ext>
+          </a:extLst>
+        </p:spPr>
+        <p:txBody>
+          <a:bodyPr wrap="square" lIns="0" tIns="0" rIns="0" bIns="0" rtlCol="0" anchor="ctr">
+            <a:noAutofit/>
+          </a:bodyPr>
+          <a:lstStyle/>
+          <a:p>
+            <a:pPr marL="0" indent="0">
+              <a:spcAft>
+                <a:spcPts val="400"/>
+              </a:spcAft>
+              <a:buNone/>
+            </a:pPr>
+            <a:r>
+              <a:rPr lang="en-US" sz="1000" b="1" kern="0" spc="60" dirty="0">
+                <a:solidFill>
+                  <a:srgbClr val="5A6075"/>
+                </a:solidFill>
+                <a:latin typeface="Archivo" pitchFamily="34" charset="0"/>
+                <a:ea typeface="Archivo" pitchFamily="34" charset="-122"/>
+                <a:cs typeface="Archivo" pitchFamily="34" charset="-120"/>
+              </a:rPr>
+              <a:t>RESULTADO DO ACESSO</a:t>
+            </a:r>
+            <a:endParaRPr lang="en-US" sz="1000" dirty="0"/>
+          </a:p>
+          <a:p>
+            <a:pPr marL="0" indent="0">
+              <a:spcAft>
+                <a:spcPts val="400"/>
+              </a:spcAft>
+              <a:buNone/>
+            </a:pPr>
+            <a:r>
+              <a:rPr lang="en-US" sz="1600" b="1" dirty="0">
+                <a:solidFill>
+                  <a:srgbClr val="C42A1D"/>
+                </a:solidFill>
+                <a:latin typeface="Archivo" pitchFamily="34" charset="0"/>
+                <a:ea typeface="Archivo" pitchFamily="34" charset="-122"/>
+                <a:cs typeface="Archivo" pitchFamily="34" charset="-120"/>
+              </a:rPr>
+              <a:t>sem registro</a:t>
+            </a:r>
+            <a:endParaRPr lang="en-US" sz="1000" dirty="0"/>
           </a:p>
         </p:txBody>
       </p:sp>
@@ -18784,9 +19381,11 @@
       <p:sp>
         <p:nvSpPr>
           <p:cNvPr id="2" name="Text 1"/>
-          <p:cNvSpPr/>
+          <p:cNvSpPr>
+            <a:spLocks noGrp="1"/>
+          </p:cNvSpPr>
           <p:nvPr>
-            <p:ph idx="102" type="title" hasCustomPrompt="1"/>
+            <p:ph type="title" idx="102" hasCustomPrompt="1"/>
           </p:nvPr>
         </p:nvSpPr>
         <p:spPr>
@@ -18804,7 +19403,7 @@
           <a:bodyPr wrap="square" lIns="0" tIns="0" rIns="0" bIns="0" rtlCol="0" anchor="ctr"/>
           <a:lstStyle/>
           <a:p>
-            <a:pPr algn="l" indent="0" marL="0">
+            <a:pPr marL="0" indent="0" algn="l">
               <a:buNone/>
             </a:pPr>
             <a:r>
@@ -18818,9 +19417,6 @@
               </a:rPr>
               <a:t>03  </a:t>
             </a:r>
-            <a:pPr algn="l" indent="0" marL="0">
-              <a:buNone/>
-            </a:pPr>
             <a:r>
               <a:rPr lang="en-US" sz="3200" b="1" dirty="0">
                 <a:solidFill>
@@ -18857,7 +19453,7 @@
           <a:bodyPr wrap="square" lIns="0" tIns="0" rIns="0" bIns="0" rtlCol="0" anchor="t"/>
           <a:lstStyle/>
           <a:p>
-            <a:pPr indent="0" marL="0">
+            <a:pPr marL="0" indent="0">
               <a:buNone/>
             </a:pPr>
             <a:r>
@@ -18933,14 +19529,14 @@
       </p:sp>
       <p:pic>
         <p:nvPicPr>
-          <p:cNvPr id="6" name="Image 0" descr="C:/Users/49816471825/AppData/Local/Temp/lockmachine/deck/icones/shield-FF7A6F.png">    </p:cNvPr>
+          <p:cNvPr id="6" name="Image 0" descr="C:/Users/49816471825/AppData/Local/Temp/lockmachine/deck/icones/shield-FF7A6F.png"/>
           <p:cNvPicPr>
             <a:picLocks noChangeAspect="1"/>
           </p:cNvPicPr>
           <p:nvPr/>
         </p:nvPicPr>
         <p:blipFill>
-          <a:blip r:embed="rId1"/>
+          <a:blip r:embed="rId3"/>
           <a:stretch>
             <a:fillRect/>
           </a:stretch>
@@ -18976,7 +19572,7 @@
           <a:bodyPr wrap="square" lIns="0" tIns="0" rIns="0" bIns="0" rtlCol="0" anchor="ctr"/>
           <a:lstStyle/>
           <a:p>
-            <a:pPr indent="0" marL="0">
+            <a:pPr marL="0" indent="0">
               <a:buNone/>
             </a:pPr>
             <a:r>
@@ -19015,7 +19611,7 @@
           <a:bodyPr wrap="square" lIns="0" tIns="0" rIns="0" bIns="0" rtlCol="0" anchor="t"/>
           <a:lstStyle/>
           <a:p>
-            <a:pPr indent="0" marL="0">
+            <a:pPr marL="0" indent="0">
               <a:lnSpc>
                 <a:spcPct val="110000"/>
               </a:lnSpc>
@@ -19094,14 +19690,14 @@
       </p:sp>
       <p:pic>
         <p:nvPicPr>
-          <p:cNvPr id="11" name="Image 1" descr="C:/Users/49816471825/AppData/Local/Temp/lockmachine/deck/icones/history-8C9BFF.png">    </p:cNvPr>
+          <p:cNvPr id="11" name="Image 1" descr="C:/Users/49816471825/AppData/Local/Temp/lockmachine/deck/icones/history-8C9BFF.png"/>
           <p:cNvPicPr>
             <a:picLocks noChangeAspect="1"/>
           </p:cNvPicPr>
           <p:nvPr/>
         </p:nvPicPr>
         <p:blipFill>
-          <a:blip r:embed="rId2"/>
+          <a:blip r:embed="rId4"/>
           <a:stretch>
             <a:fillRect/>
           </a:stretch>
@@ -19137,7 +19733,7 @@
           <a:bodyPr wrap="square" lIns="0" tIns="0" rIns="0" bIns="0" rtlCol="0" anchor="ctr"/>
           <a:lstStyle/>
           <a:p>
-            <a:pPr indent="0" marL="0">
+            <a:pPr marL="0" indent="0">
               <a:buNone/>
             </a:pPr>
             <a:r>
@@ -19176,7 +19772,7 @@
           <a:bodyPr wrap="square" lIns="0" tIns="0" rIns="0" bIns="0" rtlCol="0" anchor="t"/>
           <a:lstStyle/>
           <a:p>
-            <a:pPr indent="0" marL="0">
+            <a:pPr marL="0" indent="0">
               <a:lnSpc>
                 <a:spcPct val="110000"/>
               </a:lnSpc>
@@ -19255,14 +19851,14 @@
       </p:sp>
       <p:pic>
         <p:nvPicPr>
-          <p:cNvPr id="16" name="Image 2" descr="C:/Users/49816471825/AppData/Local/Temp/lockmachine/deck/icones/check-22D07B.png">    </p:cNvPr>
+          <p:cNvPr id="16" name="Image 2" descr="C:/Users/49816471825/AppData/Local/Temp/lockmachine/deck/icones/check-22D07B.png"/>
           <p:cNvPicPr>
             <a:picLocks noChangeAspect="1"/>
           </p:cNvPicPr>
           <p:nvPr/>
         </p:nvPicPr>
         <p:blipFill>
-          <a:blip r:embed="rId3"/>
+          <a:blip r:embed="rId5"/>
           <a:stretch>
             <a:fillRect/>
           </a:stretch>
@@ -19298,7 +19894,7 @@
           <a:bodyPr wrap="square" lIns="0" tIns="0" rIns="0" bIns="0" rtlCol="0" anchor="ctr"/>
           <a:lstStyle/>
           <a:p>
-            <a:pPr indent="0" marL="0">
+            <a:pPr marL="0" indent="0">
               <a:buNone/>
             </a:pPr>
             <a:r>
@@ -19337,7 +19933,7 @@
           <a:bodyPr wrap="square" lIns="0" tIns="0" rIns="0" bIns="0" rtlCol="0" anchor="t"/>
           <a:lstStyle/>
           <a:p>
-            <a:pPr indent="0" marL="0">
+            <a:pPr marL="0" indent="0">
               <a:lnSpc>
                 <a:spcPct val="110000"/>
               </a:lnSpc>
@@ -19406,11 +20002,11 @@
           <a:bodyPr wrap="square" lIns="0" tIns="0" rIns="0" bIns="0" rtlCol="0" anchor="t"/>
           <a:lstStyle/>
           <a:p>
-            <a:pPr indent="0" marL="0">
-              <a:buNone/>
-            </a:pPr>
-            <a:r>
-              <a:rPr lang="en-US" sz="1000" b="1" spc="120" kern="0" dirty="0">
+            <a:pPr marL="0" indent="0">
+              <a:buNone/>
+            </a:pPr>
+            <a:r>
+              <a:rPr lang="en-US" sz="1000" b="1" kern="0" spc="120" dirty="0">
                 <a:solidFill>
                   <a:srgbClr val="7D849C"/>
                 </a:solidFill>
@@ -19455,14 +20051,14 @@
       </p:sp>
       <p:pic>
         <p:nvPicPr>
-          <p:cNvPr id="22" name="Image 3" descr="C:/Users/49816471825/AppData/Local/Temp/lockmachine/deck/icones/check-63E6A6.png">    </p:cNvPr>
+          <p:cNvPr id="22" name="Image 3" descr="C:/Users/49816471825/AppData/Local/Temp/lockmachine/deck/icones/check-63E6A6.png"/>
           <p:cNvPicPr>
             <a:picLocks noChangeAspect="1"/>
           </p:cNvPicPr>
           <p:nvPr/>
         </p:nvPicPr>
         <p:blipFill>
-          <a:blip r:embed="rId4"/>
+          <a:blip r:embed="rId6"/>
           <a:stretch>
             <a:fillRect/>
           </a:stretch>
@@ -19498,7 +20094,7 @@
           <a:bodyPr wrap="square" lIns="0" tIns="0" rIns="0" bIns="0" rtlCol="0" anchor="ctr"/>
           <a:lstStyle/>
           <a:p>
-            <a:pPr indent="0" marL="0">
+            <a:pPr marL="0" indent="0">
               <a:buNone/>
             </a:pPr>
             <a:r>
@@ -19547,14 +20143,14 @@
       </p:sp>
       <p:pic>
         <p:nvPicPr>
-          <p:cNvPr id="25" name="Image 4" descr="C:/Users/49816471825/AppData/Local/Temp/lockmachine/deck/icones/check-63E6A6.png">    </p:cNvPr>
+          <p:cNvPr id="25" name="Image 4" descr="C:/Users/49816471825/AppData/Local/Temp/lockmachine/deck/icones/check-63E6A6.png"/>
           <p:cNvPicPr>
             <a:picLocks noChangeAspect="1"/>
           </p:cNvPicPr>
           <p:nvPr/>
         </p:nvPicPr>
         <p:blipFill>
-          <a:blip r:embed="rId5"/>
+          <a:blip r:embed="rId6"/>
           <a:stretch>
             <a:fillRect/>
           </a:stretch>
@@ -19590,7 +20186,7 @@
           <a:bodyPr wrap="square" lIns="0" tIns="0" rIns="0" bIns="0" rtlCol="0" anchor="ctr"/>
           <a:lstStyle/>
           <a:p>
-            <a:pPr indent="0" marL="0">
+            <a:pPr marL="0" indent="0">
               <a:buNone/>
             </a:pPr>
             <a:r>
@@ -19639,7 +20235,7 @@
       </p:sp>
       <p:pic>
         <p:nvPicPr>
-          <p:cNvPr id="28" name="Image 5" descr="C:/Users/49816471825/AppData/Local/Temp/lockmachine/deck/icones/check-63E6A6.png">    </p:cNvPr>
+          <p:cNvPr id="28" name="Image 5" descr="C:/Users/49816471825/AppData/Local/Temp/lockmachine/deck/icones/check-63E6A6.png"/>
           <p:cNvPicPr>
             <a:picLocks noChangeAspect="1"/>
           </p:cNvPicPr>
@@ -19682,7 +20278,7 @@
           <a:bodyPr wrap="square" lIns="0" tIns="0" rIns="0" bIns="0" rtlCol="0" anchor="ctr"/>
           <a:lstStyle/>
           <a:p>
-            <a:pPr indent="0" marL="0">
+            <a:pPr marL="0" indent="0">
               <a:buNone/>
             </a:pPr>
             <a:r>
@@ -19763,7 +20359,7 @@
           <a:bodyPr wrap="square" lIns="0" tIns="0" rIns="0" bIns="0" rtlCol="0" anchor="ctr"/>
           <a:lstStyle/>
           <a:p>
-            <a:pPr indent="0" marL="0">
+            <a:pPr marL="0" indent="0">
               <a:buNone/>
             </a:pPr>
             <a:r>
@@ -19783,7 +20379,7 @@
       </p:sp>
       <p:sp>
         <p:nvSpPr>
-          <p:cNvPr id="25" name="Slide Number Placeholder 0"/>
+          <p:cNvPr id="33" name="Slide Number Placeholder 0"/>
           <p:cNvSpPr>
             <a:spLocks noGrp="1"/>
           </p:cNvSpPr>
@@ -19801,7 +20397,7 @@
           </a:prstGeom>
           <a:extLst>
             <a:ext uri="{C572A759-6A51-4108-AA02-DFA0A04FC94B}">
-              <ma14:wrappingTextBoxFlag xmlns:ma14="http://schemas.microsoft.com/office/mac/drawingml/2011/main" val="0"/>
+              <ma14:wrappingTextBoxFlag xmlns="" xmlns:ma14="http://schemas.microsoft.com/office/mac/drawingml/2011/main" val="0"/>
             </a:ext>
           </a:extLst>
         </p:spPr>
@@ -19822,7 +20418,7 @@
           <a:p>
             <a:pPr algn="r"/>
             <a:fld id="{F7021451-1387-4CA6-816F-3879F97B5CBC}" type="slidenum">
-              <a:rPr b="0" lang="en-US"/>
+              <a:rPr lang="en-US" b="0"/>
               <a:t>4</a:t>
             </a:fld>
             <a:endParaRPr lang="en-US"/>
@@ -19857,9 +20453,11 @@
       <p:sp>
         <p:nvSpPr>
           <p:cNvPr id="2" name="Text 1"/>
-          <p:cNvSpPr/>
+          <p:cNvSpPr>
+            <a:spLocks noGrp="1"/>
+          </p:cNvSpPr>
           <p:nvPr>
-            <p:ph idx="102" type="title" hasCustomPrompt="1"/>
+            <p:ph type="title" idx="102" hasCustomPrompt="1"/>
           </p:nvPr>
         </p:nvSpPr>
         <p:spPr>
@@ -19877,7 +20475,7 @@
           <a:bodyPr wrap="square" lIns="0" tIns="0" rIns="0" bIns="0" rtlCol="0" anchor="ctr"/>
           <a:lstStyle/>
           <a:p>
-            <a:pPr algn="l" indent="0" marL="0">
+            <a:pPr marL="0" indent="0" algn="l">
               <a:buNone/>
             </a:pPr>
             <a:r>
@@ -19891,9 +20489,6 @@
               </a:rPr>
               <a:t>04  </a:t>
             </a:r>
-            <a:pPr algn="l" indent="0" marL="0">
-              <a:buNone/>
-            </a:pPr>
             <a:r>
               <a:rPr lang="en-US" sz="3200" b="1" dirty="0">
                 <a:solidFill>
@@ -19957,11 +20552,11 @@
           <a:bodyPr wrap="square" lIns="0" tIns="0" rIns="0" bIns="0" rtlCol="0" anchor="t"/>
           <a:lstStyle/>
           <a:p>
-            <a:pPr indent="0" marL="0">
-              <a:buNone/>
-            </a:pPr>
-            <a:r>
-              <a:rPr lang="en-US" sz="1000" b="1" spc="120" kern="0" dirty="0">
+            <a:pPr marL="0" indent="0">
+              <a:buNone/>
+            </a:pPr>
+            <a:r>
+              <a:rPr lang="en-US" sz="1000" b="1" kern="0" spc="120" dirty="0">
                 <a:solidFill>
                   <a:srgbClr val="FFD23F"/>
                 </a:solidFill>
@@ -19996,7 +20591,7 @@
           <a:bodyPr wrap="square" lIns="0" tIns="0" rIns="0" bIns="0" rtlCol="0" anchor="t"/>
           <a:lstStyle/>
           <a:p>
-            <a:pPr indent="0" marL="0">
+            <a:pPr marL="0" indent="0">
               <a:lnSpc>
                 <a:spcPct val="105000"/>
               </a:lnSpc>
@@ -20038,11 +20633,11 @@
           <a:bodyPr wrap="square" lIns="0" tIns="0" rIns="0" bIns="0" rtlCol="0" anchor="t"/>
           <a:lstStyle/>
           <a:p>
-            <a:pPr indent="0" marL="0">
-              <a:buNone/>
-            </a:pPr>
-            <a:r>
-              <a:rPr lang="en-US" sz="1000" b="1" spc="120" kern="0" dirty="0">
+            <a:pPr marL="0" indent="0">
+              <a:buNone/>
+            </a:pPr>
+            <a:r>
+              <a:rPr lang="en-US" sz="1000" b="1" kern="0" spc="120" dirty="0">
                 <a:solidFill>
                   <a:srgbClr val="7D849C"/>
                 </a:solidFill>
@@ -20104,7 +20699,7 @@
           <a:bodyPr wrap="square" lIns="0" tIns="0" rIns="0" bIns="0" rtlCol="0" anchor="ctr"/>
           <a:lstStyle/>
           <a:p>
-            <a:pPr indent="0" marL="0">
+            <a:pPr marL="0" indent="0">
               <a:buNone/>
             </a:pPr>
             <a:r>
@@ -20143,7 +20738,7 @@
           <a:bodyPr wrap="square" lIns="0" tIns="0" rIns="0" bIns="0" rtlCol="0" anchor="ctr"/>
           <a:lstStyle/>
           <a:p>
-            <a:pPr indent="0" marL="0">
+            <a:pPr marL="0" indent="0">
               <a:buNone/>
             </a:pPr>
             <a:r>
@@ -20194,7 +20789,7 @@
           <a:bodyPr wrap="square" lIns="0" tIns="0" rIns="0" bIns="0" rtlCol="0" anchor="ctr"/>
           <a:lstStyle/>
           <a:p>
-            <a:pPr algn="ctr" indent="0" marL="0">
+            <a:pPr marL="0" indent="0" algn="ctr">
               <a:buNone/>
             </a:pPr>
             <a:r>
@@ -20260,7 +20855,7 @@
           <a:bodyPr wrap="square" lIns="0" tIns="0" rIns="0" bIns="0" rtlCol="0" anchor="ctr"/>
           <a:lstStyle/>
           <a:p>
-            <a:pPr indent="0" marL="0">
+            <a:pPr marL="0" indent="0">
               <a:buNone/>
             </a:pPr>
             <a:r>
@@ -20299,7 +20894,7 @@
           <a:bodyPr wrap="square" lIns="0" tIns="0" rIns="0" bIns="0" rtlCol="0" anchor="ctr"/>
           <a:lstStyle/>
           <a:p>
-            <a:pPr indent="0" marL="0">
+            <a:pPr marL="0" indent="0">
               <a:buNone/>
             </a:pPr>
             <a:r>
@@ -20350,7 +20945,7 @@
           <a:bodyPr wrap="square" lIns="0" tIns="0" rIns="0" bIns="0" rtlCol="0" anchor="ctr"/>
           <a:lstStyle/>
           <a:p>
-            <a:pPr algn="ctr" indent="0" marL="0">
+            <a:pPr marL="0" indent="0" algn="ctr">
               <a:buNone/>
             </a:pPr>
             <a:r>
@@ -20416,7 +21011,7 @@
           <a:bodyPr wrap="square" lIns="0" tIns="0" rIns="0" bIns="0" rtlCol="0" anchor="ctr"/>
           <a:lstStyle/>
           <a:p>
-            <a:pPr indent="0" marL="0">
+            <a:pPr marL="0" indent="0">
               <a:buNone/>
             </a:pPr>
             <a:r>
@@ -20455,7 +21050,7 @@
           <a:bodyPr wrap="square" lIns="0" tIns="0" rIns="0" bIns="0" rtlCol="0" anchor="ctr"/>
           <a:lstStyle/>
           <a:p>
-            <a:pPr indent="0" marL="0">
+            <a:pPr marL="0" indent="0">
               <a:buNone/>
             </a:pPr>
             <a:r>
@@ -20506,7 +21101,7 @@
           <a:bodyPr wrap="square" lIns="0" tIns="0" rIns="0" bIns="0" rtlCol="0" anchor="ctr"/>
           <a:lstStyle/>
           <a:p>
-            <a:pPr algn="ctr" indent="0" marL="0">
+            <a:pPr marL="0" indent="0" algn="ctr">
               <a:buNone/>
             </a:pPr>
             <a:r>
@@ -20572,7 +21167,7 @@
           <a:bodyPr wrap="square" lIns="0" tIns="0" rIns="0" bIns="0" rtlCol="0" anchor="ctr"/>
           <a:lstStyle/>
           <a:p>
-            <a:pPr indent="0" marL="0">
+            <a:pPr marL="0" indent="0">
               <a:buNone/>
             </a:pPr>
             <a:r>
@@ -20611,7 +21206,7 @@
           <a:bodyPr wrap="square" lIns="0" tIns="0" rIns="0" bIns="0" rtlCol="0" anchor="ctr"/>
           <a:lstStyle/>
           <a:p>
-            <a:pPr indent="0" marL="0">
+            <a:pPr marL="0" indent="0">
               <a:buNone/>
             </a:pPr>
             <a:r>
@@ -20662,7 +21257,7 @@
           <a:bodyPr wrap="square" lIns="0" tIns="0" rIns="0" bIns="0" rtlCol="0" anchor="ctr"/>
           <a:lstStyle/>
           <a:p>
-            <a:pPr algn="ctr" indent="0" marL="0">
+            <a:pPr marL="0" indent="0" algn="ctr">
               <a:buNone/>
             </a:pPr>
             <a:r>
@@ -20728,7 +21323,7 @@
           <a:bodyPr wrap="square" lIns="0" tIns="0" rIns="0" bIns="0" rtlCol="0" anchor="ctr"/>
           <a:lstStyle/>
           <a:p>
-            <a:pPr indent="0" marL="0">
+            <a:pPr marL="0" indent="0">
               <a:buNone/>
             </a:pPr>
             <a:r>
@@ -20767,7 +21362,7 @@
           <a:bodyPr wrap="square" lIns="0" tIns="0" rIns="0" bIns="0" rtlCol="0" anchor="ctr"/>
           <a:lstStyle/>
           <a:p>
-            <a:pPr indent="0" marL="0">
+            <a:pPr marL="0" indent="0">
               <a:buNone/>
             </a:pPr>
             <a:r>
@@ -20818,7 +21413,7 @@
           <a:bodyPr wrap="square" lIns="0" tIns="0" rIns="0" bIns="0" rtlCol="0" anchor="ctr"/>
           <a:lstStyle/>
           <a:p>
-            <a:pPr algn="ctr" indent="0" marL="0">
+            <a:pPr marL="0" indent="0" algn="ctr">
               <a:buNone/>
             </a:pPr>
             <a:r>
@@ -20838,7 +21433,7 @@
       </p:sp>
       <p:sp>
         <p:nvSpPr>
-          <p:cNvPr id="25" name="Slide Number Placeholder 0"/>
+          <p:cNvPr id="27" name="Slide Number Placeholder 0"/>
           <p:cNvSpPr>
             <a:spLocks noGrp="1"/>
           </p:cNvSpPr>
@@ -20856,7 +21451,7 @@
           </a:prstGeom>
           <a:extLst>
             <a:ext uri="{C572A759-6A51-4108-AA02-DFA0A04FC94B}">
-              <ma14:wrappingTextBoxFlag xmlns:ma14="http://schemas.microsoft.com/office/mac/drawingml/2011/main" val="0"/>
+              <ma14:wrappingTextBoxFlag xmlns="" xmlns:ma14="http://schemas.microsoft.com/office/mac/drawingml/2011/main" val="0"/>
             </a:ext>
           </a:extLst>
         </p:spPr>
@@ -20877,7 +21472,7 @@
           <a:p>
             <a:pPr algn="r"/>
             <a:fld id="{F7021451-1387-4CA6-816F-3879F97B5CBC}" type="slidenum">
-              <a:rPr b="0" lang="en-US"/>
+              <a:rPr lang="en-US" b="0"/>
               <a:t>5</a:t>
             </a:fld>
             <a:endParaRPr lang="en-US"/>
@@ -20912,9 +21507,11 @@
       <p:sp>
         <p:nvSpPr>
           <p:cNvPr id="2" name="Text 1"/>
-          <p:cNvSpPr/>
+          <p:cNvSpPr>
+            <a:spLocks noGrp="1"/>
+          </p:cNvSpPr>
           <p:nvPr>
-            <p:ph idx="102" type="title" hasCustomPrompt="1"/>
+            <p:ph type="title" idx="102" hasCustomPrompt="1"/>
           </p:nvPr>
         </p:nvSpPr>
         <p:spPr>
@@ -20932,7 +21529,7 @@
           <a:bodyPr wrap="square" lIns="0" tIns="0" rIns="0" bIns="0" rtlCol="0" anchor="ctr"/>
           <a:lstStyle/>
           <a:p>
-            <a:pPr algn="l" indent="0" marL="0">
+            <a:pPr marL="0" indent="0" algn="l">
               <a:buNone/>
             </a:pPr>
             <a:r>
@@ -20946,9 +21543,6 @@
               </a:rPr>
               <a:t>05  </a:t>
             </a:r>
-            <a:pPr algn="l" indent="0" marL="0">
-              <a:buNone/>
-            </a:pPr>
             <a:r>
               <a:rPr lang="en-US" sz="3200" b="1" dirty="0">
                 <a:solidFill>
@@ -20985,7 +21579,7 @@
           <a:bodyPr wrap="square" lIns="0" tIns="0" rIns="0" bIns="0" rtlCol="0" anchor="t"/>
           <a:lstStyle/>
           <a:p>
-            <a:pPr indent="0" marL="0">
+            <a:pPr marL="0" indent="0">
               <a:buNone/>
             </a:pPr>
             <a:r>
@@ -21061,14 +21655,14 @@
       </p:sp>
       <p:pic>
         <p:nvPicPr>
-          <p:cNvPr id="6" name="Image 0" descr="C:/Users/49816471825/AppData/Local/Temp/lockmachine/deck/icones/users-8C9BFF.png">    </p:cNvPr>
+          <p:cNvPr id="6" name="Image 0" descr="C:/Users/49816471825/AppData/Local/Temp/lockmachine/deck/icones/users-8C9BFF.png"/>
           <p:cNvPicPr>
             <a:picLocks noChangeAspect="1"/>
           </p:cNvPicPr>
           <p:nvPr/>
         </p:nvPicPr>
         <p:blipFill>
-          <a:blip r:embed="rId1"/>
+          <a:blip r:embed="rId3"/>
           <a:stretch>
             <a:fillRect/>
           </a:stretch>
@@ -21104,7 +21698,7 @@
           <a:bodyPr wrap="square" lIns="0" tIns="0" rIns="0" bIns="0" rtlCol="0" anchor="t"/>
           <a:lstStyle/>
           <a:p>
-            <a:pPr indent="0" marL="0">
+            <a:pPr marL="0" indent="0">
               <a:buNone/>
             </a:pPr>
             <a:r>
@@ -21121,7 +21715,7 @@
             <a:endParaRPr lang="en-US" sz="1400" dirty="0"/>
           </a:p>
           <a:p>
-            <a:pPr indent="0" marL="0">
+            <a:pPr marL="0" indent="0">
               <a:buNone/>
             </a:pPr>
             <a:r>
@@ -21282,14 +21876,14 @@
       </p:sp>
       <p:pic>
         <p:nvPicPr>
-          <p:cNvPr id="11" name="Image 1" descr="C:/Users/49816471825/AppData/Local/Temp/lockmachine/deck/icones/user-22D07B.png">    </p:cNvPr>
+          <p:cNvPr id="11" name="Image 1" descr="C:/Users/49816471825/AppData/Local/Temp/lockmachine/deck/icones/user-22D07B.png"/>
           <p:cNvPicPr>
             <a:picLocks noChangeAspect="1"/>
           </p:cNvPicPr>
           <p:nvPr/>
         </p:nvPicPr>
         <p:blipFill>
-          <a:blip r:embed="rId2"/>
+          <a:blip r:embed="rId4"/>
           <a:stretch>
             <a:fillRect/>
           </a:stretch>
@@ -21325,7 +21919,7 @@
           <a:bodyPr wrap="square" lIns="0" tIns="0" rIns="0" bIns="0" rtlCol="0" anchor="t"/>
           <a:lstStyle/>
           <a:p>
-            <a:pPr indent="0" marL="0">
+            <a:pPr marL="0" indent="0">
               <a:buNone/>
             </a:pPr>
             <a:r>
@@ -21342,7 +21936,7 @@
             <a:endParaRPr lang="en-US" sz="1400" dirty="0"/>
           </a:p>
           <a:p>
-            <a:pPr indent="0" marL="0">
+            <a:pPr marL="0" indent="0">
               <a:buNone/>
             </a:pPr>
             <a:r>
@@ -21503,14 +22097,14 @@
       </p:sp>
       <p:pic>
         <p:nvPicPr>
-          <p:cNvPr id="16" name="Image 2" descr="C:/Users/49816471825/AppData/Local/Temp/lockmachine/deck/icones/chip-FFD23F.png">    </p:cNvPr>
+          <p:cNvPr id="16" name="Image 2" descr="C:/Users/49816471825/AppData/Local/Temp/lockmachine/deck/icones/chip-FFD23F.png"/>
           <p:cNvPicPr>
             <a:picLocks noChangeAspect="1"/>
           </p:cNvPicPr>
           <p:nvPr/>
         </p:nvPicPr>
         <p:blipFill>
-          <a:blip r:embed="rId3"/>
+          <a:blip r:embed="rId5"/>
           <a:stretch>
             <a:fillRect/>
           </a:stretch>
@@ -21546,7 +22140,7 @@
           <a:bodyPr wrap="square" lIns="0" tIns="0" rIns="0" bIns="0" rtlCol="0" anchor="t"/>
           <a:lstStyle/>
           <a:p>
-            <a:pPr indent="0" marL="0">
+            <a:pPr marL="0" indent="0">
               <a:buNone/>
             </a:pPr>
             <a:r>
@@ -21563,7 +22157,7 @@
             <a:endParaRPr lang="en-US" sz="1400" dirty="0"/>
           </a:p>
           <a:p>
-            <a:pPr indent="0" marL="0">
+            <a:pPr marL="0" indent="0">
               <a:buNone/>
             </a:pPr>
             <a:r>
@@ -21714,7 +22308,7 @@
           <a:bodyPr wrap="square" lIns="0" tIns="0" rIns="0" bIns="0" rtlCol="0" anchor="ctr"/>
           <a:lstStyle/>
           <a:p>
-            <a:pPr indent="0" marL="0">
+            <a:pPr marL="0" indent="0">
               <a:buNone/>
             </a:pPr>
             <a:r>
@@ -21753,7 +22347,7 @@
           <a:bodyPr wrap="square" lIns="0" tIns="0" rIns="0" bIns="0" rtlCol="0" anchor="ctr"/>
           <a:lstStyle/>
           <a:p>
-            <a:pPr indent="0" marL="0">
+            <a:pPr marL="0" indent="0">
               <a:buNone/>
             </a:pPr>
             <a:r>
@@ -21819,7 +22413,7 @@
           <a:bodyPr wrap="square" lIns="0" tIns="0" rIns="0" bIns="0" rtlCol="0" anchor="ctr"/>
           <a:lstStyle/>
           <a:p>
-            <a:pPr indent="0" marL="0">
+            <a:pPr marL="0" indent="0">
               <a:buNone/>
             </a:pPr>
             <a:r>
@@ -21858,7 +22452,7 @@
           <a:bodyPr wrap="square" lIns="0" tIns="0" rIns="0" bIns="0" rtlCol="0" anchor="ctr"/>
           <a:lstStyle/>
           <a:p>
-            <a:pPr indent="0" marL="0">
+            <a:pPr marL="0" indent="0">
               <a:buNone/>
             </a:pPr>
             <a:r>
@@ -21924,7 +22518,7 @@
           <a:bodyPr wrap="square" lIns="0" tIns="0" rIns="0" bIns="0" rtlCol="0" anchor="ctr"/>
           <a:lstStyle/>
           <a:p>
-            <a:pPr indent="0" marL="0">
+            <a:pPr marL="0" indent="0">
               <a:buNone/>
             </a:pPr>
             <a:r>
@@ -21938,9 +22532,6 @@
               </a:rPr>
               <a:t>Essenciais: </a:t>
             </a:r>
-            <a:pPr indent="0" marL="0">
-              <a:buNone/>
-            </a:pPr>
             <a:r>
               <a:rPr lang="en-US" sz="1300" dirty="0">
                 <a:solidFill>
@@ -21958,7 +22549,7 @@
       </p:sp>
       <p:sp>
         <p:nvSpPr>
-          <p:cNvPr id="25" name="Slide Number Placeholder 0"/>
+          <p:cNvPr id="27" name="Slide Number Placeholder 0"/>
           <p:cNvSpPr>
             <a:spLocks noGrp="1"/>
           </p:cNvSpPr>
@@ -21976,7 +22567,7 @@
           </a:prstGeom>
           <a:extLst>
             <a:ext uri="{C572A759-6A51-4108-AA02-DFA0A04FC94B}">
-              <ma14:wrappingTextBoxFlag xmlns:ma14="http://schemas.microsoft.com/office/mac/drawingml/2011/main" val="0"/>
+              <ma14:wrappingTextBoxFlag xmlns="" xmlns:ma14="http://schemas.microsoft.com/office/mac/drawingml/2011/main" val="0"/>
             </a:ext>
           </a:extLst>
         </p:spPr>
@@ -21997,7 +22588,7 @@
           <a:p>
             <a:pPr algn="r"/>
             <a:fld id="{F7021451-1387-4CA6-816F-3879F97B5CBC}" type="slidenum">
-              <a:rPr b="0" lang="en-US"/>
+              <a:rPr lang="en-US" b="0"/>
               <a:t>6</a:t>
             </a:fld>
             <a:endParaRPr lang="en-US"/>
@@ -22032,9 +22623,11 @@
       <p:sp>
         <p:nvSpPr>
           <p:cNvPr id="2" name="Text 1"/>
-          <p:cNvSpPr/>
+          <p:cNvSpPr>
+            <a:spLocks noGrp="1"/>
+          </p:cNvSpPr>
           <p:nvPr>
-            <p:ph idx="102" type="title" hasCustomPrompt="1"/>
+            <p:ph type="title" idx="102" hasCustomPrompt="1"/>
           </p:nvPr>
         </p:nvSpPr>
         <p:spPr>
@@ -22052,7 +22645,7 @@
           <a:bodyPr wrap="square" lIns="0" tIns="0" rIns="0" bIns="0" rtlCol="0" anchor="ctr"/>
           <a:lstStyle/>
           <a:p>
-            <a:pPr algn="l" indent="0" marL="0">
+            <a:pPr marL="0" indent="0" algn="l">
               <a:buNone/>
             </a:pPr>
             <a:r>
@@ -22066,9 +22659,6 @@
               </a:rPr>
               <a:t>06  </a:t>
             </a:r>
-            <a:pPr algn="l" indent="0" marL="0">
-              <a:buNone/>
-            </a:pPr>
             <a:r>
               <a:rPr lang="en-US" sz="3200" b="1" dirty="0">
                 <a:solidFill>
@@ -22105,7 +22695,7 @@
           <a:bodyPr wrap="square" lIns="0" tIns="0" rIns="0" bIns="0" rtlCol="0" anchor="t"/>
           <a:lstStyle/>
           <a:p>
-            <a:pPr indent="0" marL="0">
+            <a:pPr marL="0" indent="0">
               <a:buNone/>
             </a:pPr>
             <a:r>
@@ -22169,7 +22759,7 @@
           <a:bodyPr wrap="square" lIns="0" tIns="0" rIns="0" bIns="0" rtlCol="0" anchor="ctr"/>
           <a:lstStyle/>
           <a:p>
-            <a:pPr algn="ctr" indent="0" marL="0">
+            <a:pPr marL="0" indent="0" algn="ctr">
               <a:buNone/>
             </a:pPr>
             <a:r>
@@ -22208,7 +22798,7 @@
           <a:bodyPr wrap="square" lIns="0" tIns="0" rIns="0" bIns="0" rtlCol="0" anchor="t"/>
           <a:lstStyle/>
           <a:p>
-            <a:pPr algn="ctr" indent="0" marL="0">
+            <a:pPr marL="0" indent="0" algn="ctr">
               <a:buNone/>
             </a:pPr>
             <a:r>
@@ -22247,7 +22837,7 @@
           <a:bodyPr wrap="square" lIns="0" tIns="0" rIns="0" bIns="0" rtlCol="0" anchor="t"/>
           <a:lstStyle/>
           <a:p>
-            <a:pPr algn="ctr" indent="0" marL="0">
+            <a:pPr marL="0" indent="0" algn="ctr">
               <a:buNone/>
             </a:pPr>
             <a:r>
@@ -22288,7 +22878,7 @@
           <a:bodyPr wrap="square" lIns="0" tIns="0" rIns="0" bIns="0" rtlCol="0" anchor="ctr"/>
           <a:lstStyle/>
           <a:p>
-            <a:pPr algn="ctr" indent="0" marL="0">
+            <a:pPr marL="0" indent="0" algn="ctr">
               <a:buNone/>
             </a:pPr>
             <a:r>
@@ -22327,7 +22917,7 @@
           <a:bodyPr wrap="square" lIns="0" tIns="0" rIns="0" bIns="0" rtlCol="0" anchor="t"/>
           <a:lstStyle/>
           <a:p>
-            <a:pPr algn="ctr" indent="0" marL="0">
+            <a:pPr marL="0" indent="0" algn="ctr">
               <a:buNone/>
             </a:pPr>
             <a:r>
@@ -22366,7 +22956,7 @@
           <a:bodyPr wrap="square" lIns="0" tIns="0" rIns="0" bIns="0" rtlCol="0" anchor="t"/>
           <a:lstStyle/>
           <a:p>
-            <a:pPr algn="ctr" indent="0" marL="0">
+            <a:pPr marL="0" indent="0" algn="ctr">
               <a:buNone/>
             </a:pPr>
             <a:r>
@@ -22407,7 +22997,7 @@
           <a:bodyPr wrap="square" lIns="0" tIns="0" rIns="0" bIns="0" rtlCol="0" anchor="ctr"/>
           <a:lstStyle/>
           <a:p>
-            <a:pPr algn="ctr" indent="0" marL="0">
+            <a:pPr marL="0" indent="0" algn="ctr">
               <a:buNone/>
             </a:pPr>
             <a:r>
@@ -22446,7 +23036,7 @@
           <a:bodyPr wrap="square" lIns="0" tIns="0" rIns="0" bIns="0" rtlCol="0" anchor="t"/>
           <a:lstStyle/>
           <a:p>
-            <a:pPr algn="ctr" indent="0" marL="0">
+            <a:pPr marL="0" indent="0" algn="ctr">
               <a:buNone/>
             </a:pPr>
             <a:r>
@@ -22485,7 +23075,7 @@
           <a:bodyPr wrap="square" lIns="0" tIns="0" rIns="0" bIns="0" rtlCol="0" anchor="t"/>
           <a:lstStyle/>
           <a:p>
-            <a:pPr algn="ctr" indent="0" marL="0">
+            <a:pPr marL="0" indent="0" algn="ctr">
               <a:buNone/>
             </a:pPr>
             <a:r>
@@ -22526,7 +23116,7 @@
           <a:bodyPr wrap="square" lIns="0" tIns="0" rIns="0" bIns="0" rtlCol="0" anchor="ctr"/>
           <a:lstStyle/>
           <a:p>
-            <a:pPr algn="ctr" indent="0" marL="0">
+            <a:pPr marL="0" indent="0" algn="ctr">
               <a:buNone/>
             </a:pPr>
             <a:r>
@@ -22565,7 +23155,7 @@
           <a:bodyPr wrap="square" lIns="0" tIns="0" rIns="0" bIns="0" rtlCol="0" anchor="t"/>
           <a:lstStyle/>
           <a:p>
-            <a:pPr algn="ctr" indent="0" marL="0">
+            <a:pPr marL="0" indent="0" algn="ctr">
               <a:buNone/>
             </a:pPr>
             <a:r>
@@ -22604,7 +23194,7 @@
           <a:bodyPr wrap="square" lIns="0" tIns="0" rIns="0" bIns="0" rtlCol="0" anchor="t"/>
           <a:lstStyle/>
           <a:p>
-            <a:pPr algn="ctr" indent="0" marL="0">
+            <a:pPr marL="0" indent="0" algn="ctr">
               <a:buNone/>
             </a:pPr>
             <a:r>
@@ -22645,7 +23235,7 @@
           <a:bodyPr wrap="square" lIns="0" tIns="0" rIns="0" bIns="0" rtlCol="0" anchor="ctr"/>
           <a:lstStyle/>
           <a:p>
-            <a:pPr algn="ctr" indent="0" marL="0">
+            <a:pPr marL="0" indent="0" algn="ctr">
               <a:buNone/>
             </a:pPr>
             <a:r>
@@ -22684,7 +23274,7 @@
           <a:bodyPr wrap="square" lIns="0" tIns="0" rIns="0" bIns="0" rtlCol="0" anchor="t"/>
           <a:lstStyle/>
           <a:p>
-            <a:pPr algn="ctr" indent="0" marL="0">
+            <a:pPr marL="0" indent="0" algn="ctr">
               <a:buNone/>
             </a:pPr>
             <a:r>
@@ -22723,7 +23313,7 @@
           <a:bodyPr wrap="square" lIns="0" tIns="0" rIns="0" bIns="0" rtlCol="0" anchor="t"/>
           <a:lstStyle/>
           <a:p>
-            <a:pPr algn="ctr" indent="0" marL="0">
+            <a:pPr marL="0" indent="0" algn="ctr">
               <a:buNone/>
             </a:pPr>
             <a:r>
@@ -22764,7 +23354,7 @@
           <a:bodyPr wrap="square" lIns="0" tIns="0" rIns="0" bIns="0" rtlCol="0" anchor="ctr"/>
           <a:lstStyle/>
           <a:p>
-            <a:pPr algn="ctr" indent="0" marL="0">
+            <a:pPr marL="0" indent="0" algn="ctr">
               <a:buNone/>
             </a:pPr>
             <a:r>
@@ -22803,7 +23393,7 @@
           <a:bodyPr wrap="square" lIns="0" tIns="0" rIns="0" bIns="0" rtlCol="0" anchor="t"/>
           <a:lstStyle/>
           <a:p>
-            <a:pPr algn="ctr" indent="0" marL="0">
+            <a:pPr marL="0" indent="0" algn="ctr">
               <a:buNone/>
             </a:pPr>
             <a:r>
@@ -22842,7 +23432,7 @@
           <a:bodyPr wrap="square" lIns="0" tIns="0" rIns="0" bIns="0" rtlCol="0" anchor="t"/>
           <a:lstStyle/>
           <a:p>
-            <a:pPr algn="ctr" indent="0" marL="0">
+            <a:pPr marL="0" indent="0" algn="ctr">
               <a:buNone/>
             </a:pPr>
             <a:r>
@@ -22923,7 +23513,7 @@
           <a:bodyPr wrap="square" lIns="0" tIns="0" rIns="0" bIns="0" rtlCol="0" anchor="ctr"/>
           <a:lstStyle/>
           <a:p>
-            <a:pPr indent="0" marL="0">
+            <a:pPr marL="0" indent="0">
               <a:buNone/>
             </a:pPr>
             <a:r>
@@ -23004,7 +23594,7 @@
           <a:bodyPr wrap="square" lIns="0" tIns="0" rIns="0" bIns="0" rtlCol="0" anchor="ctr"/>
           <a:lstStyle/>
           <a:p>
-            <a:pPr indent="0" marL="0">
+            <a:pPr marL="0" indent="0">
               <a:buNone/>
             </a:pPr>
             <a:r>
@@ -23085,7 +23675,7 @@
           <a:bodyPr wrap="square" lIns="0" tIns="0" rIns="0" bIns="0" rtlCol="0" anchor="ctr"/>
           <a:lstStyle/>
           <a:p>
-            <a:pPr indent="0" marL="0">
+            <a:pPr marL="0" indent="0">
               <a:buNone/>
             </a:pPr>
             <a:r>
@@ -23153,7 +23743,7 @@
           <a:bodyPr wrap="square" lIns="0" tIns="0" rIns="0" bIns="0" rtlCol="0" anchor="ctr"/>
           <a:lstStyle/>
           <a:p>
-            <a:pPr algn="ctr" indent="0" marL="0">
+            <a:pPr marL="0" indent="0" algn="ctr">
               <a:buNone/>
             </a:pPr>
             <a:r>
@@ -23192,7 +23782,7 @@
           <a:bodyPr wrap="square" lIns="0" tIns="0" rIns="0" bIns="0" rtlCol="0" anchor="t"/>
           <a:lstStyle/>
           <a:p>
-            <a:pPr indent="0" marL="0">
+            <a:pPr marL="0" indent="0">
               <a:buNone/>
             </a:pPr>
             <a:r>
@@ -23231,7 +23821,7 @@
           <a:bodyPr wrap="square" lIns="0" tIns="0" rIns="0" bIns="0" rtlCol="0" anchor="t"/>
           <a:lstStyle/>
           <a:p>
-            <a:pPr indent="0" marL="0">
+            <a:pPr marL="0" indent="0">
               <a:buNone/>
             </a:pPr>
             <a:r>
@@ -23299,7 +23889,7 @@
           <a:bodyPr wrap="square" lIns="0" tIns="0" rIns="0" bIns="0" rtlCol="0" anchor="ctr"/>
           <a:lstStyle/>
           <a:p>
-            <a:pPr algn="ctr" indent="0" marL="0">
+            <a:pPr marL="0" indent="0" algn="ctr">
               <a:buNone/>
             </a:pPr>
             <a:r>
@@ -23338,7 +23928,7 @@
           <a:bodyPr wrap="square" lIns="0" tIns="0" rIns="0" bIns="0" rtlCol="0" anchor="t"/>
           <a:lstStyle/>
           <a:p>
-            <a:pPr indent="0" marL="0">
+            <a:pPr marL="0" indent="0">
               <a:buNone/>
             </a:pPr>
             <a:r>
@@ -23377,7 +23967,7 @@
           <a:bodyPr wrap="square" lIns="0" tIns="0" rIns="0" bIns="0" rtlCol="0" anchor="t"/>
           <a:lstStyle/>
           <a:p>
-            <a:pPr indent="0" marL="0">
+            <a:pPr marL="0" indent="0">
               <a:buNone/>
             </a:pPr>
             <a:r>
@@ -23445,7 +24035,7 @@
           <a:bodyPr wrap="square" lIns="0" tIns="0" rIns="0" bIns="0" rtlCol="0" anchor="ctr"/>
           <a:lstStyle/>
           <a:p>
-            <a:pPr algn="ctr" indent="0" marL="0">
+            <a:pPr marL="0" indent="0" algn="ctr">
               <a:buNone/>
             </a:pPr>
             <a:r>
@@ -23484,7 +24074,7 @@
           <a:bodyPr wrap="square" lIns="0" tIns="0" rIns="0" bIns="0" rtlCol="0" anchor="t"/>
           <a:lstStyle/>
           <a:p>
-            <a:pPr indent="0" marL="0">
+            <a:pPr marL="0" indent="0">
               <a:buNone/>
             </a:pPr>
             <a:r>
@@ -23523,7 +24113,7 @@
           <a:bodyPr wrap="square" lIns="0" tIns="0" rIns="0" bIns="0" rtlCol="0" anchor="t"/>
           <a:lstStyle/>
           <a:p>
-            <a:pPr indent="0" marL="0">
+            <a:pPr marL="0" indent="0">
               <a:buNone/>
             </a:pPr>
             <a:r>
@@ -23595,7 +24185,7 @@
           <a:bodyPr wrap="square" lIns="0" tIns="0" rIns="0" bIns="0" rtlCol="0" anchor="ctr"/>
           <a:lstStyle/>
           <a:p>
-            <a:pPr algn="ctr" indent="0" marL="0">
+            <a:pPr marL="0" indent="0" algn="ctr">
               <a:buNone/>
             </a:pPr>
             <a:r>
@@ -23634,7 +24224,7 @@
           <a:bodyPr wrap="square" lIns="0" tIns="0" rIns="0" bIns="0" rtlCol="0" anchor="t"/>
           <a:lstStyle/>
           <a:p>
-            <a:pPr indent="0" marL="0">
+            <a:pPr marL="0" indent="0">
               <a:buNone/>
             </a:pPr>
             <a:r>
@@ -23673,7 +24263,7 @@
           <a:bodyPr wrap="square" lIns="0" tIns="0" rIns="0" bIns="0" rtlCol="0" anchor="t"/>
           <a:lstStyle/>
           <a:p>
-            <a:pPr indent="0" marL="0">
+            <a:pPr marL="0" indent="0">
               <a:buNone/>
             </a:pPr>
             <a:r>
@@ -23741,7 +24331,7 @@
           <a:bodyPr wrap="square" lIns="0" tIns="0" rIns="0" bIns="0" rtlCol="0" anchor="ctr"/>
           <a:lstStyle/>
           <a:p>
-            <a:pPr algn="ctr" indent="0" marL="0">
+            <a:pPr marL="0" indent="0" algn="ctr">
               <a:buNone/>
             </a:pPr>
             <a:r>
@@ -23780,7 +24370,7 @@
           <a:bodyPr wrap="square" lIns="0" tIns="0" rIns="0" bIns="0" rtlCol="0" anchor="t"/>
           <a:lstStyle/>
           <a:p>
-            <a:pPr indent="0" marL="0">
+            <a:pPr marL="0" indent="0">
               <a:buNone/>
             </a:pPr>
             <a:r>
@@ -23819,7 +24409,7 @@
           <a:bodyPr wrap="square" lIns="0" tIns="0" rIns="0" bIns="0" rtlCol="0" anchor="t"/>
           <a:lstStyle/>
           <a:p>
-            <a:pPr indent="0" marL="0">
+            <a:pPr marL="0" indent="0">
               <a:buNone/>
             </a:pPr>
             <a:r>
@@ -23839,7 +24429,7 @@
       </p:sp>
       <p:sp>
         <p:nvSpPr>
-          <p:cNvPr id="25" name="Slide Number Placeholder 0"/>
+          <p:cNvPr id="52" name="Slide Number Placeholder 0"/>
           <p:cNvSpPr>
             <a:spLocks noGrp="1"/>
           </p:cNvSpPr>
@@ -23857,7 +24447,7 @@
           </a:prstGeom>
           <a:extLst>
             <a:ext uri="{C572A759-6A51-4108-AA02-DFA0A04FC94B}">
-              <ma14:wrappingTextBoxFlag xmlns:ma14="http://schemas.microsoft.com/office/mac/drawingml/2011/main" val="0"/>
+              <ma14:wrappingTextBoxFlag xmlns="" xmlns:ma14="http://schemas.microsoft.com/office/mac/drawingml/2011/main" val="0"/>
             </a:ext>
           </a:extLst>
         </p:spPr>
@@ -23878,7 +24468,7 @@
           <a:p>
             <a:pPr algn="r"/>
             <a:fld id="{F7021451-1387-4CA6-816F-3879F97B5CBC}" type="slidenum">
-              <a:rPr b="0" lang="en-US"/>
+              <a:rPr lang="en-US" b="0"/>
               <a:t>7</a:t>
             </a:fld>
             <a:endParaRPr lang="en-US"/>
@@ -23913,9 +24503,11 @@
       <p:sp>
         <p:nvSpPr>
           <p:cNvPr id="2" name="Text 1"/>
-          <p:cNvSpPr/>
+          <p:cNvSpPr>
+            <a:spLocks noGrp="1"/>
+          </p:cNvSpPr>
           <p:nvPr>
-            <p:ph idx="102" type="title" hasCustomPrompt="1"/>
+            <p:ph type="title" idx="102" hasCustomPrompt="1"/>
           </p:nvPr>
         </p:nvSpPr>
         <p:spPr>
@@ -23933,7 +24525,7 @@
           <a:bodyPr wrap="square" lIns="0" tIns="0" rIns="0" bIns="0" rtlCol="0" anchor="ctr"/>
           <a:lstStyle/>
           <a:p>
-            <a:pPr algn="l" indent="0" marL="0">
+            <a:pPr marL="0" indent="0" algn="l">
               <a:buNone/>
             </a:pPr>
             <a:r>
@@ -23947,9 +24539,6 @@
               </a:rPr>
               <a:t>07  </a:t>
             </a:r>
-            <a:pPr algn="l" indent="0" marL="0">
-              <a:buNone/>
-            </a:pPr>
             <a:r>
               <a:rPr lang="en-US" sz="3200" b="1" dirty="0">
                 <a:solidFill>
@@ -24023,14 +24612,14 @@
       </p:sp>
       <p:pic>
         <p:nvPicPr>
-          <p:cNvPr id="5" name="Image 0" descr="C:/Users/49816471825/AppData/Local/Temp/lockmachine/deck/icones/browser-8C9BFF.png">    </p:cNvPr>
+          <p:cNvPr id="5" name="Image 0" descr="C:/Users/49816471825/AppData/Local/Temp/lockmachine/deck/icones/browser-8C9BFF.png"/>
           <p:cNvPicPr>
             <a:picLocks noChangeAspect="1"/>
           </p:cNvPicPr>
           <p:nvPr/>
         </p:nvPicPr>
         <p:blipFill>
-          <a:blip r:embed="rId1"/>
+          <a:blip r:embed="rId3"/>
           <a:stretch>
             <a:fillRect/>
           </a:stretch>
@@ -24066,7 +24655,7 @@
           <a:bodyPr wrap="square" lIns="0" tIns="0" rIns="0" bIns="0" rtlCol="0" anchor="t"/>
           <a:lstStyle/>
           <a:p>
-            <a:pPr indent="0" marL="0">
+            <a:pPr marL="0" indent="0">
               <a:buNone/>
             </a:pPr>
             <a:r>
@@ -24227,14 +24816,14 @@
       </p:sp>
       <p:pic>
         <p:nvPicPr>
-          <p:cNvPr id="10" name="Image 1" descr="C:/Users/49816471825/AppData/Local/Temp/lockmachine/deck/icones/server-FF7A6F.png">    </p:cNvPr>
+          <p:cNvPr id="10" name="Image 1" descr="C:/Users/49816471825/AppData/Local/Temp/lockmachine/deck/icones/server-FF7A6F.png"/>
           <p:cNvPicPr>
             <a:picLocks noChangeAspect="1"/>
           </p:cNvPicPr>
           <p:nvPr/>
         </p:nvPicPr>
         <p:blipFill>
-          <a:blip r:embed="rId2"/>
+          <a:blip r:embed="rId4"/>
           <a:stretch>
             <a:fillRect/>
           </a:stretch>
@@ -24270,7 +24859,7 @@
           <a:bodyPr wrap="square" lIns="0" tIns="0" rIns="0" bIns="0" rtlCol="0" anchor="t"/>
           <a:lstStyle/>
           <a:p>
-            <a:pPr indent="0" marL="0">
+            <a:pPr marL="0" indent="0">
               <a:buNone/>
             </a:pPr>
             <a:r>
@@ -24431,14 +25020,14 @@
       </p:sp>
       <p:pic>
         <p:nvPicPr>
-          <p:cNvPr id="15" name="Image 2" descr="C:/Users/49816471825/AppData/Local/Temp/lockmachine/deck/icones/db-22D07B.png">    </p:cNvPr>
+          <p:cNvPr id="15" name="Image 2" descr="C:/Users/49816471825/AppData/Local/Temp/lockmachine/deck/icones/db-22D07B.png"/>
           <p:cNvPicPr>
             <a:picLocks noChangeAspect="1"/>
           </p:cNvPicPr>
           <p:nvPr/>
         </p:nvPicPr>
         <p:blipFill>
-          <a:blip r:embed="rId3"/>
+          <a:blip r:embed="rId5"/>
           <a:stretch>
             <a:fillRect/>
           </a:stretch>
@@ -24474,7 +25063,7 @@
           <a:bodyPr wrap="square" lIns="0" tIns="0" rIns="0" bIns="0" rtlCol="0" anchor="t"/>
           <a:lstStyle/>
           <a:p>
-            <a:pPr indent="0" marL="0">
+            <a:pPr marL="0" indent="0">
               <a:buNone/>
             </a:pPr>
             <a:r>
@@ -24635,14 +25224,14 @@
       </p:sp>
       <p:pic>
         <p:nvPicPr>
-          <p:cNvPr id="20" name="Image 3" descr="C:/Users/49816471825/AppData/Local/Temp/lockmachine/deck/icones/chip-FFD23F.png">    </p:cNvPr>
+          <p:cNvPr id="20" name="Image 3" descr="C:/Users/49816471825/AppData/Local/Temp/lockmachine/deck/icones/chip-FFD23F.png"/>
           <p:cNvPicPr>
             <a:picLocks noChangeAspect="1"/>
           </p:cNvPicPr>
           <p:nvPr/>
         </p:nvPicPr>
         <p:blipFill>
-          <a:blip r:embed="rId4"/>
+          <a:blip r:embed="rId6"/>
           <a:stretch>
             <a:fillRect/>
           </a:stretch>
@@ -24678,7 +25267,7 @@
           <a:bodyPr wrap="square" lIns="0" tIns="0" rIns="0" bIns="0" rtlCol="0" anchor="t"/>
           <a:lstStyle/>
           <a:p>
-            <a:pPr indent="0" marL="0">
+            <a:pPr marL="0" indent="0">
               <a:buNone/>
             </a:pPr>
             <a:r>
@@ -24829,11 +25418,11 @@
           <a:bodyPr wrap="square" lIns="0" tIns="0" rIns="0" bIns="0" rtlCol="0" anchor="t"/>
           <a:lstStyle/>
           <a:p>
-            <a:pPr indent="0" marL="0">
-              <a:buNone/>
-            </a:pPr>
-            <a:r>
-              <a:rPr lang="en-US" sz="1000" b="1" spc="120" kern="0" dirty="0">
+            <a:pPr marL="0" indent="0">
+              <a:buNone/>
+            </a:pPr>
+            <a:r>
+              <a:rPr lang="en-US" sz="1000" b="1" kern="0" spc="120" dirty="0">
                 <a:solidFill>
                   <a:srgbClr val="7D849C"/>
                 </a:solidFill>
@@ -24878,14 +25467,14 @@
       </p:sp>
       <p:pic>
         <p:nvPicPr>
-          <p:cNvPr id="26" name="Image 4" descr="C:/Users/49816471825/AppData/Local/Temp/lockmachine/deck/icones/check-63E6A6.png">    </p:cNvPr>
+          <p:cNvPr id="26" name="Image 4" descr="C:/Users/49816471825/AppData/Local/Temp/lockmachine/deck/icones/check-63E6A6.png"/>
           <p:cNvPicPr>
             <a:picLocks noChangeAspect="1"/>
           </p:cNvPicPr>
           <p:nvPr/>
         </p:nvPicPr>
         <p:blipFill>
-          <a:blip r:embed="rId5"/>
+          <a:blip r:embed="rId7"/>
           <a:stretch>
             <a:fillRect/>
           </a:stretch>
@@ -24921,7 +25510,7 @@
           <a:bodyPr wrap="square" lIns="0" tIns="0" rIns="0" bIns="0" rtlCol="0" anchor="ctr"/>
           <a:lstStyle/>
           <a:p>
-            <a:pPr indent="0" marL="0">
+            <a:pPr marL="0" indent="0">
               <a:buNone/>
             </a:pPr>
             <a:r>
@@ -24970,14 +25559,14 @@
       </p:sp>
       <p:pic>
         <p:nvPicPr>
-          <p:cNvPr id="29" name="Image 5" descr="C:/Users/49816471825/AppData/Local/Temp/lockmachine/deck/icones/check-63E6A6.png">    </p:cNvPr>
+          <p:cNvPr id="29" name="Image 5" descr="C:/Users/49816471825/AppData/Local/Temp/lockmachine/deck/icones/check-63E6A6.png"/>
           <p:cNvPicPr>
             <a:picLocks noChangeAspect="1"/>
           </p:cNvPicPr>
           <p:nvPr/>
         </p:nvPicPr>
         <p:blipFill>
-          <a:blip r:embed="rId6"/>
+          <a:blip r:embed="rId7"/>
           <a:stretch>
             <a:fillRect/>
           </a:stretch>
@@ -25013,7 +25602,7 @@
           <a:bodyPr wrap="square" lIns="0" tIns="0" rIns="0" bIns="0" rtlCol="0" anchor="ctr"/>
           <a:lstStyle/>
           <a:p>
-            <a:pPr indent="0" marL="0">
+            <a:pPr marL="0" indent="0">
               <a:buNone/>
             </a:pPr>
             <a:r>
@@ -25062,7 +25651,7 @@
       </p:sp>
       <p:pic>
         <p:nvPicPr>
-          <p:cNvPr id="32" name="Image 6" descr="C:/Users/49816471825/AppData/Local/Temp/lockmachine/deck/icones/check-63E6A6.png">    </p:cNvPr>
+          <p:cNvPr id="32" name="Image 6" descr="C:/Users/49816471825/AppData/Local/Temp/lockmachine/deck/icones/check-63E6A6.png"/>
           <p:cNvPicPr>
             <a:picLocks noChangeAspect="1"/>
           </p:cNvPicPr>
@@ -25105,7 +25694,7 @@
           <a:bodyPr wrap="square" lIns="0" tIns="0" rIns="0" bIns="0" rtlCol="0" anchor="ctr"/>
           <a:lstStyle/>
           <a:p>
-            <a:pPr indent="0" marL="0">
+            <a:pPr marL="0" indent="0">
               <a:buNone/>
             </a:pPr>
             <a:r>
@@ -25125,7 +25714,7 @@
       </p:sp>
       <p:sp>
         <p:nvSpPr>
-          <p:cNvPr id="25" name="Slide Number Placeholder 0"/>
+          <p:cNvPr id="34" name="Slide Number Placeholder 0"/>
           <p:cNvSpPr>
             <a:spLocks noGrp="1"/>
           </p:cNvSpPr>
@@ -25143,7 +25732,7 @@
           </a:prstGeom>
           <a:extLst>
             <a:ext uri="{C572A759-6A51-4108-AA02-DFA0A04FC94B}">
-              <ma14:wrappingTextBoxFlag xmlns:ma14="http://schemas.microsoft.com/office/mac/drawingml/2011/main" val="0"/>
+              <ma14:wrappingTextBoxFlag xmlns="" xmlns:ma14="http://schemas.microsoft.com/office/mac/drawingml/2011/main" val="0"/>
             </a:ext>
           </a:extLst>
         </p:spPr>
@@ -25164,7 +25753,7 @@
           <a:p>
             <a:pPr algn="r"/>
             <a:fld id="{F7021451-1387-4CA6-816F-3879F97B5CBC}" type="slidenum">
-              <a:rPr b="0" lang="en-US"/>
+              <a:rPr lang="en-US" b="0"/>
               <a:t>8</a:t>
             </a:fld>
             <a:endParaRPr lang="en-US"/>
@@ -25199,9 +25788,11 @@
       <p:sp>
         <p:nvSpPr>
           <p:cNvPr id="2" name="Text 1"/>
-          <p:cNvSpPr/>
+          <p:cNvSpPr>
+            <a:spLocks noGrp="1"/>
+          </p:cNvSpPr>
           <p:nvPr>
-            <p:ph idx="102" type="title" hasCustomPrompt="1"/>
+            <p:ph type="title" idx="102" hasCustomPrompt="1"/>
           </p:nvPr>
         </p:nvSpPr>
         <p:spPr>
@@ -25219,7 +25810,7 @@
           <a:bodyPr wrap="square" lIns="0" tIns="0" rIns="0" bIns="0" rtlCol="0" anchor="ctr"/>
           <a:lstStyle/>
           <a:p>
-            <a:pPr algn="l" indent="0" marL="0">
+            <a:pPr marL="0" indent="0" algn="l">
               <a:buNone/>
             </a:pPr>
             <a:r>
@@ -25233,9 +25824,6 @@
               </a:rPr>
               <a:t>08  </a:t>
             </a:r>
-            <a:pPr algn="l" indent="0" marL="0">
-              <a:buNone/>
-            </a:pPr>
             <a:r>
               <a:rPr lang="en-US" sz="3200" b="1" dirty="0">
                 <a:solidFill>
@@ -25272,7 +25860,7 @@
           <a:bodyPr wrap="square" lIns="0" tIns="0" rIns="0" bIns="0" rtlCol="0" anchor="t"/>
           <a:lstStyle/>
           <a:p>
-            <a:pPr indent="0" marL="0">
+            <a:pPr marL="0" indent="0">
               <a:buNone/>
             </a:pPr>
             <a:r>
@@ -25311,7 +25899,7 @@
           </a:solidFill>
           <a:ln/>
           <a:effectLst>
-            <a:outerShdw sx="100000" sy="100000" kx="0" ky="0" algn="bl" rotWithShape="0" blurRad="177800" dist="63500" dir="5400000">
+            <a:outerShdw blurRad="177800" dist="63500" dir="5400000" algn="bl" rotWithShape="0">
               <a:srgbClr val="000000">
                 <a:alpha val="50000"/>
               </a:srgbClr>
@@ -25322,43 +25910,12 @@
           <a:bodyPr wrap="square" lIns="127000" tIns="127000" rIns="127000" bIns="127000" rtlCol="0" anchor="ctr"/>
           <a:lstStyle/>
           <a:p>
-            <a:pPr indent="0" marL="0">
+            <a:pPr marL="0" indent="0">
               <a:spcAft>
                 <a:spcPts val="200"/>
               </a:spcAft>
               <a:buNone/>
             </a:pPr>
-            <a:r>
-              <a:rPr lang="en-US" sz="1400" b="1" dirty="0">
-                <a:solidFill>
-                  <a:srgbClr val="1C212D"/>
-                </a:solidFill>
-                <a:latin typeface="Archivo" pitchFamily="34" charset="0"/>
-                <a:ea typeface="Archivo" pitchFamily="34" charset="-122"/>
-                <a:cs typeface="Archivo" pitchFamily="34" charset="-120"/>
-              </a:rPr>
-              <a:t>Cartão RFID</a:t>
-            </a:r>
-            <a:endParaRPr lang="en-US" sz="1400" dirty="0"/>
-          </a:p>
-          <a:p>
-            <a:pPr indent="0" marL="0">
-              <a:spcAft>
-                <a:spcPts val="200"/>
-              </a:spcAft>
-              <a:buNone/>
-            </a:pPr>
-            <a:r>
-              <a:rPr lang="en-US" sz="1000" dirty="0">
-                <a:solidFill>
-                  <a:srgbClr val="4A5064"/>
-                </a:solidFill>
-                <a:latin typeface="Martian Mono" pitchFamily="34" charset="0"/>
-                <a:ea typeface="Martian Mono" pitchFamily="34" charset="-122"/>
-                <a:cs typeface="Martian Mono" pitchFamily="34" charset="-120"/>
-              </a:rPr>
-              <a:t>UID 04A1••••D4</a:t>
-            </a:r>
             <a:endParaRPr lang="en-US" sz="1400" dirty="0"/>
           </a:p>
         </p:txBody>
@@ -25445,14 +26002,14 @@
       </p:sp>
       <p:pic>
         <p:nvPicPr>
-          <p:cNvPr id="8" name="Image 0" descr="C:/Users/49816471825/AppData/Local/Temp/lockmachine/deck/icones/chip-FFD23F.png">    </p:cNvPr>
+          <p:cNvPr id="8" name="Image 0" descr="C:/Users/49816471825/AppData/Local/Temp/lockmachine/deck/icones/chip-FFD23F.png"/>
           <p:cNvPicPr>
             <a:picLocks noChangeAspect="1"/>
           </p:cNvPicPr>
           <p:nvPr/>
         </p:nvPicPr>
         <p:blipFill>
-          <a:blip r:embed="rId1"/>
+          <a:blip r:embed="rId3"/>
           <a:stretch>
             <a:fillRect/>
           </a:stretch>
@@ -25488,7 +26045,7 @@
           <a:bodyPr wrap="square" lIns="0" tIns="0" rIns="0" bIns="0" rtlCol="0" anchor="ctr"/>
           <a:lstStyle/>
           <a:p>
-            <a:pPr indent="0" marL="0">
+            <a:pPr marL="0" indent="0">
               <a:buNone/>
             </a:pPr>
             <a:r>
@@ -25527,7 +26084,7 @@
           <a:bodyPr wrap="square" lIns="0" tIns="0" rIns="0" bIns="0" rtlCol="0" anchor="t"/>
           <a:lstStyle/>
           <a:p>
-            <a:pPr indent="0" marL="0">
+            <a:pPr marL="0" indent="0">
               <a:buNone/>
             </a:pPr>
             <a:r>
@@ -25544,7 +26101,7 @@
             <a:endParaRPr lang="en-US" sz="1200" dirty="0"/>
           </a:p>
           <a:p>
-            <a:pPr indent="0" marL="0">
+            <a:pPr marL="0" indent="0">
               <a:buNone/>
             </a:pPr>
             <a:r>
@@ -25620,14 +26177,14 @@
       </p:sp>
       <p:pic>
         <p:nvPicPr>
-          <p:cNvPr id="13" name="Image 1" descr="C:/Users/49816471825/AppData/Local/Temp/lockmachine/deck/icones/server-FF7A6F.png">    </p:cNvPr>
+          <p:cNvPr id="13" name="Image 1" descr="C:/Users/49816471825/AppData/Local/Temp/lockmachine/deck/icones/server-FF7A6F.png"/>
           <p:cNvPicPr>
             <a:picLocks noChangeAspect="1"/>
           </p:cNvPicPr>
           <p:nvPr/>
         </p:nvPicPr>
         <p:blipFill>
-          <a:blip r:embed="rId2"/>
+          <a:blip r:embed="rId4"/>
           <a:stretch>
             <a:fillRect/>
           </a:stretch>
@@ -25663,7 +26220,7 @@
           <a:bodyPr wrap="square" lIns="0" tIns="0" rIns="0" bIns="0" rtlCol="0" anchor="ctr"/>
           <a:lstStyle/>
           <a:p>
-            <a:pPr indent="0" marL="0">
+            <a:pPr marL="0" indent="0">
               <a:buNone/>
             </a:pPr>
             <a:r>
@@ -25702,7 +26259,7 @@
           <a:bodyPr wrap="square" lIns="0" tIns="0" rIns="0" bIns="0" rtlCol="0" anchor="t"/>
           <a:lstStyle/>
           <a:p>
-            <a:pPr indent="0" marL="0">
+            <a:pPr marL="0" indent="0">
               <a:buNone/>
             </a:pPr>
             <a:r>
@@ -25719,7 +26276,7 @@
             <a:endParaRPr lang="en-US" sz="1200" dirty="0"/>
           </a:p>
           <a:p>
-            <a:pPr indent="0" marL="0">
+            <a:pPr marL="0" indent="0">
               <a:buNone/>
             </a:pPr>
             <a:r>
@@ -25795,14 +26352,14 @@
       </p:sp>
       <p:pic>
         <p:nvPicPr>
-          <p:cNvPr id="18" name="Image 2" descr="C:/Users/49816471825/AppData/Local/Temp/lockmachine/deck/icones/db-22D07B.png">    </p:cNvPr>
+          <p:cNvPr id="18" name="Image 2" descr="C:/Users/49816471825/AppData/Local/Temp/lockmachine/deck/icones/db-22D07B.png"/>
           <p:cNvPicPr>
             <a:picLocks noChangeAspect="1"/>
           </p:cNvPicPr>
           <p:nvPr/>
         </p:nvPicPr>
         <p:blipFill>
-          <a:blip r:embed="rId3"/>
+          <a:blip r:embed="rId5"/>
           <a:stretch>
             <a:fillRect/>
           </a:stretch>
@@ -25838,7 +26395,7 @@
           <a:bodyPr wrap="square" lIns="0" tIns="0" rIns="0" bIns="0" rtlCol="0" anchor="ctr"/>
           <a:lstStyle/>
           <a:p>
-            <a:pPr indent="0" marL="0">
+            <a:pPr marL="0" indent="0">
               <a:buNone/>
             </a:pPr>
             <a:r>
@@ -25877,7 +26434,7 @@
           <a:bodyPr wrap="square" lIns="0" tIns="0" rIns="0" bIns="0" rtlCol="0" anchor="t"/>
           <a:lstStyle/>
           <a:p>
-            <a:pPr indent="0" marL="0">
+            <a:pPr marL="0" indent="0">
               <a:buNone/>
             </a:pPr>
             <a:r>
@@ -25894,7 +26451,7 @@
             <a:endParaRPr lang="en-US" sz="1200" dirty="0"/>
           </a:p>
           <a:p>
-            <a:pPr indent="0" marL="0">
+            <a:pPr marL="0" indent="0">
               <a:buNone/>
             </a:pPr>
             <a:r>
@@ -25970,14 +26527,14 @@
       </p:sp>
       <p:pic>
         <p:nvPicPr>
-          <p:cNvPr id="23" name="Image 3" descr="C:/Users/49816471825/AppData/Local/Temp/lockmachine/deck/icones/waves-FFD23F.png">    </p:cNvPr>
+          <p:cNvPr id="23" name="Image 3" descr="C:/Users/49816471825/AppData/Local/Temp/lockmachine/deck/icones/waves-FFD23F.png"/>
           <p:cNvPicPr>
             <a:picLocks noChangeAspect="1"/>
           </p:cNvPicPr>
           <p:nvPr/>
         </p:nvPicPr>
         <p:blipFill>
-          <a:blip r:embed="rId4"/>
+          <a:blip r:embed="rId6"/>
           <a:stretch>
             <a:fillRect/>
           </a:stretch>
@@ -26013,7 +26570,7 @@
           <a:bodyPr wrap="square" lIns="0" tIns="0" rIns="0" bIns="0" rtlCol="0" anchor="t"/>
           <a:lstStyle/>
           <a:p>
-            <a:pPr indent="0" marL="0">
+            <a:pPr marL="0" indent="0">
               <a:buNone/>
             </a:pPr>
             <a:r>
@@ -26089,14 +26646,14 @@
       </p:sp>
       <p:pic>
         <p:nvPicPr>
-          <p:cNvPr id="27" name="Image 4" descr="C:/Users/49816471825/AppData/Local/Temp/lockmachine/deck/icones/browser-8C9BFF.png">    </p:cNvPr>
+          <p:cNvPr id="27" name="Image 4" descr="C:/Users/49816471825/AppData/Local/Temp/lockmachine/deck/icones/browser-8C9BFF.png"/>
           <p:cNvPicPr>
             <a:picLocks noChangeAspect="1"/>
           </p:cNvPicPr>
           <p:nvPr/>
         </p:nvPicPr>
         <p:blipFill>
-          <a:blip r:embed="rId5"/>
+          <a:blip r:embed="rId7"/>
           <a:stretch>
             <a:fillRect/>
           </a:stretch>
@@ -26132,7 +26689,7 @@
           <a:bodyPr wrap="square" lIns="0" tIns="0" rIns="0" bIns="0" rtlCol="0" anchor="ctr"/>
           <a:lstStyle/>
           <a:p>
-            <a:pPr indent="0" marL="0">
+            <a:pPr marL="0" indent="0">
               <a:buNone/>
             </a:pPr>
             <a:r>
@@ -26171,7 +26728,7 @@
           <a:bodyPr wrap="square" lIns="0" tIns="0" rIns="0" bIns="0" rtlCol="0" anchor="t"/>
           <a:lstStyle/>
           <a:p>
-            <a:pPr indent="0" marL="0">
+            <a:pPr marL="0" indent="0">
               <a:buNone/>
             </a:pPr>
             <a:r>
@@ -26188,7 +26745,7 @@
             <a:endParaRPr lang="en-US" sz="1200" dirty="0"/>
           </a:p>
           <a:p>
-            <a:pPr indent="0" marL="0">
+            <a:pPr marL="0" indent="0">
               <a:buNone/>
             </a:pPr>
             <a:r>
@@ -26252,7 +26809,7 @@
           <a:bodyPr wrap="square" lIns="0" tIns="0" rIns="0" bIns="0" rtlCol="0" anchor="t"/>
           <a:lstStyle/>
           <a:p>
-            <a:pPr algn="ctr" indent="0" marL="0">
+            <a:pPr marL="0" indent="0" algn="ctr">
               <a:buNone/>
             </a:pPr>
             <a:r>
@@ -26291,7 +26848,7 @@
           <a:bodyPr wrap="square" lIns="0" tIns="0" rIns="0" bIns="0" rtlCol="0" anchor="t"/>
           <a:lstStyle/>
           <a:p>
-            <a:pPr algn="ctr" indent="0" marL="0">
+            <a:pPr marL="0" indent="0" algn="ctr">
               <a:buNone/>
             </a:pPr>
             <a:r>
@@ -26380,7 +26937,7 @@
           <a:bodyPr wrap="square" lIns="0" tIns="0" rIns="0" bIns="0" rtlCol="0" anchor="t"/>
           <a:lstStyle/>
           <a:p>
-            <a:pPr indent="0" marL="0">
+            <a:pPr marL="0" indent="0">
               <a:buNone/>
             </a:pPr>
             <a:r>
@@ -26446,7 +27003,7 @@
           <a:bodyPr wrap="square" lIns="0" tIns="0" rIns="0" bIns="0" rtlCol="0" anchor="t"/>
           <a:lstStyle/>
           <a:p>
-            <a:pPr indent="0" marL="0">
+            <a:pPr marL="0" indent="0">
               <a:buNone/>
             </a:pPr>
             <a:r>
@@ -26485,7 +27042,7 @@
           <a:bodyPr wrap="square" lIns="0" tIns="0" rIns="0" bIns="0" rtlCol="0" anchor="t"/>
           <a:lstStyle/>
           <a:p>
-            <a:pPr indent="0" marL="0">
+            <a:pPr marL="0" indent="0">
               <a:buNone/>
             </a:pPr>
             <a:r>
@@ -26505,7 +27062,7 @@
       </p:sp>
       <p:sp>
         <p:nvSpPr>
-          <p:cNvPr id="25" name="Slide Number Placeholder 0"/>
+          <p:cNvPr id="39" name="Slide Number Placeholder 0"/>
           <p:cNvSpPr>
             <a:spLocks noGrp="1"/>
           </p:cNvSpPr>
@@ -26523,7 +27080,7 @@
           </a:prstGeom>
           <a:extLst>
             <a:ext uri="{C572A759-6A51-4108-AA02-DFA0A04FC94B}">
-              <ma14:wrappingTextBoxFlag xmlns:ma14="http://schemas.microsoft.com/office/mac/drawingml/2011/main" val="0"/>
+              <ma14:wrappingTextBoxFlag xmlns="" xmlns:ma14="http://schemas.microsoft.com/office/mac/drawingml/2011/main" val="0"/>
             </a:ext>
           </a:extLst>
         </p:spPr>
@@ -26544,10 +27101,103 @@
           <a:p>
             <a:pPr algn="r"/>
             <a:fld id="{F7021451-1387-4CA6-816F-3879F97B5CBC}" type="slidenum">
-              <a:rPr b="0" lang="en-US"/>
+              <a:rPr lang="en-US" b="0"/>
               <a:t>9</a:t>
             </a:fld>
             <a:endParaRPr lang="en-US"/>
+          </a:p>
+        </p:txBody>
+      </p:sp>
+      <p:sp>
+        <p:nvSpPr>
+          <p:cNvPr id="40" name="Text 2 texto">
+            <a:extLst>
+              <a:ext uri="{FF2B5EF4-FFF2-40B4-BE49-F238E27FC236}">
+                <a16:creationId xmlns:a16="http://schemas.microsoft.com/office/drawing/2014/main" id="{6FB1C407-6A93-6675-41FC-69741A336353}"/>
+              </a:ext>
+            </a:extLst>
+          </p:cNvPr>
+          <p:cNvSpPr/>
+          <p:nvPr/>
+        </p:nvSpPr>
+        <p:spPr>
+          <a:xfrm rot="21360000">
+            <a:off x="675640" y="2641600"/>
+            <a:ext cx="1529080" cy="797560"/>
+          </a:xfrm>
+          <a:prstGeom prst="roundRect">
+            <a:avLst>
+              <a:gd name="adj" fmla="val 8696"/>
+            </a:avLst>
+          </a:prstGeom>
+          <a:noFill/>
+          <a:ln/>
+          <a:effectLst/>
+          <a:extLst>
+            <a:ext uri="{909E8E84-426E-40DD-AFC4-6F175D3DCCD1}">
+              <a14:hiddenFill xmlns:a14="http://schemas.microsoft.com/office/drawing/2010/main">
+                <a:solidFill>
+                  <a:srgbClr val="E9EBF2"/>
+                </a:solidFill>
+              </a14:hiddenFill>
+            </a:ext>
+            <a:ext uri="{AF507438-7753-43E0-B8FC-AC1667EBCBE1}">
+              <a14:hiddenEffects xmlns:a14="http://schemas.microsoft.com/office/drawing/2010/main">
+                <a:effectLst>
+                  <a:outerShdw blurRad="177800" dist="63500" dir="5400000" algn="bl" rotWithShape="0">
+                    <a:srgbClr val="000000">
+                      <a:alpha val="50000"/>
+                    </a:srgbClr>
+                  </a:outerShdw>
+                </a:effectLst>
+              </a14:hiddenEffects>
+            </a:ext>
+          </a:extLst>
+        </p:spPr>
+        <p:txBody>
+          <a:bodyPr wrap="square" lIns="0" tIns="0" rIns="0" bIns="0" rtlCol="0" anchor="ctr">
+            <a:noAutofit/>
+          </a:bodyPr>
+          <a:lstStyle/>
+          <a:p>
+            <a:pPr marL="0" indent="0">
+              <a:spcAft>
+                <a:spcPts val="200"/>
+              </a:spcAft>
+              <a:buNone/>
+            </a:pPr>
+            <a:r>
+              <a:rPr lang="en-US" sz="1400" b="1" dirty="0">
+                <a:solidFill>
+                  <a:srgbClr val="1C212D"/>
+                </a:solidFill>
+                <a:latin typeface="Archivo" pitchFamily="34" charset="0"/>
+                <a:ea typeface="Archivo" pitchFamily="34" charset="-122"/>
+                <a:cs typeface="Archivo" pitchFamily="34" charset="-120"/>
+              </a:rPr>
+              <a:t>Cartão RFID</a:t>
+            </a:r>
+            <a:endParaRPr lang="en-US" sz="1400" dirty="0"/>
+          </a:p>
+          <a:p>
+            <a:pPr marL="0" indent="0">
+              <a:spcAft>
+                <a:spcPts val="200"/>
+              </a:spcAft>
+              <a:buNone/>
+            </a:pPr>
+            <a:r>
+              <a:rPr lang="en-US" sz="1000" dirty="0">
+                <a:solidFill>
+                  <a:srgbClr val="4A5064"/>
+                </a:solidFill>
+                <a:latin typeface="Martian Mono" pitchFamily="34" charset="0"/>
+                <a:ea typeface="Martian Mono" pitchFamily="34" charset="-122"/>
+                <a:cs typeface="Martian Mono" pitchFamily="34" charset="-120"/>
+              </a:rPr>
+              <a:t>UID 04A1••••D4</a:t>
+            </a:r>
+            <a:endParaRPr lang="en-US" sz="1400" dirty="0"/>
           </a:p>
         </p:txBody>
       </p:sp>
@@ -26852,4 +27502,299 @@
     </a:ext>
   </a:extLst>
 </a:theme>
+</file>
+
+<file path=ppt/theme/theme2.xml><?xml version="1.0" encoding="utf-8"?>
+<a:theme xmlns:a="http://schemas.openxmlformats.org/drawingml/2006/main" name="Tema do Office">
+  <a:themeElements>
+    <a:clrScheme name="Office">
+      <a:dk1>
+        <a:sysClr val="windowText" lastClr="000000"/>
+      </a:dk1>
+      <a:lt1>
+        <a:sysClr val="window" lastClr="FFFFFF"/>
+      </a:lt1>
+      <a:dk2>
+        <a:srgbClr val="44546A"/>
+      </a:dk2>
+      <a:lt2>
+        <a:srgbClr val="E7E6E6"/>
+      </a:lt2>
+      <a:accent1>
+        <a:srgbClr val="4472C4"/>
+      </a:accent1>
+      <a:accent2>
+        <a:srgbClr val="ED7D31"/>
+      </a:accent2>
+      <a:accent3>
+        <a:srgbClr val="A5A5A5"/>
+      </a:accent3>
+      <a:accent4>
+        <a:srgbClr val="FFC000"/>
+      </a:accent4>
+      <a:accent5>
+        <a:srgbClr val="5B9BD5"/>
+      </a:accent5>
+      <a:accent6>
+        <a:srgbClr val="70AD47"/>
+      </a:accent6>
+      <a:hlink>
+        <a:srgbClr val="0563C1"/>
+      </a:hlink>
+      <a:folHlink>
+        <a:srgbClr val="954F72"/>
+      </a:folHlink>
+    </a:clrScheme>
+    <a:fontScheme name="Office">
+      <a:majorFont>
+        <a:latin typeface="Calibri Light" panose="020F0302020204030204"/>
+        <a:ea typeface=""/>
+        <a:cs typeface=""/>
+        <a:font script="Jpan" typeface="游ゴシック Light"/>
+        <a:font script="Hang" typeface="맑은 고딕"/>
+        <a:font script="Hans" typeface="等线 Light"/>
+        <a:font script="Hant" typeface="新細明體"/>
+        <a:font script="Arab" typeface="Times New Roman"/>
+        <a:font script="Hebr" typeface="Times New Roman"/>
+        <a:font script="Thai" typeface="Angsana New"/>
+        <a:font script="Ethi" typeface="Nyala"/>
+        <a:font script="Beng" typeface="Vrinda"/>
+        <a:font script="Gujr" typeface="Shruti"/>
+        <a:font script="Khmr" typeface="MoolBoran"/>
+        <a:font script="Knda" typeface="Tunga"/>
+        <a:font script="Guru" typeface="Raavi"/>
+        <a:font script="Cans" typeface="Euphemia"/>
+        <a:font script="Cher" typeface="Plantagenet Cherokee"/>
+        <a:font script="Yiii" typeface="Microsoft Yi Baiti"/>
+        <a:font script="Tibt" typeface="Microsoft Himalaya"/>
+        <a:font script="Thaa" typeface="MV Boli"/>
+        <a:font script="Deva" typeface="Mangal"/>
+        <a:font script="Telu" typeface="Gautami"/>
+        <a:font script="Taml" typeface="Latha"/>
+        <a:font script="Syrc" typeface="Estrangelo Edessa"/>
+        <a:font script="Orya" typeface="Kalinga"/>
+        <a:font script="Mlym" typeface="Kartika"/>
+        <a:font script="Laoo" typeface="DokChampa"/>
+        <a:font script="Sinh" typeface="Iskoola Pota"/>
+        <a:font script="Mong" typeface="Mongolian Baiti"/>
+        <a:font script="Viet" typeface="Times New Roman"/>
+        <a:font script="Uigh" typeface="Microsoft Uighur"/>
+        <a:font script="Geor" typeface="Sylfaen"/>
+        <a:font script="Armn" typeface="Arial"/>
+        <a:font script="Bugi" typeface="Leelawadee UI"/>
+        <a:font script="Bopo" typeface="Microsoft JhengHei"/>
+        <a:font script="Java" typeface="Javanese Text"/>
+        <a:font script="Lisu" typeface="Segoe UI"/>
+        <a:font script="Mymr" typeface="Myanmar Text"/>
+        <a:font script="Nkoo" typeface="Ebrima"/>
+        <a:font script="Olck" typeface="Nirmala UI"/>
+        <a:font script="Osma" typeface="Ebrima"/>
+        <a:font script="Phag" typeface="Phagspa"/>
+        <a:font script="Syrn" typeface="Estrangelo Edessa"/>
+        <a:font script="Syrj" typeface="Estrangelo Edessa"/>
+        <a:font script="Syre" typeface="Estrangelo Edessa"/>
+        <a:font script="Sora" typeface="Nirmala UI"/>
+        <a:font script="Tale" typeface="Microsoft Tai Le"/>
+        <a:font script="Talu" typeface="Microsoft New Tai Lue"/>
+        <a:font script="Tfng" typeface="Ebrima"/>
+      </a:majorFont>
+      <a:minorFont>
+        <a:latin typeface="Calibri" panose="020F0502020204030204"/>
+        <a:ea typeface=""/>
+        <a:cs typeface=""/>
+        <a:font script="Jpan" typeface="游ゴシック"/>
+        <a:font script="Hang" typeface="맑은 고딕"/>
+        <a:font script="Hans" typeface="等线"/>
+        <a:font script="Hant" typeface="新細明體"/>
+        <a:font script="Arab" typeface="Arial"/>
+        <a:font script="Hebr" typeface="Arial"/>
+        <a:font script="Thai" typeface="Cordia New"/>
+        <a:font script="Ethi" typeface="Nyala"/>
+        <a:font script="Beng" typeface="Vrinda"/>
+        <a:font script="Gujr" typeface="Shruti"/>
+        <a:font script="Khmr" typeface="DaunPenh"/>
+        <a:font script="Knda" typeface="Tunga"/>
+        <a:font script="Guru" typeface="Raavi"/>
+        <a:font script="Cans" typeface="Euphemia"/>
+        <a:font script="Cher" typeface="Plantagenet Cherokee"/>
+        <a:font script="Yiii" typeface="Microsoft Yi Baiti"/>
+        <a:font script="Tibt" typeface="Microsoft Himalaya"/>
+        <a:font script="Thaa" typeface="MV Boli"/>
+        <a:font script="Deva" typeface="Mangal"/>
+        <a:font script="Telu" typeface="Gautami"/>
+        <a:font script="Taml" typeface="Latha"/>
+        <a:font script="Syrc" typeface="Estrangelo Edessa"/>
+        <a:font script="Orya" typeface="Kalinga"/>
+        <a:font script="Mlym" typeface="Kartika"/>
+        <a:font script="Laoo" typeface="DokChampa"/>
+        <a:font script="Sinh" typeface="Iskoola Pota"/>
+        <a:font script="Mong" typeface="Mongolian Baiti"/>
+        <a:font script="Viet" typeface="Arial"/>
+        <a:font script="Uigh" typeface="Microsoft Uighur"/>
+        <a:font script="Geor" typeface="Sylfaen"/>
+        <a:font script="Armn" typeface="Arial"/>
+        <a:font script="Bugi" typeface="Leelawadee UI"/>
+        <a:font script="Bopo" typeface="Microsoft JhengHei"/>
+        <a:font script="Java" typeface="Javanese Text"/>
+        <a:font script="Lisu" typeface="Segoe UI"/>
+        <a:font script="Mymr" typeface="Myanmar Text"/>
+        <a:font script="Nkoo" typeface="Ebrima"/>
+        <a:font script="Olck" typeface="Nirmala UI"/>
+        <a:font script="Osma" typeface="Ebrima"/>
+        <a:font script="Phag" typeface="Phagspa"/>
+        <a:font script="Syrn" typeface="Estrangelo Edessa"/>
+        <a:font script="Syrj" typeface="Estrangelo Edessa"/>
+        <a:font script="Syre" typeface="Estrangelo Edessa"/>
+        <a:font script="Sora" typeface="Nirmala UI"/>
+        <a:font script="Tale" typeface="Microsoft Tai Le"/>
+        <a:font script="Talu" typeface="Microsoft New Tai Lue"/>
+        <a:font script="Tfng" typeface="Ebrima"/>
+      </a:minorFont>
+    </a:fontScheme>
+    <a:fmtScheme name="Office">
+      <a:fillStyleLst>
+        <a:solidFill>
+          <a:schemeClr val="phClr"/>
+        </a:solidFill>
+        <a:gradFill rotWithShape="1">
+          <a:gsLst>
+            <a:gs pos="0">
+              <a:schemeClr val="phClr">
+                <a:lumMod val="110000"/>
+                <a:satMod val="105000"/>
+                <a:tint val="67000"/>
+              </a:schemeClr>
+            </a:gs>
+            <a:gs pos="50000">
+              <a:schemeClr val="phClr">
+                <a:lumMod val="105000"/>
+                <a:satMod val="103000"/>
+                <a:tint val="73000"/>
+              </a:schemeClr>
+            </a:gs>
+            <a:gs pos="100000">
+              <a:schemeClr val="phClr">
+                <a:lumMod val="105000"/>
+                <a:satMod val="109000"/>
+                <a:tint val="81000"/>
+              </a:schemeClr>
+            </a:gs>
+          </a:gsLst>
+          <a:lin ang="5400000" scaled="0"/>
+        </a:gradFill>
+        <a:gradFill rotWithShape="1">
+          <a:gsLst>
+            <a:gs pos="0">
+              <a:schemeClr val="phClr">
+                <a:satMod val="103000"/>
+                <a:lumMod val="102000"/>
+                <a:tint val="94000"/>
+              </a:schemeClr>
+            </a:gs>
+            <a:gs pos="50000">
+              <a:schemeClr val="phClr">
+                <a:satMod val="110000"/>
+                <a:lumMod val="100000"/>
+                <a:shade val="100000"/>
+              </a:schemeClr>
+            </a:gs>
+            <a:gs pos="100000">
+              <a:schemeClr val="phClr">
+                <a:lumMod val="99000"/>
+                <a:satMod val="120000"/>
+                <a:shade val="78000"/>
+              </a:schemeClr>
+            </a:gs>
+          </a:gsLst>
+          <a:lin ang="5400000" scaled="0"/>
+        </a:gradFill>
+      </a:fillStyleLst>
+      <a:lnStyleLst>
+        <a:ln w="6350" cap="flat" cmpd="sng" algn="ctr">
+          <a:solidFill>
+            <a:schemeClr val="phClr"/>
+          </a:solidFill>
+          <a:prstDash val="solid"/>
+          <a:miter lim="800000"/>
+        </a:ln>
+        <a:ln w="12700" cap="flat" cmpd="sng" algn="ctr">
+          <a:solidFill>
+            <a:schemeClr val="phClr"/>
+          </a:solidFill>
+          <a:prstDash val="solid"/>
+          <a:miter lim="800000"/>
+        </a:ln>
+        <a:ln w="19050" cap="flat" cmpd="sng" algn="ctr">
+          <a:solidFill>
+            <a:schemeClr val="phClr"/>
+          </a:solidFill>
+          <a:prstDash val="solid"/>
+          <a:miter lim="800000"/>
+        </a:ln>
+      </a:lnStyleLst>
+      <a:effectStyleLst>
+        <a:effectStyle>
+          <a:effectLst/>
+        </a:effectStyle>
+        <a:effectStyle>
+          <a:effectLst/>
+        </a:effectStyle>
+        <a:effectStyle>
+          <a:effectLst>
+            <a:outerShdw blurRad="57150" dist="19050" dir="5400000" algn="ctr" rotWithShape="0">
+              <a:srgbClr val="000000">
+                <a:alpha val="63000"/>
+              </a:srgbClr>
+            </a:outerShdw>
+          </a:effectLst>
+        </a:effectStyle>
+      </a:effectStyleLst>
+      <a:bgFillStyleLst>
+        <a:solidFill>
+          <a:schemeClr val="phClr"/>
+        </a:solidFill>
+        <a:solidFill>
+          <a:schemeClr val="phClr">
+            <a:tint val="95000"/>
+            <a:satMod val="170000"/>
+          </a:schemeClr>
+        </a:solidFill>
+        <a:gradFill rotWithShape="1">
+          <a:gsLst>
+            <a:gs pos="0">
+              <a:schemeClr val="phClr">
+                <a:tint val="93000"/>
+                <a:satMod val="150000"/>
+                <a:shade val="98000"/>
+                <a:lumMod val="102000"/>
+              </a:schemeClr>
+            </a:gs>
+            <a:gs pos="50000">
+              <a:schemeClr val="phClr">
+                <a:tint val="98000"/>
+                <a:satMod val="130000"/>
+                <a:shade val="90000"/>
+                <a:lumMod val="103000"/>
+              </a:schemeClr>
+            </a:gs>
+            <a:gs pos="100000">
+              <a:schemeClr val="phClr">
+                <a:shade val="63000"/>
+                <a:satMod val="120000"/>
+              </a:schemeClr>
+            </a:gs>
+          </a:gsLst>
+          <a:lin ang="5400000" scaled="0"/>
+        </a:gradFill>
+      </a:bgFillStyleLst>
+    </a:fmtScheme>
+  </a:themeElements>
+  <a:objectDefaults/>
+  <a:extraClrSchemeLst/>
+  <a:extLst>
+    <a:ext uri="{05A4C25C-085E-4340-85A3-A5531E510DB2}">
+      <thm15:themeFamily xmlns:thm15="http://schemas.microsoft.com/office/thememl/2012/main" name="Office Theme" id="{62F939B6-93AF-4DB8-9C6B-D6C7DFDC589F}" vid="{4A3C46E8-61CC-4603-A589-7422A47A8E4A}"/>
+    </a:ext>
+  </a:extLst>
+</a:theme>
 </file>